--- a/figures/fig3/fig3.pptx
+++ b/figures/fig3/fig3.pptx
@@ -5,12 +5,11 @@
     <p:sldMasterId id="2147483648" r:id="rId1"/>
   </p:sldMasterIdLst>
   <p:notesMasterIdLst>
-    <p:notesMasterId r:id="rId5"/>
+    <p:notesMasterId r:id="rId4"/>
   </p:notesMasterIdLst>
   <p:sldIdLst>
     <p:sldId id="257" r:id="rId2"/>
     <p:sldId id="258" r:id="rId3"/>
-    <p:sldId id="256" r:id="rId4"/>
   </p:sldIdLst>
   <p:sldSz cx="36576000" cy="32918400"/>
   <p:notesSz cx="7010400" cy="9296400"/>
@@ -259,7 +258,7 @@
       </p15:sldGuideLst>
     </p:ext>
     <p:ext uri="http://customooxmlschemas.google.com/">
-      <go:slidesCustomData xmlns:go="http://customooxmlschemas.google.com/" xmlns:ahyp="http://schemas.microsoft.com/office/drawing/2018/hyperlinkcolor" xmlns:p15="http://schemas.microsoft.com/office/powerpoint/2012/main" xmlns:p14="http://schemas.microsoft.com/office/powerpoint/2010/main" xmlns:com="http://schemas.openxmlformats.org/drawingml/2006/compatibility" xmlns:pvml="urn:schemas-microsoft-com:office:powerpoint" xmlns:v="urn:schemas-microsoft-com:vml" xmlns:o="urn:schemas-microsoft-com:office:office" xmlns:dgm="http://schemas.openxmlformats.org/drawingml/2006/diagram" xmlns:c="http://schemas.openxmlformats.org/drawingml/2006/chart" xmlns:mv="urn:schemas-microsoft-com:mac:vml" xmlns:mc="http://schemas.openxmlformats.org/markup-compatibility/2006" xmlns="" r:id="rId10" roundtripDataSignature="AMtx7mhiytGPk8UOxiAGs9KaAxakDbg4SQ=="/>
+      <go:slidesCustomData xmlns="" xmlns:mc="http://schemas.openxmlformats.org/markup-compatibility/2006" xmlns:mv="urn:schemas-microsoft-com:mac:vml" xmlns:c="http://schemas.openxmlformats.org/drawingml/2006/chart" xmlns:dgm="http://schemas.openxmlformats.org/drawingml/2006/diagram" xmlns:o="urn:schemas-microsoft-com:office:office" xmlns:v="urn:schemas-microsoft-com:vml" xmlns:pvml="urn:schemas-microsoft-com:office:powerpoint" xmlns:com="http://schemas.openxmlformats.org/drawingml/2006/compatibility" xmlns:p14="http://schemas.microsoft.com/office/powerpoint/2010/main" xmlns:p15="http://schemas.microsoft.com/office/powerpoint/2012/main" xmlns:ahyp="http://schemas.microsoft.com/office/drawing/2018/hyperlinkcolor" xmlns:go="http://customooxmlschemas.google.com/" r:id="rId10" roundtripDataSignature="AMtx7mhiytGPk8UOxiAGs9KaAxakDbg4SQ=="/>
     </p:ext>
   </p:extLst>
 </p:presentation>
@@ -1458,1480 +1457,7 @@
 </p:notesMaster>
 </file>
 
-<file path=ppt/notesSlides/notesSlide1.xml><?xml version="1.0" encoding="utf-8"?>
-<p:notes xmlns:a="http://schemas.openxmlformats.org/drawingml/2006/main" xmlns:r="http://schemas.openxmlformats.org/officeDocument/2006/relationships" xmlns:p="http://schemas.openxmlformats.org/presentationml/2006/main" showMasterSp="0" showMasterPhAnim="0">
-  <p:cSld>
-    <p:spTree>
-      <p:nvGrpSpPr>
-        <p:cNvPr id="1" name="Shape 84"/>
-        <p:cNvGrpSpPr/>
-        <p:nvPr/>
-      </p:nvGrpSpPr>
-      <p:grpSpPr>
-        <a:xfrm>
-          <a:off x="0" y="0"/>
-          <a:ext cx="0" cy="0"/>
-          <a:chOff x="0" y="0"/>
-          <a:chExt cx="0" cy="0"/>
-        </a:xfrm>
-      </p:grpSpPr>
-      <p:sp>
-        <p:nvSpPr>
-          <p:cNvPr id="85" name="Google Shape;85;p1:notes"/>
-          <p:cNvSpPr>
-            <a:spLocks noGrp="1" noRot="1" noChangeAspect="1"/>
-          </p:cNvSpPr>
-          <p:nvPr>
-            <p:ph type="sldImg" idx="2"/>
-          </p:nvPr>
-        </p:nvSpPr>
-        <p:spPr>
-          <a:xfrm>
-            <a:off x="1568450" y="696913"/>
-            <a:ext cx="3873500" cy="3486150"/>
-          </a:xfrm>
-          <a:custGeom>
-            <a:avLst/>
-            <a:gdLst/>
-            <a:ahLst/>
-            <a:cxnLst/>
-            <a:rect l="l" t="t" r="r" b="b"/>
-            <a:pathLst>
-              <a:path w="120000" h="120000" extrusionOk="0">
-                <a:moveTo>
-                  <a:pt x="0" y="0"/>
-                </a:moveTo>
-                <a:lnTo>
-                  <a:pt x="120000" y="0"/>
-                </a:lnTo>
-                <a:lnTo>
-                  <a:pt x="120000" y="120000"/>
-                </a:lnTo>
-                <a:lnTo>
-                  <a:pt x="0" y="120000"/>
-                </a:lnTo>
-                <a:close/>
-              </a:path>
-            </a:pathLst>
-          </a:custGeom>
-          <a:noFill/>
-          <a:ln w="9525" cap="flat" cmpd="sng">
-            <a:solidFill>
-              <a:srgbClr val="000000"/>
-            </a:solidFill>
-            <a:prstDash val="solid"/>
-            <a:miter lim="800000"/>
-            <a:headEnd type="none" w="sm" len="sm"/>
-            <a:tailEnd type="none" w="sm" len="sm"/>
-          </a:ln>
-        </p:spPr>
-      </p:sp>
-      <p:sp>
-        <p:nvSpPr>
-          <p:cNvPr id="86" name="Google Shape;86;p1:notes"/>
-          <p:cNvSpPr txBox="1">
-            <a:spLocks noGrp="1"/>
-          </p:cNvSpPr>
-          <p:nvPr>
-            <p:ph type="body" idx="1"/>
-          </p:nvPr>
-        </p:nvSpPr>
-        <p:spPr>
-          <a:xfrm>
-            <a:off x="701675" y="4416425"/>
-            <a:ext cx="5607050" cy="4183063"/>
-          </a:xfrm>
-          <a:prstGeom prst="rect">
-            <a:avLst/>
-          </a:prstGeom>
-          <a:noFill/>
-          <a:ln>
-            <a:noFill/>
-          </a:ln>
-        </p:spPr>
-        <p:txBody>
-          <a:bodyPr spcFirstLastPara="1" wrap="square" lIns="93150" tIns="46575" rIns="93150" bIns="46575" anchor="t" anchorCtr="0">
-            <a:noAutofit/>
-          </a:bodyPr>
-          <a:lstStyle/>
-          <a:p>
-            <a:pPr marL="0" lvl="0" indent="0" algn="l" rtl="0">
-              <a:spcBef>
-                <a:spcPts val="0"/>
-              </a:spcBef>
-              <a:spcAft>
-                <a:spcPts val="0"/>
-              </a:spcAft>
-              <a:buNone/>
-            </a:pPr>
-            <a:endParaRPr dirty="0"/>
-          </a:p>
-        </p:txBody>
-      </p:sp>
-      <p:sp>
-        <p:nvSpPr>
-          <p:cNvPr id="87" name="Google Shape;87;p1:notes"/>
-          <p:cNvSpPr txBox="1">
-            <a:spLocks noGrp="1"/>
-          </p:cNvSpPr>
-          <p:nvPr>
-            <p:ph type="sldNum" idx="12"/>
-          </p:nvPr>
-        </p:nvSpPr>
-        <p:spPr>
-          <a:xfrm>
-            <a:off x="3970338" y="8829675"/>
-            <a:ext cx="3038475" cy="465138"/>
-          </a:xfrm>
-          <a:prstGeom prst="rect">
-            <a:avLst/>
-          </a:prstGeom>
-          <a:noFill/>
-          <a:ln>
-            <a:noFill/>
-          </a:ln>
-        </p:spPr>
-        <p:txBody>
-          <a:bodyPr spcFirstLastPara="1" wrap="square" lIns="93150" tIns="46575" rIns="93150" bIns="46575" anchor="b" anchorCtr="0">
-            <a:noAutofit/>
-          </a:bodyPr>
-          <a:lstStyle/>
-          <a:p>
-            <a:pPr marL="0" marR="0" lvl="0" indent="0" algn="r" rtl="0">
-              <a:spcBef>
-                <a:spcPts val="0"/>
-              </a:spcBef>
-              <a:spcAft>
-                <a:spcPts val="0"/>
-              </a:spcAft>
-              <a:buNone/>
-            </a:pPr>
-            <a:fld id="{00000000-1234-1234-1234-123412341234}" type="slidenum">
-              <a:rPr lang="en-US" sz="1200" b="0" i="0" u="none" strike="noStrike" cap="none">
-                <a:solidFill>
-                  <a:schemeClr val="dk1"/>
-                </a:solidFill>
-                <a:latin typeface="Calibri"/>
-                <a:ea typeface="Calibri"/>
-                <a:cs typeface="Calibri"/>
-                <a:sym typeface="Calibri"/>
-              </a:rPr>
-              <a:t>3</a:t>
-            </a:fld>
-            <a:endParaRPr sz="1200" b="0" i="0" u="none" strike="noStrike" cap="none">
-              <a:solidFill>
-                <a:schemeClr val="dk1"/>
-              </a:solidFill>
-              <a:latin typeface="Calibri"/>
-              <a:ea typeface="Calibri"/>
-              <a:cs typeface="Calibri"/>
-              <a:sym typeface="Calibri"/>
-            </a:endParaRPr>
-          </a:p>
-        </p:txBody>
-      </p:sp>
-    </p:spTree>
-  </p:cSld>
-  <p:clrMapOvr>
-    <a:masterClrMapping/>
-  </p:clrMapOvr>
-</p:notes>
-</file>
-
 <file path=ppt/slideLayouts/slideLayout1.xml><?xml version="1.0" encoding="utf-8"?>
-<p:sldLayout xmlns:a="http://schemas.openxmlformats.org/drawingml/2006/main" xmlns:r="http://schemas.openxmlformats.org/officeDocument/2006/relationships" xmlns:p="http://schemas.openxmlformats.org/presentationml/2006/main" matchingName="Blank" type="blank">
-  <p:cSld name="BLANK">
-    <p:spTree>
-      <p:nvGrpSpPr>
-        <p:cNvPr id="1" name="Shape 15"/>
-        <p:cNvGrpSpPr/>
-        <p:nvPr/>
-      </p:nvGrpSpPr>
-      <p:grpSpPr>
-        <a:xfrm>
-          <a:off x="0" y="0"/>
-          <a:ext cx="0" cy="0"/>
-          <a:chOff x="0" y="0"/>
-          <a:chExt cx="0" cy="0"/>
-        </a:xfrm>
-      </p:grpSpPr>
-      <p:sp>
-        <p:nvSpPr>
-          <p:cNvPr id="16" name="Google Shape;16;p3"/>
-          <p:cNvSpPr txBox="1">
-            <a:spLocks noGrp="1"/>
-          </p:cNvSpPr>
-          <p:nvPr>
-            <p:ph type="dt" idx="10"/>
-          </p:nvPr>
-        </p:nvSpPr>
-        <p:spPr>
-          <a:xfrm>
-            <a:off x="1829043" y="30510162"/>
-            <a:ext cx="8533917" cy="1753557"/>
-          </a:xfrm>
-          <a:prstGeom prst="rect">
-            <a:avLst/>
-          </a:prstGeom>
-          <a:noFill/>
-          <a:ln>
-            <a:noFill/>
-          </a:ln>
-        </p:spPr>
-        <p:txBody>
-          <a:bodyPr spcFirstLastPara="1" wrap="square" lIns="349525" tIns="174750" rIns="349525" bIns="174750" anchor="ctr" anchorCtr="0">
-            <a:noAutofit/>
-          </a:bodyPr>
-          <a:lstStyle>
-            <a:lvl1pPr lvl="0" algn="l">
-              <a:spcBef>
-                <a:spcPts val="0"/>
-              </a:spcBef>
-              <a:spcAft>
-                <a:spcPts val="0"/>
-              </a:spcAft>
-              <a:buSzPts val="1400"/>
-              <a:buNone/>
-              <a:defRPr/>
-            </a:lvl1pPr>
-            <a:lvl2pPr lvl="1" algn="l">
-              <a:spcBef>
-                <a:spcPts val="0"/>
-              </a:spcBef>
-              <a:spcAft>
-                <a:spcPts val="0"/>
-              </a:spcAft>
-              <a:buSzPts val="1400"/>
-              <a:buNone/>
-              <a:defRPr/>
-            </a:lvl2pPr>
-            <a:lvl3pPr lvl="2" algn="l">
-              <a:spcBef>
-                <a:spcPts val="0"/>
-              </a:spcBef>
-              <a:spcAft>
-                <a:spcPts val="0"/>
-              </a:spcAft>
-              <a:buSzPts val="1400"/>
-              <a:buNone/>
-              <a:defRPr/>
-            </a:lvl3pPr>
-            <a:lvl4pPr lvl="3" algn="l">
-              <a:spcBef>
-                <a:spcPts val="0"/>
-              </a:spcBef>
-              <a:spcAft>
-                <a:spcPts val="0"/>
-              </a:spcAft>
-              <a:buSzPts val="1400"/>
-              <a:buNone/>
-              <a:defRPr/>
-            </a:lvl4pPr>
-            <a:lvl5pPr lvl="4" algn="l">
-              <a:spcBef>
-                <a:spcPts val="0"/>
-              </a:spcBef>
-              <a:spcAft>
-                <a:spcPts val="0"/>
-              </a:spcAft>
-              <a:buSzPts val="1400"/>
-              <a:buNone/>
-              <a:defRPr/>
-            </a:lvl5pPr>
-            <a:lvl6pPr lvl="5" algn="l">
-              <a:spcBef>
-                <a:spcPts val="0"/>
-              </a:spcBef>
-              <a:spcAft>
-                <a:spcPts val="0"/>
-              </a:spcAft>
-              <a:buSzPts val="1400"/>
-              <a:buNone/>
-              <a:defRPr/>
-            </a:lvl6pPr>
-            <a:lvl7pPr lvl="6" algn="l">
-              <a:spcBef>
-                <a:spcPts val="0"/>
-              </a:spcBef>
-              <a:spcAft>
-                <a:spcPts val="0"/>
-              </a:spcAft>
-              <a:buSzPts val="1400"/>
-              <a:buNone/>
-              <a:defRPr/>
-            </a:lvl7pPr>
-            <a:lvl8pPr lvl="7" algn="l">
-              <a:spcBef>
-                <a:spcPts val="0"/>
-              </a:spcBef>
-              <a:spcAft>
-                <a:spcPts val="0"/>
-              </a:spcAft>
-              <a:buSzPts val="1400"/>
-              <a:buNone/>
-              <a:defRPr/>
-            </a:lvl8pPr>
-            <a:lvl9pPr lvl="8" algn="l">
-              <a:spcBef>
-                <a:spcPts val="0"/>
-              </a:spcBef>
-              <a:spcAft>
-                <a:spcPts val="0"/>
-              </a:spcAft>
-              <a:buSzPts val="1400"/>
-              <a:buNone/>
-              <a:defRPr/>
-            </a:lvl9pPr>
-          </a:lstStyle>
-          <a:p>
-            <a:endParaRPr/>
-          </a:p>
-        </p:txBody>
-      </p:sp>
-      <p:sp>
-        <p:nvSpPr>
-          <p:cNvPr id="17" name="Google Shape;17;p3"/>
-          <p:cNvSpPr txBox="1">
-            <a:spLocks noGrp="1"/>
-          </p:cNvSpPr>
-          <p:nvPr>
-            <p:ph type="ftr" idx="11"/>
-          </p:nvPr>
-        </p:nvSpPr>
-        <p:spPr>
-          <a:xfrm>
-            <a:off x="12496840" y="30510162"/>
-            <a:ext cx="11582320" cy="1753557"/>
-          </a:xfrm>
-          <a:prstGeom prst="rect">
-            <a:avLst/>
-          </a:prstGeom>
-          <a:noFill/>
-          <a:ln>
-            <a:noFill/>
-          </a:ln>
-        </p:spPr>
-        <p:txBody>
-          <a:bodyPr spcFirstLastPara="1" wrap="square" lIns="349525" tIns="174750" rIns="349525" bIns="174750" anchor="ctr" anchorCtr="0">
-            <a:noAutofit/>
-          </a:bodyPr>
-          <a:lstStyle>
-            <a:lvl1pPr lvl="0" algn="ctr">
-              <a:spcBef>
-                <a:spcPts val="0"/>
-              </a:spcBef>
-              <a:spcAft>
-                <a:spcPts val="0"/>
-              </a:spcAft>
-              <a:buSzPts val="1400"/>
-              <a:buNone/>
-              <a:defRPr/>
-            </a:lvl1pPr>
-            <a:lvl2pPr lvl="1" algn="l">
-              <a:spcBef>
-                <a:spcPts val="0"/>
-              </a:spcBef>
-              <a:spcAft>
-                <a:spcPts val="0"/>
-              </a:spcAft>
-              <a:buSzPts val="1400"/>
-              <a:buNone/>
-              <a:defRPr/>
-            </a:lvl2pPr>
-            <a:lvl3pPr lvl="2" algn="l">
-              <a:spcBef>
-                <a:spcPts val="0"/>
-              </a:spcBef>
-              <a:spcAft>
-                <a:spcPts val="0"/>
-              </a:spcAft>
-              <a:buSzPts val="1400"/>
-              <a:buNone/>
-              <a:defRPr/>
-            </a:lvl3pPr>
-            <a:lvl4pPr lvl="3" algn="l">
-              <a:spcBef>
-                <a:spcPts val="0"/>
-              </a:spcBef>
-              <a:spcAft>
-                <a:spcPts val="0"/>
-              </a:spcAft>
-              <a:buSzPts val="1400"/>
-              <a:buNone/>
-              <a:defRPr/>
-            </a:lvl4pPr>
-            <a:lvl5pPr lvl="4" algn="l">
-              <a:spcBef>
-                <a:spcPts val="0"/>
-              </a:spcBef>
-              <a:spcAft>
-                <a:spcPts val="0"/>
-              </a:spcAft>
-              <a:buSzPts val="1400"/>
-              <a:buNone/>
-              <a:defRPr/>
-            </a:lvl5pPr>
-            <a:lvl6pPr lvl="5" algn="l">
-              <a:spcBef>
-                <a:spcPts val="0"/>
-              </a:spcBef>
-              <a:spcAft>
-                <a:spcPts val="0"/>
-              </a:spcAft>
-              <a:buSzPts val="1400"/>
-              <a:buNone/>
-              <a:defRPr/>
-            </a:lvl6pPr>
-            <a:lvl7pPr lvl="6" algn="l">
-              <a:spcBef>
-                <a:spcPts val="0"/>
-              </a:spcBef>
-              <a:spcAft>
-                <a:spcPts val="0"/>
-              </a:spcAft>
-              <a:buSzPts val="1400"/>
-              <a:buNone/>
-              <a:defRPr/>
-            </a:lvl7pPr>
-            <a:lvl8pPr lvl="7" algn="l">
-              <a:spcBef>
-                <a:spcPts val="0"/>
-              </a:spcBef>
-              <a:spcAft>
-                <a:spcPts val="0"/>
-              </a:spcAft>
-              <a:buSzPts val="1400"/>
-              <a:buNone/>
-              <a:defRPr/>
-            </a:lvl8pPr>
-            <a:lvl9pPr lvl="8" algn="l">
-              <a:spcBef>
-                <a:spcPts val="0"/>
-              </a:spcBef>
-              <a:spcAft>
-                <a:spcPts val="0"/>
-              </a:spcAft>
-              <a:buSzPts val="1400"/>
-              <a:buNone/>
-              <a:defRPr/>
-            </a:lvl9pPr>
-          </a:lstStyle>
-          <a:p>
-            <a:endParaRPr/>
-          </a:p>
-        </p:txBody>
-      </p:sp>
-      <p:sp>
-        <p:nvSpPr>
-          <p:cNvPr id="18" name="Google Shape;18;p3"/>
-          <p:cNvSpPr txBox="1">
-            <a:spLocks noGrp="1"/>
-          </p:cNvSpPr>
-          <p:nvPr>
-            <p:ph type="sldNum" idx="12"/>
-          </p:nvPr>
-        </p:nvSpPr>
-        <p:spPr>
-          <a:xfrm>
-            <a:off x="26213043" y="30510162"/>
-            <a:ext cx="8533917" cy="1753557"/>
-          </a:xfrm>
-          <a:prstGeom prst="rect">
-            <a:avLst/>
-          </a:prstGeom>
-          <a:noFill/>
-          <a:ln>
-            <a:noFill/>
-          </a:ln>
-        </p:spPr>
-        <p:txBody>
-          <a:bodyPr spcFirstLastPara="1" wrap="square" lIns="349525" tIns="174750" rIns="349525" bIns="174750" anchor="ctr" anchorCtr="0">
-            <a:noAutofit/>
-          </a:bodyPr>
-          <a:lstStyle>
-            <a:lvl1pPr marL="0" marR="0" lvl="0" indent="0" algn="r">
-              <a:spcBef>
-                <a:spcPts val="0"/>
-              </a:spcBef>
-              <a:spcAft>
-                <a:spcPts val="0"/>
-              </a:spcAft>
-              <a:buNone/>
-              <a:defRPr sz="4674" b="0" i="0" u="none" strike="noStrike" cap="none">
-                <a:solidFill>
-                  <a:srgbClr val="888888"/>
-                </a:solidFill>
-                <a:latin typeface="Calibri"/>
-                <a:ea typeface="Calibri"/>
-                <a:cs typeface="Calibri"/>
-                <a:sym typeface="Calibri"/>
-              </a:defRPr>
-            </a:lvl1pPr>
-            <a:lvl2pPr marL="0" marR="0" lvl="1" indent="0" algn="r">
-              <a:spcBef>
-                <a:spcPts val="0"/>
-              </a:spcBef>
-              <a:spcAft>
-                <a:spcPts val="0"/>
-              </a:spcAft>
-              <a:buNone/>
-              <a:defRPr sz="4674" b="0" i="0" u="none" strike="noStrike" cap="none">
-                <a:solidFill>
-                  <a:srgbClr val="888888"/>
-                </a:solidFill>
-                <a:latin typeface="Calibri"/>
-                <a:ea typeface="Calibri"/>
-                <a:cs typeface="Calibri"/>
-                <a:sym typeface="Calibri"/>
-              </a:defRPr>
-            </a:lvl2pPr>
-            <a:lvl3pPr marL="0" marR="0" lvl="2" indent="0" algn="r">
-              <a:spcBef>
-                <a:spcPts val="0"/>
-              </a:spcBef>
-              <a:spcAft>
-                <a:spcPts val="0"/>
-              </a:spcAft>
-              <a:buNone/>
-              <a:defRPr sz="4674" b="0" i="0" u="none" strike="noStrike" cap="none">
-                <a:solidFill>
-                  <a:srgbClr val="888888"/>
-                </a:solidFill>
-                <a:latin typeface="Calibri"/>
-                <a:ea typeface="Calibri"/>
-                <a:cs typeface="Calibri"/>
-                <a:sym typeface="Calibri"/>
-              </a:defRPr>
-            </a:lvl3pPr>
-            <a:lvl4pPr marL="0" marR="0" lvl="3" indent="0" algn="r">
-              <a:spcBef>
-                <a:spcPts val="0"/>
-              </a:spcBef>
-              <a:spcAft>
-                <a:spcPts val="0"/>
-              </a:spcAft>
-              <a:buNone/>
-              <a:defRPr sz="4674" b="0" i="0" u="none" strike="noStrike" cap="none">
-                <a:solidFill>
-                  <a:srgbClr val="888888"/>
-                </a:solidFill>
-                <a:latin typeface="Calibri"/>
-                <a:ea typeface="Calibri"/>
-                <a:cs typeface="Calibri"/>
-                <a:sym typeface="Calibri"/>
-              </a:defRPr>
-            </a:lvl4pPr>
-            <a:lvl5pPr marL="0" marR="0" lvl="4" indent="0" algn="r">
-              <a:spcBef>
-                <a:spcPts val="0"/>
-              </a:spcBef>
-              <a:spcAft>
-                <a:spcPts val="0"/>
-              </a:spcAft>
-              <a:buNone/>
-              <a:defRPr sz="4674" b="0" i="0" u="none" strike="noStrike" cap="none">
-                <a:solidFill>
-                  <a:srgbClr val="888888"/>
-                </a:solidFill>
-                <a:latin typeface="Calibri"/>
-                <a:ea typeface="Calibri"/>
-                <a:cs typeface="Calibri"/>
-                <a:sym typeface="Calibri"/>
-              </a:defRPr>
-            </a:lvl5pPr>
-            <a:lvl6pPr marL="0" marR="0" lvl="5" indent="0" algn="r">
-              <a:spcBef>
-                <a:spcPts val="0"/>
-              </a:spcBef>
-              <a:spcAft>
-                <a:spcPts val="0"/>
-              </a:spcAft>
-              <a:buNone/>
-              <a:defRPr sz="4674" b="0" i="0" u="none" strike="noStrike" cap="none">
-                <a:solidFill>
-                  <a:srgbClr val="888888"/>
-                </a:solidFill>
-                <a:latin typeface="Calibri"/>
-                <a:ea typeface="Calibri"/>
-                <a:cs typeface="Calibri"/>
-                <a:sym typeface="Calibri"/>
-              </a:defRPr>
-            </a:lvl6pPr>
-            <a:lvl7pPr marL="0" marR="0" lvl="6" indent="0" algn="r">
-              <a:spcBef>
-                <a:spcPts val="0"/>
-              </a:spcBef>
-              <a:spcAft>
-                <a:spcPts val="0"/>
-              </a:spcAft>
-              <a:buNone/>
-              <a:defRPr sz="4674" b="0" i="0" u="none" strike="noStrike" cap="none">
-                <a:solidFill>
-                  <a:srgbClr val="888888"/>
-                </a:solidFill>
-                <a:latin typeface="Calibri"/>
-                <a:ea typeface="Calibri"/>
-                <a:cs typeface="Calibri"/>
-                <a:sym typeface="Calibri"/>
-              </a:defRPr>
-            </a:lvl7pPr>
-            <a:lvl8pPr marL="0" marR="0" lvl="7" indent="0" algn="r">
-              <a:spcBef>
-                <a:spcPts val="0"/>
-              </a:spcBef>
-              <a:spcAft>
-                <a:spcPts val="0"/>
-              </a:spcAft>
-              <a:buNone/>
-              <a:defRPr sz="4674" b="0" i="0" u="none" strike="noStrike" cap="none">
-                <a:solidFill>
-                  <a:srgbClr val="888888"/>
-                </a:solidFill>
-                <a:latin typeface="Calibri"/>
-                <a:ea typeface="Calibri"/>
-                <a:cs typeface="Calibri"/>
-                <a:sym typeface="Calibri"/>
-              </a:defRPr>
-            </a:lvl8pPr>
-            <a:lvl9pPr marL="0" marR="0" lvl="8" indent="0" algn="r">
-              <a:spcBef>
-                <a:spcPts val="0"/>
-              </a:spcBef>
-              <a:spcAft>
-                <a:spcPts val="0"/>
-              </a:spcAft>
-              <a:buNone/>
-              <a:defRPr sz="4674" b="0" i="0" u="none" strike="noStrike" cap="none">
-                <a:solidFill>
-                  <a:srgbClr val="888888"/>
-                </a:solidFill>
-                <a:latin typeface="Calibri"/>
-                <a:ea typeface="Calibri"/>
-                <a:cs typeface="Calibri"/>
-                <a:sym typeface="Calibri"/>
-              </a:defRPr>
-            </a:lvl9pPr>
-          </a:lstStyle>
-          <a:p>
-            <a:pPr marL="0" lvl="0" indent="0" algn="r" rtl="0">
-              <a:spcBef>
-                <a:spcPts val="0"/>
-              </a:spcBef>
-              <a:spcAft>
-                <a:spcPts val="0"/>
-              </a:spcAft>
-              <a:buNone/>
-            </a:pPr>
-            <a:fld id="{00000000-1234-1234-1234-123412341234}" type="slidenum">
-              <a:rPr lang="en-US"/>
-              <a:t>‹#›</a:t>
-            </a:fld>
-            <a:endParaRPr/>
-          </a:p>
-        </p:txBody>
-      </p:sp>
-    </p:spTree>
-  </p:cSld>
-  <p:clrMapOvr>
-    <a:masterClrMapping/>
-  </p:clrMapOvr>
-</p:sldLayout>
-</file>
-
-<file path=ppt/slideLayouts/slideLayout10.xml><?xml version="1.0" encoding="utf-8"?>
-<p:sldLayout xmlns:a="http://schemas.openxmlformats.org/drawingml/2006/main" xmlns:r="http://schemas.openxmlformats.org/officeDocument/2006/relationships" xmlns:p="http://schemas.openxmlformats.org/presentationml/2006/main" matchingName="Vertical Title and Text" type="vertTitleAndTx">
-  <p:cSld name="VERTICAL_TITLE_AND_VERTICAL_TEXT">
-    <p:spTree>
-      <p:nvGrpSpPr>
-        <p:cNvPr id="1" name="Shape 78"/>
-        <p:cNvGrpSpPr/>
-        <p:nvPr/>
-      </p:nvGrpSpPr>
-      <p:grpSpPr>
-        <a:xfrm>
-          <a:off x="0" y="0"/>
-          <a:ext cx="0" cy="0"/>
-          <a:chOff x="0" y="0"/>
-          <a:chExt cx="0" cy="0"/>
-        </a:xfrm>
-      </p:grpSpPr>
-      <p:sp>
-        <p:nvSpPr>
-          <p:cNvPr id="79" name="Google Shape;79;p13"/>
-          <p:cNvSpPr txBox="1">
-            <a:spLocks noGrp="1"/>
-          </p:cNvSpPr>
-          <p:nvPr>
-            <p:ph type="title"/>
-          </p:nvPr>
-        </p:nvSpPr>
-        <p:spPr>
-          <a:xfrm rot="5400000">
-            <a:off x="85751673" y="53160931"/>
-            <a:ext cx="134820662" cy="41148001"/>
-          </a:xfrm>
-          <a:prstGeom prst="rect">
-            <a:avLst/>
-          </a:prstGeom>
-          <a:noFill/>
-          <a:ln>
-            <a:noFill/>
-          </a:ln>
-        </p:spPr>
-        <p:txBody>
-          <a:bodyPr spcFirstLastPara="1" wrap="square" lIns="349525" tIns="174750" rIns="349525" bIns="174750" anchor="ctr" anchorCtr="0">
-            <a:noAutofit/>
-          </a:bodyPr>
-          <a:lstStyle>
-            <a:lvl1pPr lvl="0" algn="ctr">
-              <a:spcBef>
-                <a:spcPts val="0"/>
-              </a:spcBef>
-              <a:spcAft>
-                <a:spcPts val="0"/>
-              </a:spcAft>
-              <a:buSzPts val="1400"/>
-              <a:buNone/>
-              <a:defRPr/>
-            </a:lvl1pPr>
-            <a:lvl2pPr lvl="1" algn="ctr">
-              <a:spcBef>
-                <a:spcPts val="0"/>
-              </a:spcBef>
-              <a:spcAft>
-                <a:spcPts val="0"/>
-              </a:spcAft>
-              <a:buSzPts val="1400"/>
-              <a:buNone/>
-              <a:defRPr/>
-            </a:lvl2pPr>
-            <a:lvl3pPr lvl="2" algn="ctr">
-              <a:spcBef>
-                <a:spcPts val="0"/>
-              </a:spcBef>
-              <a:spcAft>
-                <a:spcPts val="0"/>
-              </a:spcAft>
-              <a:buSzPts val="1400"/>
-              <a:buNone/>
-              <a:defRPr/>
-            </a:lvl3pPr>
-            <a:lvl4pPr lvl="3" algn="ctr">
-              <a:spcBef>
-                <a:spcPts val="0"/>
-              </a:spcBef>
-              <a:spcAft>
-                <a:spcPts val="0"/>
-              </a:spcAft>
-              <a:buSzPts val="1400"/>
-              <a:buNone/>
-              <a:defRPr/>
-            </a:lvl4pPr>
-            <a:lvl5pPr lvl="4" algn="ctr">
-              <a:spcBef>
-                <a:spcPts val="0"/>
-              </a:spcBef>
-              <a:spcAft>
-                <a:spcPts val="0"/>
-              </a:spcAft>
-              <a:buSzPts val="1400"/>
-              <a:buNone/>
-              <a:defRPr/>
-            </a:lvl5pPr>
-            <a:lvl6pPr lvl="5" algn="ctr">
-              <a:spcBef>
-                <a:spcPts val="0"/>
-              </a:spcBef>
-              <a:spcAft>
-                <a:spcPts val="0"/>
-              </a:spcAft>
-              <a:buSzPts val="1400"/>
-              <a:buNone/>
-              <a:defRPr/>
-            </a:lvl6pPr>
-            <a:lvl7pPr lvl="6" algn="ctr">
-              <a:spcBef>
-                <a:spcPts val="0"/>
-              </a:spcBef>
-              <a:spcAft>
-                <a:spcPts val="0"/>
-              </a:spcAft>
-              <a:buSzPts val="1400"/>
-              <a:buNone/>
-              <a:defRPr/>
-            </a:lvl7pPr>
-            <a:lvl8pPr lvl="7" algn="ctr">
-              <a:spcBef>
-                <a:spcPts val="0"/>
-              </a:spcBef>
-              <a:spcAft>
-                <a:spcPts val="0"/>
-              </a:spcAft>
-              <a:buSzPts val="1400"/>
-              <a:buNone/>
-              <a:defRPr/>
-            </a:lvl8pPr>
-            <a:lvl9pPr lvl="8" algn="ctr">
-              <a:spcBef>
-                <a:spcPts val="0"/>
-              </a:spcBef>
-              <a:spcAft>
-                <a:spcPts val="0"/>
-              </a:spcAft>
-              <a:buSzPts val="1400"/>
-              <a:buNone/>
-              <a:defRPr/>
-            </a:lvl9pPr>
-          </a:lstStyle>
-          <a:p>
-            <a:endParaRPr/>
-          </a:p>
-        </p:txBody>
-      </p:sp>
-      <p:sp>
-        <p:nvSpPr>
-          <p:cNvPr id="80" name="Google Shape;80;p13"/>
-          <p:cNvSpPr txBox="1">
-            <a:spLocks noGrp="1"/>
-          </p:cNvSpPr>
-          <p:nvPr>
-            <p:ph type="body" idx="1"/>
-          </p:nvPr>
-        </p:nvSpPr>
-        <p:spPr>
-          <a:xfrm rot="5400000">
-            <a:off x="3150869" y="12317731"/>
-            <a:ext cx="134820662" cy="122834400"/>
-          </a:xfrm>
-          <a:prstGeom prst="rect">
-            <a:avLst/>
-          </a:prstGeom>
-          <a:noFill/>
-          <a:ln>
-            <a:noFill/>
-          </a:ln>
-        </p:spPr>
-        <p:txBody>
-          <a:bodyPr spcFirstLastPara="1" wrap="square" lIns="349525" tIns="174750" rIns="349525" bIns="174750" anchor="t" anchorCtr="0">
-            <a:noAutofit/>
-          </a:bodyPr>
-          <a:lstStyle>
-            <a:lvl1pPr marL="457200" lvl="0" indent="-342900" algn="l">
-              <a:spcBef>
-                <a:spcPts val="360"/>
-              </a:spcBef>
-              <a:spcAft>
-                <a:spcPts val="0"/>
-              </a:spcAft>
-              <a:buClr>
-                <a:schemeClr val="dk1"/>
-              </a:buClr>
-              <a:buSzPts val="1800"/>
-              <a:buChar char="•"/>
-              <a:defRPr/>
-            </a:lvl1pPr>
-            <a:lvl2pPr marL="914400" lvl="1" indent="-342900" algn="l">
-              <a:spcBef>
-                <a:spcPts val="360"/>
-              </a:spcBef>
-              <a:spcAft>
-                <a:spcPts val="0"/>
-              </a:spcAft>
-              <a:buClr>
-                <a:schemeClr val="dk1"/>
-              </a:buClr>
-              <a:buSzPts val="1800"/>
-              <a:buChar char="–"/>
-              <a:defRPr/>
-            </a:lvl2pPr>
-            <a:lvl3pPr marL="1371600" lvl="2" indent="-342900" algn="l">
-              <a:spcBef>
-                <a:spcPts val="360"/>
-              </a:spcBef>
-              <a:spcAft>
-                <a:spcPts val="0"/>
-              </a:spcAft>
-              <a:buClr>
-                <a:schemeClr val="dk1"/>
-              </a:buClr>
-              <a:buSzPts val="1800"/>
-              <a:buChar char="•"/>
-              <a:defRPr/>
-            </a:lvl3pPr>
-            <a:lvl4pPr marL="1828800" lvl="3" indent="-342900" algn="l">
-              <a:spcBef>
-                <a:spcPts val="360"/>
-              </a:spcBef>
-              <a:spcAft>
-                <a:spcPts val="0"/>
-              </a:spcAft>
-              <a:buClr>
-                <a:schemeClr val="dk1"/>
-              </a:buClr>
-              <a:buSzPts val="1800"/>
-              <a:buChar char="–"/>
-              <a:defRPr/>
-            </a:lvl4pPr>
-            <a:lvl5pPr marL="2286000" lvl="4" indent="-342900" algn="l">
-              <a:spcBef>
-                <a:spcPts val="360"/>
-              </a:spcBef>
-              <a:spcAft>
-                <a:spcPts val="0"/>
-              </a:spcAft>
-              <a:buClr>
-                <a:schemeClr val="dk1"/>
-              </a:buClr>
-              <a:buSzPts val="1800"/>
-              <a:buChar char="»"/>
-              <a:defRPr/>
-            </a:lvl5pPr>
-            <a:lvl6pPr marL="2743200" lvl="5" indent="-342900" algn="l">
-              <a:spcBef>
-                <a:spcPts val="360"/>
-              </a:spcBef>
-              <a:spcAft>
-                <a:spcPts val="0"/>
-              </a:spcAft>
-              <a:buClr>
-                <a:schemeClr val="dk1"/>
-              </a:buClr>
-              <a:buSzPts val="1800"/>
-              <a:buChar char="•"/>
-              <a:defRPr/>
-            </a:lvl6pPr>
-            <a:lvl7pPr marL="3200400" lvl="6" indent="-342900" algn="l">
-              <a:spcBef>
-                <a:spcPts val="360"/>
-              </a:spcBef>
-              <a:spcAft>
-                <a:spcPts val="0"/>
-              </a:spcAft>
-              <a:buClr>
-                <a:schemeClr val="dk1"/>
-              </a:buClr>
-              <a:buSzPts val="1800"/>
-              <a:buChar char="•"/>
-              <a:defRPr/>
-            </a:lvl7pPr>
-            <a:lvl8pPr marL="3657600" lvl="7" indent="-342900" algn="l">
-              <a:spcBef>
-                <a:spcPts val="360"/>
-              </a:spcBef>
-              <a:spcAft>
-                <a:spcPts val="0"/>
-              </a:spcAft>
-              <a:buClr>
-                <a:schemeClr val="dk1"/>
-              </a:buClr>
-              <a:buSzPts val="1800"/>
-              <a:buChar char="•"/>
-              <a:defRPr/>
-            </a:lvl8pPr>
-            <a:lvl9pPr marL="4114800" lvl="8" indent="-342900" algn="l">
-              <a:spcBef>
-                <a:spcPts val="360"/>
-              </a:spcBef>
-              <a:spcAft>
-                <a:spcPts val="0"/>
-              </a:spcAft>
-              <a:buClr>
-                <a:schemeClr val="dk1"/>
-              </a:buClr>
-              <a:buSzPts val="1800"/>
-              <a:buChar char="•"/>
-              <a:defRPr/>
-            </a:lvl9pPr>
-          </a:lstStyle>
-          <a:p>
-            <a:endParaRPr/>
-          </a:p>
-        </p:txBody>
-      </p:sp>
-      <p:sp>
-        <p:nvSpPr>
-          <p:cNvPr id="81" name="Google Shape;81;p13"/>
-          <p:cNvSpPr txBox="1">
-            <a:spLocks noGrp="1"/>
-          </p:cNvSpPr>
-          <p:nvPr>
-            <p:ph type="dt" idx="10"/>
-          </p:nvPr>
-        </p:nvSpPr>
-        <p:spPr>
-          <a:xfrm>
-            <a:off x="1829043" y="30510162"/>
-            <a:ext cx="8533917" cy="1753557"/>
-          </a:xfrm>
-          <a:prstGeom prst="rect">
-            <a:avLst/>
-          </a:prstGeom>
-          <a:noFill/>
-          <a:ln>
-            <a:noFill/>
-          </a:ln>
-        </p:spPr>
-        <p:txBody>
-          <a:bodyPr spcFirstLastPara="1" wrap="square" lIns="349525" tIns="174750" rIns="349525" bIns="174750" anchor="ctr" anchorCtr="0">
-            <a:noAutofit/>
-          </a:bodyPr>
-          <a:lstStyle>
-            <a:lvl1pPr lvl="0" algn="l">
-              <a:spcBef>
-                <a:spcPts val="0"/>
-              </a:spcBef>
-              <a:spcAft>
-                <a:spcPts val="0"/>
-              </a:spcAft>
-              <a:buSzPts val="1400"/>
-              <a:buNone/>
-              <a:defRPr/>
-            </a:lvl1pPr>
-            <a:lvl2pPr lvl="1" algn="l">
-              <a:spcBef>
-                <a:spcPts val="0"/>
-              </a:spcBef>
-              <a:spcAft>
-                <a:spcPts val="0"/>
-              </a:spcAft>
-              <a:buSzPts val="1400"/>
-              <a:buNone/>
-              <a:defRPr/>
-            </a:lvl2pPr>
-            <a:lvl3pPr lvl="2" algn="l">
-              <a:spcBef>
-                <a:spcPts val="0"/>
-              </a:spcBef>
-              <a:spcAft>
-                <a:spcPts val="0"/>
-              </a:spcAft>
-              <a:buSzPts val="1400"/>
-              <a:buNone/>
-              <a:defRPr/>
-            </a:lvl3pPr>
-            <a:lvl4pPr lvl="3" algn="l">
-              <a:spcBef>
-                <a:spcPts val="0"/>
-              </a:spcBef>
-              <a:spcAft>
-                <a:spcPts val="0"/>
-              </a:spcAft>
-              <a:buSzPts val="1400"/>
-              <a:buNone/>
-              <a:defRPr/>
-            </a:lvl4pPr>
-            <a:lvl5pPr lvl="4" algn="l">
-              <a:spcBef>
-                <a:spcPts val="0"/>
-              </a:spcBef>
-              <a:spcAft>
-                <a:spcPts val="0"/>
-              </a:spcAft>
-              <a:buSzPts val="1400"/>
-              <a:buNone/>
-              <a:defRPr/>
-            </a:lvl5pPr>
-            <a:lvl6pPr lvl="5" algn="l">
-              <a:spcBef>
-                <a:spcPts val="0"/>
-              </a:spcBef>
-              <a:spcAft>
-                <a:spcPts val="0"/>
-              </a:spcAft>
-              <a:buSzPts val="1400"/>
-              <a:buNone/>
-              <a:defRPr/>
-            </a:lvl6pPr>
-            <a:lvl7pPr lvl="6" algn="l">
-              <a:spcBef>
-                <a:spcPts val="0"/>
-              </a:spcBef>
-              <a:spcAft>
-                <a:spcPts val="0"/>
-              </a:spcAft>
-              <a:buSzPts val="1400"/>
-              <a:buNone/>
-              <a:defRPr/>
-            </a:lvl7pPr>
-            <a:lvl8pPr lvl="7" algn="l">
-              <a:spcBef>
-                <a:spcPts val="0"/>
-              </a:spcBef>
-              <a:spcAft>
-                <a:spcPts val="0"/>
-              </a:spcAft>
-              <a:buSzPts val="1400"/>
-              <a:buNone/>
-              <a:defRPr/>
-            </a:lvl8pPr>
-            <a:lvl9pPr lvl="8" algn="l">
-              <a:spcBef>
-                <a:spcPts val="0"/>
-              </a:spcBef>
-              <a:spcAft>
-                <a:spcPts val="0"/>
-              </a:spcAft>
-              <a:buSzPts val="1400"/>
-              <a:buNone/>
-              <a:defRPr/>
-            </a:lvl9pPr>
-          </a:lstStyle>
-          <a:p>
-            <a:endParaRPr/>
-          </a:p>
-        </p:txBody>
-      </p:sp>
-      <p:sp>
-        <p:nvSpPr>
-          <p:cNvPr id="82" name="Google Shape;82;p13"/>
-          <p:cNvSpPr txBox="1">
-            <a:spLocks noGrp="1"/>
-          </p:cNvSpPr>
-          <p:nvPr>
-            <p:ph type="ftr" idx="11"/>
-          </p:nvPr>
-        </p:nvSpPr>
-        <p:spPr>
-          <a:xfrm>
-            <a:off x="12496840" y="30510162"/>
-            <a:ext cx="11582320" cy="1753557"/>
-          </a:xfrm>
-          <a:prstGeom prst="rect">
-            <a:avLst/>
-          </a:prstGeom>
-          <a:noFill/>
-          <a:ln>
-            <a:noFill/>
-          </a:ln>
-        </p:spPr>
-        <p:txBody>
-          <a:bodyPr spcFirstLastPara="1" wrap="square" lIns="349525" tIns="174750" rIns="349525" bIns="174750" anchor="ctr" anchorCtr="0">
-            <a:noAutofit/>
-          </a:bodyPr>
-          <a:lstStyle>
-            <a:lvl1pPr lvl="0" algn="ctr">
-              <a:spcBef>
-                <a:spcPts val="0"/>
-              </a:spcBef>
-              <a:spcAft>
-                <a:spcPts val="0"/>
-              </a:spcAft>
-              <a:buSzPts val="1400"/>
-              <a:buNone/>
-              <a:defRPr/>
-            </a:lvl1pPr>
-            <a:lvl2pPr lvl="1" algn="l">
-              <a:spcBef>
-                <a:spcPts val="0"/>
-              </a:spcBef>
-              <a:spcAft>
-                <a:spcPts val="0"/>
-              </a:spcAft>
-              <a:buSzPts val="1400"/>
-              <a:buNone/>
-              <a:defRPr/>
-            </a:lvl2pPr>
-            <a:lvl3pPr lvl="2" algn="l">
-              <a:spcBef>
-                <a:spcPts val="0"/>
-              </a:spcBef>
-              <a:spcAft>
-                <a:spcPts val="0"/>
-              </a:spcAft>
-              <a:buSzPts val="1400"/>
-              <a:buNone/>
-              <a:defRPr/>
-            </a:lvl3pPr>
-            <a:lvl4pPr lvl="3" algn="l">
-              <a:spcBef>
-                <a:spcPts val="0"/>
-              </a:spcBef>
-              <a:spcAft>
-                <a:spcPts val="0"/>
-              </a:spcAft>
-              <a:buSzPts val="1400"/>
-              <a:buNone/>
-              <a:defRPr/>
-            </a:lvl4pPr>
-            <a:lvl5pPr lvl="4" algn="l">
-              <a:spcBef>
-                <a:spcPts val="0"/>
-              </a:spcBef>
-              <a:spcAft>
-                <a:spcPts val="0"/>
-              </a:spcAft>
-              <a:buSzPts val="1400"/>
-              <a:buNone/>
-              <a:defRPr/>
-            </a:lvl5pPr>
-            <a:lvl6pPr lvl="5" algn="l">
-              <a:spcBef>
-                <a:spcPts val="0"/>
-              </a:spcBef>
-              <a:spcAft>
-                <a:spcPts val="0"/>
-              </a:spcAft>
-              <a:buSzPts val="1400"/>
-              <a:buNone/>
-              <a:defRPr/>
-            </a:lvl6pPr>
-            <a:lvl7pPr lvl="6" algn="l">
-              <a:spcBef>
-                <a:spcPts val="0"/>
-              </a:spcBef>
-              <a:spcAft>
-                <a:spcPts val="0"/>
-              </a:spcAft>
-              <a:buSzPts val="1400"/>
-              <a:buNone/>
-              <a:defRPr/>
-            </a:lvl7pPr>
-            <a:lvl8pPr lvl="7" algn="l">
-              <a:spcBef>
-                <a:spcPts val="0"/>
-              </a:spcBef>
-              <a:spcAft>
-                <a:spcPts val="0"/>
-              </a:spcAft>
-              <a:buSzPts val="1400"/>
-              <a:buNone/>
-              <a:defRPr/>
-            </a:lvl8pPr>
-            <a:lvl9pPr lvl="8" algn="l">
-              <a:spcBef>
-                <a:spcPts val="0"/>
-              </a:spcBef>
-              <a:spcAft>
-                <a:spcPts val="0"/>
-              </a:spcAft>
-              <a:buSzPts val="1400"/>
-              <a:buNone/>
-              <a:defRPr/>
-            </a:lvl9pPr>
-          </a:lstStyle>
-          <a:p>
-            <a:endParaRPr/>
-          </a:p>
-        </p:txBody>
-      </p:sp>
-      <p:sp>
-        <p:nvSpPr>
-          <p:cNvPr id="83" name="Google Shape;83;p13"/>
-          <p:cNvSpPr txBox="1">
-            <a:spLocks noGrp="1"/>
-          </p:cNvSpPr>
-          <p:nvPr>
-            <p:ph type="sldNum" idx="12"/>
-          </p:nvPr>
-        </p:nvSpPr>
-        <p:spPr>
-          <a:xfrm>
-            <a:off x="26213043" y="30510162"/>
-            <a:ext cx="8533917" cy="1753557"/>
-          </a:xfrm>
-          <a:prstGeom prst="rect">
-            <a:avLst/>
-          </a:prstGeom>
-          <a:noFill/>
-          <a:ln>
-            <a:noFill/>
-          </a:ln>
-        </p:spPr>
-        <p:txBody>
-          <a:bodyPr spcFirstLastPara="1" wrap="square" lIns="349525" tIns="174750" rIns="349525" bIns="174750" anchor="ctr" anchorCtr="0">
-            <a:noAutofit/>
-          </a:bodyPr>
-          <a:lstStyle>
-            <a:lvl1pPr marL="0" marR="0" lvl="0" indent="0" algn="r">
-              <a:spcBef>
-                <a:spcPts val="0"/>
-              </a:spcBef>
-              <a:spcAft>
-                <a:spcPts val="0"/>
-              </a:spcAft>
-              <a:buNone/>
-              <a:defRPr sz="4674" b="0" i="0" u="none" strike="noStrike" cap="none">
-                <a:solidFill>
-                  <a:srgbClr val="888888"/>
-                </a:solidFill>
-                <a:latin typeface="Calibri"/>
-                <a:ea typeface="Calibri"/>
-                <a:cs typeface="Calibri"/>
-                <a:sym typeface="Calibri"/>
-              </a:defRPr>
-            </a:lvl1pPr>
-            <a:lvl2pPr marL="0" marR="0" lvl="1" indent="0" algn="r">
-              <a:spcBef>
-                <a:spcPts val="0"/>
-              </a:spcBef>
-              <a:spcAft>
-                <a:spcPts val="0"/>
-              </a:spcAft>
-              <a:buNone/>
-              <a:defRPr sz="4674" b="0" i="0" u="none" strike="noStrike" cap="none">
-                <a:solidFill>
-                  <a:srgbClr val="888888"/>
-                </a:solidFill>
-                <a:latin typeface="Calibri"/>
-                <a:ea typeface="Calibri"/>
-                <a:cs typeface="Calibri"/>
-                <a:sym typeface="Calibri"/>
-              </a:defRPr>
-            </a:lvl2pPr>
-            <a:lvl3pPr marL="0" marR="0" lvl="2" indent="0" algn="r">
-              <a:spcBef>
-                <a:spcPts val="0"/>
-              </a:spcBef>
-              <a:spcAft>
-                <a:spcPts val="0"/>
-              </a:spcAft>
-              <a:buNone/>
-              <a:defRPr sz="4674" b="0" i="0" u="none" strike="noStrike" cap="none">
-                <a:solidFill>
-                  <a:srgbClr val="888888"/>
-                </a:solidFill>
-                <a:latin typeface="Calibri"/>
-                <a:ea typeface="Calibri"/>
-                <a:cs typeface="Calibri"/>
-                <a:sym typeface="Calibri"/>
-              </a:defRPr>
-            </a:lvl3pPr>
-            <a:lvl4pPr marL="0" marR="0" lvl="3" indent="0" algn="r">
-              <a:spcBef>
-                <a:spcPts val="0"/>
-              </a:spcBef>
-              <a:spcAft>
-                <a:spcPts val="0"/>
-              </a:spcAft>
-              <a:buNone/>
-              <a:defRPr sz="4674" b="0" i="0" u="none" strike="noStrike" cap="none">
-                <a:solidFill>
-                  <a:srgbClr val="888888"/>
-                </a:solidFill>
-                <a:latin typeface="Calibri"/>
-                <a:ea typeface="Calibri"/>
-                <a:cs typeface="Calibri"/>
-                <a:sym typeface="Calibri"/>
-              </a:defRPr>
-            </a:lvl4pPr>
-            <a:lvl5pPr marL="0" marR="0" lvl="4" indent="0" algn="r">
-              <a:spcBef>
-                <a:spcPts val="0"/>
-              </a:spcBef>
-              <a:spcAft>
-                <a:spcPts val="0"/>
-              </a:spcAft>
-              <a:buNone/>
-              <a:defRPr sz="4674" b="0" i="0" u="none" strike="noStrike" cap="none">
-                <a:solidFill>
-                  <a:srgbClr val="888888"/>
-                </a:solidFill>
-                <a:latin typeface="Calibri"/>
-                <a:ea typeface="Calibri"/>
-                <a:cs typeface="Calibri"/>
-                <a:sym typeface="Calibri"/>
-              </a:defRPr>
-            </a:lvl5pPr>
-            <a:lvl6pPr marL="0" marR="0" lvl="5" indent="0" algn="r">
-              <a:spcBef>
-                <a:spcPts val="0"/>
-              </a:spcBef>
-              <a:spcAft>
-                <a:spcPts val="0"/>
-              </a:spcAft>
-              <a:buNone/>
-              <a:defRPr sz="4674" b="0" i="0" u="none" strike="noStrike" cap="none">
-                <a:solidFill>
-                  <a:srgbClr val="888888"/>
-                </a:solidFill>
-                <a:latin typeface="Calibri"/>
-                <a:ea typeface="Calibri"/>
-                <a:cs typeface="Calibri"/>
-                <a:sym typeface="Calibri"/>
-              </a:defRPr>
-            </a:lvl6pPr>
-            <a:lvl7pPr marL="0" marR="0" lvl="6" indent="0" algn="r">
-              <a:spcBef>
-                <a:spcPts val="0"/>
-              </a:spcBef>
-              <a:spcAft>
-                <a:spcPts val="0"/>
-              </a:spcAft>
-              <a:buNone/>
-              <a:defRPr sz="4674" b="0" i="0" u="none" strike="noStrike" cap="none">
-                <a:solidFill>
-                  <a:srgbClr val="888888"/>
-                </a:solidFill>
-                <a:latin typeface="Calibri"/>
-                <a:ea typeface="Calibri"/>
-                <a:cs typeface="Calibri"/>
-                <a:sym typeface="Calibri"/>
-              </a:defRPr>
-            </a:lvl7pPr>
-            <a:lvl8pPr marL="0" marR="0" lvl="7" indent="0" algn="r">
-              <a:spcBef>
-                <a:spcPts val="0"/>
-              </a:spcBef>
-              <a:spcAft>
-                <a:spcPts val="0"/>
-              </a:spcAft>
-              <a:buNone/>
-              <a:defRPr sz="4674" b="0" i="0" u="none" strike="noStrike" cap="none">
-                <a:solidFill>
-                  <a:srgbClr val="888888"/>
-                </a:solidFill>
-                <a:latin typeface="Calibri"/>
-                <a:ea typeface="Calibri"/>
-                <a:cs typeface="Calibri"/>
-                <a:sym typeface="Calibri"/>
-              </a:defRPr>
-            </a:lvl8pPr>
-            <a:lvl9pPr marL="0" marR="0" lvl="8" indent="0" algn="r">
-              <a:spcBef>
-                <a:spcPts val="0"/>
-              </a:spcBef>
-              <a:spcAft>
-                <a:spcPts val="0"/>
-              </a:spcAft>
-              <a:buNone/>
-              <a:defRPr sz="4674" b="0" i="0" u="none" strike="noStrike" cap="none">
-                <a:solidFill>
-                  <a:srgbClr val="888888"/>
-                </a:solidFill>
-                <a:latin typeface="Calibri"/>
-                <a:ea typeface="Calibri"/>
-                <a:cs typeface="Calibri"/>
-                <a:sym typeface="Calibri"/>
-              </a:defRPr>
-            </a:lvl9pPr>
-          </a:lstStyle>
-          <a:p>
-            <a:pPr marL="0" lvl="0" indent="0" algn="r" rtl="0">
-              <a:spcBef>
-                <a:spcPts val="0"/>
-              </a:spcBef>
-              <a:spcAft>
-                <a:spcPts val="0"/>
-              </a:spcAft>
-              <a:buNone/>
-            </a:pPr>
-            <a:fld id="{00000000-1234-1234-1234-123412341234}" type="slidenum">
-              <a:rPr lang="en-US"/>
-              <a:t>‹#›</a:t>
-            </a:fld>
-            <a:endParaRPr/>
-          </a:p>
-        </p:txBody>
-      </p:sp>
-    </p:spTree>
-  </p:cSld>
-  <p:clrMapOvr>
-    <a:masterClrMapping/>
-  </p:clrMapOvr>
-</p:sldLayout>
-</file>
-
-<file path=ppt/slideLayouts/slideLayout2.xml><?xml version="1.0" encoding="utf-8"?>
 <p:sldLayout xmlns:a="http://schemas.openxmlformats.org/drawingml/2006/main" xmlns:r="http://schemas.openxmlformats.org/officeDocument/2006/relationships" xmlns:p="http://schemas.openxmlformats.org/presentationml/2006/main" matchingName="Title and Content" type="obj">
   <p:cSld name="OBJECT">
     <p:spTree>
@@ -3724,7 +2250,7 @@
 </p:sldLayout>
 </file>
 
-<file path=ppt/slideLayouts/slideLayout3.xml><?xml version="1.0" encoding="utf-8"?>
+<file path=ppt/slideLayouts/slideLayout2.xml><?xml version="1.0" encoding="utf-8"?>
 <p:sldLayout xmlns:a="http://schemas.openxmlformats.org/drawingml/2006/main" xmlns:r="http://schemas.openxmlformats.org/officeDocument/2006/relationships" xmlns:p="http://schemas.openxmlformats.org/presentationml/2006/main" matchingName="Section Header" type="secHead">
   <p:cSld name="SECTION_HEADER">
     <p:spTree>
@@ -4553,7 +3079,7 @@
 </p:sldLayout>
 </file>
 
-<file path=ppt/slideLayouts/slideLayout4.xml><?xml version="1.0" encoding="utf-8"?>
+<file path=ppt/slideLayouts/slideLayout3.xml><?xml version="1.0" encoding="utf-8"?>
 <p:sldLayout xmlns:a="http://schemas.openxmlformats.org/drawingml/2006/main" xmlns:r="http://schemas.openxmlformats.org/officeDocument/2006/relationships" xmlns:p="http://schemas.openxmlformats.org/presentationml/2006/main" matchingName="Two Content" type="twoObj">
   <p:cSld name="TWO_OBJECTS">
     <p:spTree>
@@ -5506,7 +4032,7 @@
 </p:sldLayout>
 </file>
 
-<file path=ppt/slideLayouts/slideLayout5.xml><?xml version="1.0" encoding="utf-8"?>
+<file path=ppt/slideLayouts/slideLayout4.xml><?xml version="1.0" encoding="utf-8"?>
 <p:sldLayout xmlns:a="http://schemas.openxmlformats.org/drawingml/2006/main" xmlns:r="http://schemas.openxmlformats.org/officeDocument/2006/relationships" xmlns:p="http://schemas.openxmlformats.org/presentationml/2006/main" matchingName="Comparison" type="twoTxTwoObj">
   <p:cSld name="TWO_OBJECTS_WITH_TEXT">
     <p:spTree>
@@ -6779,7 +5305,7 @@
 </p:sldLayout>
 </file>
 
-<file path=ppt/slideLayouts/slideLayout6.xml><?xml version="1.0" encoding="utf-8"?>
+<file path=ppt/slideLayouts/slideLayout5.xml><?xml version="1.0" encoding="utf-8"?>
 <p:sldLayout xmlns:a="http://schemas.openxmlformats.org/drawingml/2006/main" xmlns:r="http://schemas.openxmlformats.org/officeDocument/2006/relationships" xmlns:p="http://schemas.openxmlformats.org/presentationml/2006/main" matchingName="Title Only" type="titleOnly">
   <p:cSld name="TITLE_ONLY">
     <p:spTree>
@@ -7412,7 +5938,7 @@
 </p:sldLayout>
 </file>
 
-<file path=ppt/slideLayouts/slideLayout7.xml><?xml version="1.0" encoding="utf-8"?>
+<file path=ppt/slideLayouts/slideLayout6.xml><?xml version="1.0" encoding="utf-8"?>
 <p:sldLayout xmlns:a="http://schemas.openxmlformats.org/drawingml/2006/main" xmlns:r="http://schemas.openxmlformats.org/officeDocument/2006/relationships" xmlns:p="http://schemas.openxmlformats.org/presentationml/2006/main" matchingName="Content with Caption" type="objTx">
   <p:cSld name="OBJECT_WITH_CAPTION_TEXT">
     <p:spTree>
@@ -8365,7 +6891,7 @@
 </p:sldLayout>
 </file>
 
-<file path=ppt/slideLayouts/slideLayout8.xml><?xml version="1.0" encoding="utf-8"?>
+<file path=ppt/slideLayouts/slideLayout7.xml><?xml version="1.0" encoding="utf-8"?>
 <p:sldLayout xmlns:a="http://schemas.openxmlformats.org/drawingml/2006/main" xmlns:r="http://schemas.openxmlformats.org/officeDocument/2006/relationships" xmlns:p="http://schemas.openxmlformats.org/presentationml/2006/main" matchingName="Picture with Caption" type="picTx">
   <p:cSld name="PICTURE_WITH_CAPTION_TEXT">
     <p:spTree>
@@ -9182,7 +7708,7 @@
 </p:sldLayout>
 </file>
 
-<file path=ppt/slideLayouts/slideLayout9.xml><?xml version="1.0" encoding="utf-8"?>
+<file path=ppt/slideLayouts/slideLayout8.xml><?xml version="1.0" encoding="utf-8"?>
 <p:sldLayout xmlns:a="http://schemas.openxmlformats.org/drawingml/2006/main" xmlns:r="http://schemas.openxmlformats.org/officeDocument/2006/relationships" xmlns:p="http://schemas.openxmlformats.org/presentationml/2006/main" matchingName="Title and Vertical Text" type="vertTx">
   <p:cSld name="VERTICAL_TEXT">
     <p:spTree>
@@ -9761,6 +8287,799 @@
       <p:sp>
         <p:nvSpPr>
           <p:cNvPr id="77" name="Google Shape;77;p12"/>
+          <p:cNvSpPr txBox="1">
+            <a:spLocks noGrp="1"/>
+          </p:cNvSpPr>
+          <p:nvPr>
+            <p:ph type="sldNum" idx="12"/>
+          </p:nvPr>
+        </p:nvSpPr>
+        <p:spPr>
+          <a:xfrm>
+            <a:off x="26213043" y="30510162"/>
+            <a:ext cx="8533917" cy="1753557"/>
+          </a:xfrm>
+          <a:prstGeom prst="rect">
+            <a:avLst/>
+          </a:prstGeom>
+          <a:noFill/>
+          <a:ln>
+            <a:noFill/>
+          </a:ln>
+        </p:spPr>
+        <p:txBody>
+          <a:bodyPr spcFirstLastPara="1" wrap="square" lIns="349525" tIns="174750" rIns="349525" bIns="174750" anchor="ctr" anchorCtr="0">
+            <a:noAutofit/>
+          </a:bodyPr>
+          <a:lstStyle>
+            <a:lvl1pPr marL="0" marR="0" lvl="0" indent="0" algn="r">
+              <a:spcBef>
+                <a:spcPts val="0"/>
+              </a:spcBef>
+              <a:spcAft>
+                <a:spcPts val="0"/>
+              </a:spcAft>
+              <a:buNone/>
+              <a:defRPr sz="4674" b="0" i="0" u="none" strike="noStrike" cap="none">
+                <a:solidFill>
+                  <a:srgbClr val="888888"/>
+                </a:solidFill>
+                <a:latin typeface="Calibri"/>
+                <a:ea typeface="Calibri"/>
+                <a:cs typeface="Calibri"/>
+                <a:sym typeface="Calibri"/>
+              </a:defRPr>
+            </a:lvl1pPr>
+            <a:lvl2pPr marL="0" marR="0" lvl="1" indent="0" algn="r">
+              <a:spcBef>
+                <a:spcPts val="0"/>
+              </a:spcBef>
+              <a:spcAft>
+                <a:spcPts val="0"/>
+              </a:spcAft>
+              <a:buNone/>
+              <a:defRPr sz="4674" b="0" i="0" u="none" strike="noStrike" cap="none">
+                <a:solidFill>
+                  <a:srgbClr val="888888"/>
+                </a:solidFill>
+                <a:latin typeface="Calibri"/>
+                <a:ea typeface="Calibri"/>
+                <a:cs typeface="Calibri"/>
+                <a:sym typeface="Calibri"/>
+              </a:defRPr>
+            </a:lvl2pPr>
+            <a:lvl3pPr marL="0" marR="0" lvl="2" indent="0" algn="r">
+              <a:spcBef>
+                <a:spcPts val="0"/>
+              </a:spcBef>
+              <a:spcAft>
+                <a:spcPts val="0"/>
+              </a:spcAft>
+              <a:buNone/>
+              <a:defRPr sz="4674" b="0" i="0" u="none" strike="noStrike" cap="none">
+                <a:solidFill>
+                  <a:srgbClr val="888888"/>
+                </a:solidFill>
+                <a:latin typeface="Calibri"/>
+                <a:ea typeface="Calibri"/>
+                <a:cs typeface="Calibri"/>
+                <a:sym typeface="Calibri"/>
+              </a:defRPr>
+            </a:lvl3pPr>
+            <a:lvl4pPr marL="0" marR="0" lvl="3" indent="0" algn="r">
+              <a:spcBef>
+                <a:spcPts val="0"/>
+              </a:spcBef>
+              <a:spcAft>
+                <a:spcPts val="0"/>
+              </a:spcAft>
+              <a:buNone/>
+              <a:defRPr sz="4674" b="0" i="0" u="none" strike="noStrike" cap="none">
+                <a:solidFill>
+                  <a:srgbClr val="888888"/>
+                </a:solidFill>
+                <a:latin typeface="Calibri"/>
+                <a:ea typeface="Calibri"/>
+                <a:cs typeface="Calibri"/>
+                <a:sym typeface="Calibri"/>
+              </a:defRPr>
+            </a:lvl4pPr>
+            <a:lvl5pPr marL="0" marR="0" lvl="4" indent="0" algn="r">
+              <a:spcBef>
+                <a:spcPts val="0"/>
+              </a:spcBef>
+              <a:spcAft>
+                <a:spcPts val="0"/>
+              </a:spcAft>
+              <a:buNone/>
+              <a:defRPr sz="4674" b="0" i="0" u="none" strike="noStrike" cap="none">
+                <a:solidFill>
+                  <a:srgbClr val="888888"/>
+                </a:solidFill>
+                <a:latin typeface="Calibri"/>
+                <a:ea typeface="Calibri"/>
+                <a:cs typeface="Calibri"/>
+                <a:sym typeface="Calibri"/>
+              </a:defRPr>
+            </a:lvl5pPr>
+            <a:lvl6pPr marL="0" marR="0" lvl="5" indent="0" algn="r">
+              <a:spcBef>
+                <a:spcPts val="0"/>
+              </a:spcBef>
+              <a:spcAft>
+                <a:spcPts val="0"/>
+              </a:spcAft>
+              <a:buNone/>
+              <a:defRPr sz="4674" b="0" i="0" u="none" strike="noStrike" cap="none">
+                <a:solidFill>
+                  <a:srgbClr val="888888"/>
+                </a:solidFill>
+                <a:latin typeface="Calibri"/>
+                <a:ea typeface="Calibri"/>
+                <a:cs typeface="Calibri"/>
+                <a:sym typeface="Calibri"/>
+              </a:defRPr>
+            </a:lvl6pPr>
+            <a:lvl7pPr marL="0" marR="0" lvl="6" indent="0" algn="r">
+              <a:spcBef>
+                <a:spcPts val="0"/>
+              </a:spcBef>
+              <a:spcAft>
+                <a:spcPts val="0"/>
+              </a:spcAft>
+              <a:buNone/>
+              <a:defRPr sz="4674" b="0" i="0" u="none" strike="noStrike" cap="none">
+                <a:solidFill>
+                  <a:srgbClr val="888888"/>
+                </a:solidFill>
+                <a:latin typeface="Calibri"/>
+                <a:ea typeface="Calibri"/>
+                <a:cs typeface="Calibri"/>
+                <a:sym typeface="Calibri"/>
+              </a:defRPr>
+            </a:lvl7pPr>
+            <a:lvl8pPr marL="0" marR="0" lvl="7" indent="0" algn="r">
+              <a:spcBef>
+                <a:spcPts val="0"/>
+              </a:spcBef>
+              <a:spcAft>
+                <a:spcPts val="0"/>
+              </a:spcAft>
+              <a:buNone/>
+              <a:defRPr sz="4674" b="0" i="0" u="none" strike="noStrike" cap="none">
+                <a:solidFill>
+                  <a:srgbClr val="888888"/>
+                </a:solidFill>
+                <a:latin typeface="Calibri"/>
+                <a:ea typeface="Calibri"/>
+                <a:cs typeface="Calibri"/>
+                <a:sym typeface="Calibri"/>
+              </a:defRPr>
+            </a:lvl8pPr>
+            <a:lvl9pPr marL="0" marR="0" lvl="8" indent="0" algn="r">
+              <a:spcBef>
+                <a:spcPts val="0"/>
+              </a:spcBef>
+              <a:spcAft>
+                <a:spcPts val="0"/>
+              </a:spcAft>
+              <a:buNone/>
+              <a:defRPr sz="4674" b="0" i="0" u="none" strike="noStrike" cap="none">
+                <a:solidFill>
+                  <a:srgbClr val="888888"/>
+                </a:solidFill>
+                <a:latin typeface="Calibri"/>
+                <a:ea typeface="Calibri"/>
+                <a:cs typeface="Calibri"/>
+                <a:sym typeface="Calibri"/>
+              </a:defRPr>
+            </a:lvl9pPr>
+          </a:lstStyle>
+          <a:p>
+            <a:pPr marL="0" lvl="0" indent="0" algn="r" rtl="0">
+              <a:spcBef>
+                <a:spcPts val="0"/>
+              </a:spcBef>
+              <a:spcAft>
+                <a:spcPts val="0"/>
+              </a:spcAft>
+              <a:buNone/>
+            </a:pPr>
+            <a:fld id="{00000000-1234-1234-1234-123412341234}" type="slidenum">
+              <a:rPr lang="en-US"/>
+              <a:t>‹#›</a:t>
+            </a:fld>
+            <a:endParaRPr/>
+          </a:p>
+        </p:txBody>
+      </p:sp>
+    </p:spTree>
+  </p:cSld>
+  <p:clrMapOvr>
+    <a:masterClrMapping/>
+  </p:clrMapOvr>
+</p:sldLayout>
+</file>
+
+<file path=ppt/slideLayouts/slideLayout9.xml><?xml version="1.0" encoding="utf-8"?>
+<p:sldLayout xmlns:a="http://schemas.openxmlformats.org/drawingml/2006/main" xmlns:r="http://schemas.openxmlformats.org/officeDocument/2006/relationships" xmlns:p="http://schemas.openxmlformats.org/presentationml/2006/main" matchingName="Vertical Title and Text" type="vertTitleAndTx">
+  <p:cSld name="VERTICAL_TITLE_AND_VERTICAL_TEXT">
+    <p:spTree>
+      <p:nvGrpSpPr>
+        <p:cNvPr id="1" name="Shape 78"/>
+        <p:cNvGrpSpPr/>
+        <p:nvPr/>
+      </p:nvGrpSpPr>
+      <p:grpSpPr>
+        <a:xfrm>
+          <a:off x="0" y="0"/>
+          <a:ext cx="0" cy="0"/>
+          <a:chOff x="0" y="0"/>
+          <a:chExt cx="0" cy="0"/>
+        </a:xfrm>
+      </p:grpSpPr>
+      <p:sp>
+        <p:nvSpPr>
+          <p:cNvPr id="79" name="Google Shape;79;p13"/>
+          <p:cNvSpPr txBox="1">
+            <a:spLocks noGrp="1"/>
+          </p:cNvSpPr>
+          <p:nvPr>
+            <p:ph type="title"/>
+          </p:nvPr>
+        </p:nvSpPr>
+        <p:spPr>
+          <a:xfrm rot="5400000">
+            <a:off x="85751673" y="53160931"/>
+            <a:ext cx="134820662" cy="41148001"/>
+          </a:xfrm>
+          <a:prstGeom prst="rect">
+            <a:avLst/>
+          </a:prstGeom>
+          <a:noFill/>
+          <a:ln>
+            <a:noFill/>
+          </a:ln>
+        </p:spPr>
+        <p:txBody>
+          <a:bodyPr spcFirstLastPara="1" wrap="square" lIns="349525" tIns="174750" rIns="349525" bIns="174750" anchor="ctr" anchorCtr="0">
+            <a:noAutofit/>
+          </a:bodyPr>
+          <a:lstStyle>
+            <a:lvl1pPr lvl="0" algn="ctr">
+              <a:spcBef>
+                <a:spcPts val="0"/>
+              </a:spcBef>
+              <a:spcAft>
+                <a:spcPts val="0"/>
+              </a:spcAft>
+              <a:buSzPts val="1400"/>
+              <a:buNone/>
+              <a:defRPr/>
+            </a:lvl1pPr>
+            <a:lvl2pPr lvl="1" algn="ctr">
+              <a:spcBef>
+                <a:spcPts val="0"/>
+              </a:spcBef>
+              <a:spcAft>
+                <a:spcPts val="0"/>
+              </a:spcAft>
+              <a:buSzPts val="1400"/>
+              <a:buNone/>
+              <a:defRPr/>
+            </a:lvl2pPr>
+            <a:lvl3pPr lvl="2" algn="ctr">
+              <a:spcBef>
+                <a:spcPts val="0"/>
+              </a:spcBef>
+              <a:spcAft>
+                <a:spcPts val="0"/>
+              </a:spcAft>
+              <a:buSzPts val="1400"/>
+              <a:buNone/>
+              <a:defRPr/>
+            </a:lvl3pPr>
+            <a:lvl4pPr lvl="3" algn="ctr">
+              <a:spcBef>
+                <a:spcPts val="0"/>
+              </a:spcBef>
+              <a:spcAft>
+                <a:spcPts val="0"/>
+              </a:spcAft>
+              <a:buSzPts val="1400"/>
+              <a:buNone/>
+              <a:defRPr/>
+            </a:lvl4pPr>
+            <a:lvl5pPr lvl="4" algn="ctr">
+              <a:spcBef>
+                <a:spcPts val="0"/>
+              </a:spcBef>
+              <a:spcAft>
+                <a:spcPts val="0"/>
+              </a:spcAft>
+              <a:buSzPts val="1400"/>
+              <a:buNone/>
+              <a:defRPr/>
+            </a:lvl5pPr>
+            <a:lvl6pPr lvl="5" algn="ctr">
+              <a:spcBef>
+                <a:spcPts val="0"/>
+              </a:spcBef>
+              <a:spcAft>
+                <a:spcPts val="0"/>
+              </a:spcAft>
+              <a:buSzPts val="1400"/>
+              <a:buNone/>
+              <a:defRPr/>
+            </a:lvl6pPr>
+            <a:lvl7pPr lvl="6" algn="ctr">
+              <a:spcBef>
+                <a:spcPts val="0"/>
+              </a:spcBef>
+              <a:spcAft>
+                <a:spcPts val="0"/>
+              </a:spcAft>
+              <a:buSzPts val="1400"/>
+              <a:buNone/>
+              <a:defRPr/>
+            </a:lvl7pPr>
+            <a:lvl8pPr lvl="7" algn="ctr">
+              <a:spcBef>
+                <a:spcPts val="0"/>
+              </a:spcBef>
+              <a:spcAft>
+                <a:spcPts val="0"/>
+              </a:spcAft>
+              <a:buSzPts val="1400"/>
+              <a:buNone/>
+              <a:defRPr/>
+            </a:lvl8pPr>
+            <a:lvl9pPr lvl="8" algn="ctr">
+              <a:spcBef>
+                <a:spcPts val="0"/>
+              </a:spcBef>
+              <a:spcAft>
+                <a:spcPts val="0"/>
+              </a:spcAft>
+              <a:buSzPts val="1400"/>
+              <a:buNone/>
+              <a:defRPr/>
+            </a:lvl9pPr>
+          </a:lstStyle>
+          <a:p>
+            <a:endParaRPr/>
+          </a:p>
+        </p:txBody>
+      </p:sp>
+      <p:sp>
+        <p:nvSpPr>
+          <p:cNvPr id="80" name="Google Shape;80;p13"/>
+          <p:cNvSpPr txBox="1">
+            <a:spLocks noGrp="1"/>
+          </p:cNvSpPr>
+          <p:nvPr>
+            <p:ph type="body" idx="1"/>
+          </p:nvPr>
+        </p:nvSpPr>
+        <p:spPr>
+          <a:xfrm rot="5400000">
+            <a:off x="3150869" y="12317731"/>
+            <a:ext cx="134820662" cy="122834400"/>
+          </a:xfrm>
+          <a:prstGeom prst="rect">
+            <a:avLst/>
+          </a:prstGeom>
+          <a:noFill/>
+          <a:ln>
+            <a:noFill/>
+          </a:ln>
+        </p:spPr>
+        <p:txBody>
+          <a:bodyPr spcFirstLastPara="1" wrap="square" lIns="349525" tIns="174750" rIns="349525" bIns="174750" anchor="t" anchorCtr="0">
+            <a:noAutofit/>
+          </a:bodyPr>
+          <a:lstStyle>
+            <a:lvl1pPr marL="457200" lvl="0" indent="-342900" algn="l">
+              <a:spcBef>
+                <a:spcPts val="360"/>
+              </a:spcBef>
+              <a:spcAft>
+                <a:spcPts val="0"/>
+              </a:spcAft>
+              <a:buClr>
+                <a:schemeClr val="dk1"/>
+              </a:buClr>
+              <a:buSzPts val="1800"/>
+              <a:buChar char="•"/>
+              <a:defRPr/>
+            </a:lvl1pPr>
+            <a:lvl2pPr marL="914400" lvl="1" indent="-342900" algn="l">
+              <a:spcBef>
+                <a:spcPts val="360"/>
+              </a:spcBef>
+              <a:spcAft>
+                <a:spcPts val="0"/>
+              </a:spcAft>
+              <a:buClr>
+                <a:schemeClr val="dk1"/>
+              </a:buClr>
+              <a:buSzPts val="1800"/>
+              <a:buChar char="–"/>
+              <a:defRPr/>
+            </a:lvl2pPr>
+            <a:lvl3pPr marL="1371600" lvl="2" indent="-342900" algn="l">
+              <a:spcBef>
+                <a:spcPts val="360"/>
+              </a:spcBef>
+              <a:spcAft>
+                <a:spcPts val="0"/>
+              </a:spcAft>
+              <a:buClr>
+                <a:schemeClr val="dk1"/>
+              </a:buClr>
+              <a:buSzPts val="1800"/>
+              <a:buChar char="•"/>
+              <a:defRPr/>
+            </a:lvl3pPr>
+            <a:lvl4pPr marL="1828800" lvl="3" indent="-342900" algn="l">
+              <a:spcBef>
+                <a:spcPts val="360"/>
+              </a:spcBef>
+              <a:spcAft>
+                <a:spcPts val="0"/>
+              </a:spcAft>
+              <a:buClr>
+                <a:schemeClr val="dk1"/>
+              </a:buClr>
+              <a:buSzPts val="1800"/>
+              <a:buChar char="–"/>
+              <a:defRPr/>
+            </a:lvl4pPr>
+            <a:lvl5pPr marL="2286000" lvl="4" indent="-342900" algn="l">
+              <a:spcBef>
+                <a:spcPts val="360"/>
+              </a:spcBef>
+              <a:spcAft>
+                <a:spcPts val="0"/>
+              </a:spcAft>
+              <a:buClr>
+                <a:schemeClr val="dk1"/>
+              </a:buClr>
+              <a:buSzPts val="1800"/>
+              <a:buChar char="»"/>
+              <a:defRPr/>
+            </a:lvl5pPr>
+            <a:lvl6pPr marL="2743200" lvl="5" indent="-342900" algn="l">
+              <a:spcBef>
+                <a:spcPts val="360"/>
+              </a:spcBef>
+              <a:spcAft>
+                <a:spcPts val="0"/>
+              </a:spcAft>
+              <a:buClr>
+                <a:schemeClr val="dk1"/>
+              </a:buClr>
+              <a:buSzPts val="1800"/>
+              <a:buChar char="•"/>
+              <a:defRPr/>
+            </a:lvl6pPr>
+            <a:lvl7pPr marL="3200400" lvl="6" indent="-342900" algn="l">
+              <a:spcBef>
+                <a:spcPts val="360"/>
+              </a:spcBef>
+              <a:spcAft>
+                <a:spcPts val="0"/>
+              </a:spcAft>
+              <a:buClr>
+                <a:schemeClr val="dk1"/>
+              </a:buClr>
+              <a:buSzPts val="1800"/>
+              <a:buChar char="•"/>
+              <a:defRPr/>
+            </a:lvl7pPr>
+            <a:lvl8pPr marL="3657600" lvl="7" indent="-342900" algn="l">
+              <a:spcBef>
+                <a:spcPts val="360"/>
+              </a:spcBef>
+              <a:spcAft>
+                <a:spcPts val="0"/>
+              </a:spcAft>
+              <a:buClr>
+                <a:schemeClr val="dk1"/>
+              </a:buClr>
+              <a:buSzPts val="1800"/>
+              <a:buChar char="•"/>
+              <a:defRPr/>
+            </a:lvl8pPr>
+            <a:lvl9pPr marL="4114800" lvl="8" indent="-342900" algn="l">
+              <a:spcBef>
+                <a:spcPts val="360"/>
+              </a:spcBef>
+              <a:spcAft>
+                <a:spcPts val="0"/>
+              </a:spcAft>
+              <a:buClr>
+                <a:schemeClr val="dk1"/>
+              </a:buClr>
+              <a:buSzPts val="1800"/>
+              <a:buChar char="•"/>
+              <a:defRPr/>
+            </a:lvl9pPr>
+          </a:lstStyle>
+          <a:p>
+            <a:endParaRPr/>
+          </a:p>
+        </p:txBody>
+      </p:sp>
+      <p:sp>
+        <p:nvSpPr>
+          <p:cNvPr id="81" name="Google Shape;81;p13"/>
+          <p:cNvSpPr txBox="1">
+            <a:spLocks noGrp="1"/>
+          </p:cNvSpPr>
+          <p:nvPr>
+            <p:ph type="dt" idx="10"/>
+          </p:nvPr>
+        </p:nvSpPr>
+        <p:spPr>
+          <a:xfrm>
+            <a:off x="1829043" y="30510162"/>
+            <a:ext cx="8533917" cy="1753557"/>
+          </a:xfrm>
+          <a:prstGeom prst="rect">
+            <a:avLst/>
+          </a:prstGeom>
+          <a:noFill/>
+          <a:ln>
+            <a:noFill/>
+          </a:ln>
+        </p:spPr>
+        <p:txBody>
+          <a:bodyPr spcFirstLastPara="1" wrap="square" lIns="349525" tIns="174750" rIns="349525" bIns="174750" anchor="ctr" anchorCtr="0">
+            <a:noAutofit/>
+          </a:bodyPr>
+          <a:lstStyle>
+            <a:lvl1pPr lvl="0" algn="l">
+              <a:spcBef>
+                <a:spcPts val="0"/>
+              </a:spcBef>
+              <a:spcAft>
+                <a:spcPts val="0"/>
+              </a:spcAft>
+              <a:buSzPts val="1400"/>
+              <a:buNone/>
+              <a:defRPr/>
+            </a:lvl1pPr>
+            <a:lvl2pPr lvl="1" algn="l">
+              <a:spcBef>
+                <a:spcPts val="0"/>
+              </a:spcBef>
+              <a:spcAft>
+                <a:spcPts val="0"/>
+              </a:spcAft>
+              <a:buSzPts val="1400"/>
+              <a:buNone/>
+              <a:defRPr/>
+            </a:lvl2pPr>
+            <a:lvl3pPr lvl="2" algn="l">
+              <a:spcBef>
+                <a:spcPts val="0"/>
+              </a:spcBef>
+              <a:spcAft>
+                <a:spcPts val="0"/>
+              </a:spcAft>
+              <a:buSzPts val="1400"/>
+              <a:buNone/>
+              <a:defRPr/>
+            </a:lvl3pPr>
+            <a:lvl4pPr lvl="3" algn="l">
+              <a:spcBef>
+                <a:spcPts val="0"/>
+              </a:spcBef>
+              <a:spcAft>
+                <a:spcPts val="0"/>
+              </a:spcAft>
+              <a:buSzPts val="1400"/>
+              <a:buNone/>
+              <a:defRPr/>
+            </a:lvl4pPr>
+            <a:lvl5pPr lvl="4" algn="l">
+              <a:spcBef>
+                <a:spcPts val="0"/>
+              </a:spcBef>
+              <a:spcAft>
+                <a:spcPts val="0"/>
+              </a:spcAft>
+              <a:buSzPts val="1400"/>
+              <a:buNone/>
+              <a:defRPr/>
+            </a:lvl5pPr>
+            <a:lvl6pPr lvl="5" algn="l">
+              <a:spcBef>
+                <a:spcPts val="0"/>
+              </a:spcBef>
+              <a:spcAft>
+                <a:spcPts val="0"/>
+              </a:spcAft>
+              <a:buSzPts val="1400"/>
+              <a:buNone/>
+              <a:defRPr/>
+            </a:lvl6pPr>
+            <a:lvl7pPr lvl="6" algn="l">
+              <a:spcBef>
+                <a:spcPts val="0"/>
+              </a:spcBef>
+              <a:spcAft>
+                <a:spcPts val="0"/>
+              </a:spcAft>
+              <a:buSzPts val="1400"/>
+              <a:buNone/>
+              <a:defRPr/>
+            </a:lvl7pPr>
+            <a:lvl8pPr lvl="7" algn="l">
+              <a:spcBef>
+                <a:spcPts val="0"/>
+              </a:spcBef>
+              <a:spcAft>
+                <a:spcPts val="0"/>
+              </a:spcAft>
+              <a:buSzPts val="1400"/>
+              <a:buNone/>
+              <a:defRPr/>
+            </a:lvl8pPr>
+            <a:lvl9pPr lvl="8" algn="l">
+              <a:spcBef>
+                <a:spcPts val="0"/>
+              </a:spcBef>
+              <a:spcAft>
+                <a:spcPts val="0"/>
+              </a:spcAft>
+              <a:buSzPts val="1400"/>
+              <a:buNone/>
+              <a:defRPr/>
+            </a:lvl9pPr>
+          </a:lstStyle>
+          <a:p>
+            <a:endParaRPr/>
+          </a:p>
+        </p:txBody>
+      </p:sp>
+      <p:sp>
+        <p:nvSpPr>
+          <p:cNvPr id="82" name="Google Shape;82;p13"/>
+          <p:cNvSpPr txBox="1">
+            <a:spLocks noGrp="1"/>
+          </p:cNvSpPr>
+          <p:nvPr>
+            <p:ph type="ftr" idx="11"/>
+          </p:nvPr>
+        </p:nvSpPr>
+        <p:spPr>
+          <a:xfrm>
+            <a:off x="12496840" y="30510162"/>
+            <a:ext cx="11582320" cy="1753557"/>
+          </a:xfrm>
+          <a:prstGeom prst="rect">
+            <a:avLst/>
+          </a:prstGeom>
+          <a:noFill/>
+          <a:ln>
+            <a:noFill/>
+          </a:ln>
+        </p:spPr>
+        <p:txBody>
+          <a:bodyPr spcFirstLastPara="1" wrap="square" lIns="349525" tIns="174750" rIns="349525" bIns="174750" anchor="ctr" anchorCtr="0">
+            <a:noAutofit/>
+          </a:bodyPr>
+          <a:lstStyle>
+            <a:lvl1pPr lvl="0" algn="ctr">
+              <a:spcBef>
+                <a:spcPts val="0"/>
+              </a:spcBef>
+              <a:spcAft>
+                <a:spcPts val="0"/>
+              </a:spcAft>
+              <a:buSzPts val="1400"/>
+              <a:buNone/>
+              <a:defRPr/>
+            </a:lvl1pPr>
+            <a:lvl2pPr lvl="1" algn="l">
+              <a:spcBef>
+                <a:spcPts val="0"/>
+              </a:spcBef>
+              <a:spcAft>
+                <a:spcPts val="0"/>
+              </a:spcAft>
+              <a:buSzPts val="1400"/>
+              <a:buNone/>
+              <a:defRPr/>
+            </a:lvl2pPr>
+            <a:lvl3pPr lvl="2" algn="l">
+              <a:spcBef>
+                <a:spcPts val="0"/>
+              </a:spcBef>
+              <a:spcAft>
+                <a:spcPts val="0"/>
+              </a:spcAft>
+              <a:buSzPts val="1400"/>
+              <a:buNone/>
+              <a:defRPr/>
+            </a:lvl3pPr>
+            <a:lvl4pPr lvl="3" algn="l">
+              <a:spcBef>
+                <a:spcPts val="0"/>
+              </a:spcBef>
+              <a:spcAft>
+                <a:spcPts val="0"/>
+              </a:spcAft>
+              <a:buSzPts val="1400"/>
+              <a:buNone/>
+              <a:defRPr/>
+            </a:lvl4pPr>
+            <a:lvl5pPr lvl="4" algn="l">
+              <a:spcBef>
+                <a:spcPts val="0"/>
+              </a:spcBef>
+              <a:spcAft>
+                <a:spcPts val="0"/>
+              </a:spcAft>
+              <a:buSzPts val="1400"/>
+              <a:buNone/>
+              <a:defRPr/>
+            </a:lvl5pPr>
+            <a:lvl6pPr lvl="5" algn="l">
+              <a:spcBef>
+                <a:spcPts val="0"/>
+              </a:spcBef>
+              <a:spcAft>
+                <a:spcPts val="0"/>
+              </a:spcAft>
+              <a:buSzPts val="1400"/>
+              <a:buNone/>
+              <a:defRPr/>
+            </a:lvl6pPr>
+            <a:lvl7pPr lvl="6" algn="l">
+              <a:spcBef>
+                <a:spcPts val="0"/>
+              </a:spcBef>
+              <a:spcAft>
+                <a:spcPts val="0"/>
+              </a:spcAft>
+              <a:buSzPts val="1400"/>
+              <a:buNone/>
+              <a:defRPr/>
+            </a:lvl7pPr>
+            <a:lvl8pPr lvl="7" algn="l">
+              <a:spcBef>
+                <a:spcPts val="0"/>
+              </a:spcBef>
+              <a:spcAft>
+                <a:spcPts val="0"/>
+              </a:spcAft>
+              <a:buSzPts val="1400"/>
+              <a:buNone/>
+              <a:defRPr/>
+            </a:lvl8pPr>
+            <a:lvl9pPr lvl="8" algn="l">
+              <a:spcBef>
+                <a:spcPts val="0"/>
+              </a:spcBef>
+              <a:spcAft>
+                <a:spcPts val="0"/>
+              </a:spcAft>
+              <a:buSzPts val="1400"/>
+              <a:buNone/>
+              <a:defRPr/>
+            </a:lvl9pPr>
+          </a:lstStyle>
+          <a:p>
+            <a:endParaRPr/>
+          </a:p>
+        </p:txBody>
+      </p:sp>
+      <p:sp>
+        <p:nvSpPr>
+          <p:cNvPr id="83" name="Google Shape;83;p13"/>
           <p:cNvSpPr txBox="1">
             <a:spLocks noGrp="1"/>
           </p:cNvSpPr>
@@ -11069,16 +10388,15 @@
   </p:cSld>
   <p:clrMap bg1="lt1" tx1="dk1" bg2="dk2" tx2="lt2" accent1="accent1" accent2="accent2" accent3="accent3" accent4="accent4" accent5="accent5" accent6="accent6" hlink="hlink" folHlink="folHlink"/>
   <p:sldLayoutIdLst>
-    <p:sldLayoutId id="2147483649" r:id="rId1"/>
-    <p:sldLayoutId id="2147483651" r:id="rId2"/>
-    <p:sldLayoutId id="2147483652" r:id="rId3"/>
-    <p:sldLayoutId id="2147483653" r:id="rId4"/>
-    <p:sldLayoutId id="2147483654" r:id="rId5"/>
-    <p:sldLayoutId id="2147483655" r:id="rId6"/>
-    <p:sldLayoutId id="2147483656" r:id="rId7"/>
-    <p:sldLayoutId id="2147483657" r:id="rId8"/>
-    <p:sldLayoutId id="2147483658" r:id="rId9"/>
-    <p:sldLayoutId id="2147483659" r:id="rId10"/>
+    <p:sldLayoutId id="2147483651" r:id="rId1"/>
+    <p:sldLayoutId id="2147483652" r:id="rId2"/>
+    <p:sldLayoutId id="2147483653" r:id="rId3"/>
+    <p:sldLayoutId id="2147483654" r:id="rId4"/>
+    <p:sldLayoutId id="2147483655" r:id="rId5"/>
+    <p:sldLayoutId id="2147483656" r:id="rId6"/>
+    <p:sldLayoutId id="2147483657" r:id="rId7"/>
+    <p:sldLayoutId id="2147483658" r:id="rId8"/>
+    <p:sldLayoutId id="2147483659" r:id="rId9"/>
   </p:sldLayoutIdLst>
   <p:hf sldNum="0" hdr="0" ftr="0" dt="0"/>
   <p:txStyles>
@@ -11918,10 +11236,10 @@
       </p:graphicFrame>
       <p:pic>
         <p:nvPicPr>
-          <p:cNvPr id="3" name="Graphic 2">
+          <p:cNvPr id="4" name="Graphic 3">
             <a:extLst>
               <a:ext uri="{FF2B5EF4-FFF2-40B4-BE49-F238E27FC236}">
-                <a16:creationId xmlns:a16="http://schemas.microsoft.com/office/drawing/2014/main" id="{B0329384-54CD-C8B7-E7E5-FB29A4254873}"/>
+                <a16:creationId xmlns:a16="http://schemas.microsoft.com/office/drawing/2014/main" id="{3051C29F-2CCC-7E0B-BC9D-4E31FE4C9600}"/>
               </a:ext>
             </a:extLst>
           </p:cNvPr>
@@ -11938,15 +11256,15 @@
               </a:ext>
             </a:extLst>
           </a:blip>
-          <a:srcRect l="2604" t="2852" r="13854" b="359"/>
+          <a:srcRect l="3226" r="13710"/>
           <a:stretch>
             <a:fillRect/>
           </a:stretch>
         </p:blipFill>
         <p:spPr>
           <a:xfrm>
-            <a:off x="952500" y="8534400"/>
-            <a:ext cx="30556200" cy="16268700"/>
+            <a:off x="1179870" y="8340312"/>
+            <a:ext cx="30381677" cy="16237776"/>
           </a:xfrm>
           <a:prstGeom prst="rect">
             <a:avLst/>
@@ -11989,6 +11307,37 @@
           <a:chExt cx="0" cy="0"/>
         </a:xfrm>
       </p:grpSpPr>
+      <p:pic>
+        <p:nvPicPr>
+          <p:cNvPr id="55" name="Picture 54">
+            <a:extLst>
+              <a:ext uri="{FF2B5EF4-FFF2-40B4-BE49-F238E27FC236}">
+                <a16:creationId xmlns:a16="http://schemas.microsoft.com/office/drawing/2014/main" id="{A8C6A341-4651-E63C-29F7-B8F8FEA22F46}"/>
+              </a:ext>
+            </a:extLst>
+          </p:cNvPr>
+          <p:cNvPicPr>
+            <a:picLocks noChangeAspect="1"/>
+          </p:cNvPicPr>
+          <p:nvPr/>
+        </p:nvPicPr>
+        <p:blipFill>
+          <a:blip r:embed="rId2"/>
+          <a:srcRect l="20693" t="13669" r="27952" b="21961"/>
+          <a:stretch>
+            <a:fillRect/>
+          </a:stretch>
+        </p:blipFill>
+        <p:spPr>
+          <a:xfrm>
+            <a:off x="18355669" y="20284876"/>
+            <a:ext cx="3285583" cy="2346523"/>
+          </a:xfrm>
+          <a:prstGeom prst="rect">
+            <a:avLst/>
+          </a:prstGeom>
+        </p:spPr>
+      </p:pic>
       <p:graphicFrame>
         <p:nvGraphicFramePr>
           <p:cNvPr id="6" name="Object 5">
@@ -12011,12 +11360,12 @@
           <a:graphicData uri="http://schemas.openxmlformats.org/presentationml/2006/ole">
             <mc:AlternateContent xmlns:mc="http://schemas.openxmlformats.org/markup-compatibility/2006">
               <mc:Choice xmlns:v="urn:schemas-microsoft-com:vml" Requires="v">
-                <p:oleObj name="Packager Shell Object" showAsIcon="1" r:id="rId2" imgW="400069" imgH="514350" progId="Package">
+                <p:oleObj name="Packager Shell Object" showAsIcon="1" r:id="rId3" imgW="400069" imgH="514350" progId="Package">
                   <p:embed/>
                 </p:oleObj>
               </mc:Choice>
               <mc:Fallback>
-                <p:oleObj name="Packager Shell Object" showAsIcon="1" r:id="rId2" imgW="400069" imgH="514350" progId="Package">
+                <p:oleObj name="Packager Shell Object" showAsIcon="1" r:id="rId3" imgW="400069" imgH="514350" progId="Package">
                   <p:embed/>
                   <p:pic>
                     <p:nvPicPr>
@@ -12031,7 +11380,7 @@
                       <p:nvPr/>
                     </p:nvPicPr>
                     <p:blipFill>
-                      <a:blip r:embed="rId3"/>
+                      <a:blip r:embed="rId4"/>
                       <a:stretch>
                         <a:fillRect/>
                       </a:stretch>
@@ -12074,12 +11423,12 @@
           <a:graphicData uri="http://schemas.openxmlformats.org/presentationml/2006/ole">
             <mc:AlternateContent xmlns:mc="http://schemas.openxmlformats.org/markup-compatibility/2006">
               <mc:Choice xmlns:v="urn:schemas-microsoft-com:vml" Requires="v">
-                <p:oleObj name="Packager Shell Object" showAsIcon="1" r:id="rId4" imgW="400069" imgH="514350" progId="Package">
+                <p:oleObj name="Packager Shell Object" showAsIcon="1" r:id="rId5" imgW="400069" imgH="514350" progId="Package">
                   <p:embed/>
                 </p:oleObj>
               </mc:Choice>
               <mc:Fallback>
-                <p:oleObj name="Packager Shell Object" showAsIcon="1" r:id="rId4" imgW="400069" imgH="514350" progId="Package">
+                <p:oleObj name="Packager Shell Object" showAsIcon="1" r:id="rId5" imgW="400069" imgH="514350" progId="Package">
                   <p:embed/>
                   <p:pic>
                     <p:nvPicPr>
@@ -12094,7 +11443,7 @@
                       <p:nvPr/>
                     </p:nvPicPr>
                     <p:blipFill>
-                      <a:blip r:embed="rId5"/>
+                      <a:blip r:embed="rId6"/>
                       <a:stretch>
                         <a:fillRect/>
                       </a:stretch>
@@ -12130,16 +11479,16 @@
           <p:nvPr/>
         </p:nvPicPr>
         <p:blipFill>
-          <a:blip r:embed="rId6"/>
-          <a:srcRect l="21011" r="27940" b="16785"/>
+          <a:blip r:embed="rId7"/>
+          <a:srcRect l="21011" t="14116" r="27940" b="21628"/>
           <a:stretch>
             <a:fillRect/>
           </a:stretch>
         </p:blipFill>
         <p:spPr>
           <a:xfrm>
-            <a:off x="13428638" y="16699484"/>
-            <a:ext cx="3265965" cy="3033523"/>
+            <a:off x="13428638" y="17214066"/>
+            <a:ext cx="3265965" cy="2342413"/>
           </a:xfrm>
           <a:prstGeom prst="rect">
             <a:avLst/>
@@ -12161,16 +11510,16 @@
           <p:nvPr/>
         </p:nvPicPr>
         <p:blipFill>
-          <a:blip r:embed="rId7"/>
-          <a:srcRect l="21011" r="27940" b="16785"/>
+          <a:blip r:embed="rId8"/>
+          <a:srcRect l="21011" t="14116" r="27940" b="21947"/>
           <a:stretch>
             <a:fillRect/>
           </a:stretch>
         </p:blipFill>
         <p:spPr>
           <a:xfrm>
-            <a:off x="18375288" y="16699484"/>
-            <a:ext cx="3265965" cy="3033523"/>
+            <a:off x="18375288" y="17214066"/>
+            <a:ext cx="3265965" cy="2330735"/>
           </a:xfrm>
           <a:prstGeom prst="rect">
             <a:avLst/>
@@ -12192,16 +11541,16 @@
           <p:nvPr/>
         </p:nvPicPr>
         <p:blipFill>
-          <a:blip r:embed="rId8"/>
-          <a:srcRect l="21011" r="26720" b="13734"/>
+          <a:blip r:embed="rId9"/>
+          <a:srcRect l="21011" t="13668" r="26720" b="21963"/>
           <a:stretch>
             <a:fillRect/>
           </a:stretch>
         </p:blipFill>
         <p:spPr>
           <a:xfrm>
-            <a:off x="13428638" y="19786600"/>
-            <a:ext cx="3344070" cy="3144773"/>
+            <a:off x="13428638" y="20284875"/>
+            <a:ext cx="3344070" cy="2346525"/>
           </a:xfrm>
           <a:prstGeom prst="rect">
             <a:avLst/>
@@ -12223,7 +11572,7 @@
           <p:nvPr/>
         </p:nvPicPr>
         <p:blipFill>
-          <a:blip r:embed="rId6"/>
+          <a:blip r:embed="rId7"/>
           <a:srcRect l="72582" t="14725" r="10049" b="63999"/>
           <a:stretch>
             <a:fillRect/>
@@ -12233,37 +11582,6 @@
           <a:xfrm>
             <a:off x="22025939" y="17564984"/>
             <a:ext cx="1811622" cy="1264421"/>
-          </a:xfrm>
-          <a:prstGeom prst="rect">
-            <a:avLst/>
-          </a:prstGeom>
-        </p:spPr>
-      </p:pic>
-      <p:pic>
-        <p:nvPicPr>
-          <p:cNvPr id="13" name="Picture 12">
-            <a:extLst>
-              <a:ext uri="{FF2B5EF4-FFF2-40B4-BE49-F238E27FC236}">
-                <a16:creationId xmlns:a16="http://schemas.microsoft.com/office/drawing/2014/main" id="{13892BA7-A792-1A76-443B-A8EDEC3BD6FF}"/>
-              </a:ext>
-            </a:extLst>
-          </p:cNvPr>
-          <p:cNvPicPr>
-            <a:picLocks noChangeAspect="1"/>
-          </p:cNvPicPr>
-          <p:nvPr/>
-        </p:nvPicPr>
-        <p:blipFill>
-          <a:blip r:embed="rId9"/>
-          <a:srcRect l="21011" t="7710" r="27940" b="16217"/>
-          <a:stretch>
-            <a:fillRect/>
-          </a:stretch>
-        </p:blipFill>
-        <p:spPr>
-          <a:xfrm>
-            <a:off x="18375914" y="20066508"/>
-            <a:ext cx="3265965" cy="2773173"/>
           </a:xfrm>
           <a:prstGeom prst="rect">
             <a:avLst/>
@@ -12349,510 +11667,6 @@
               <a:t>β</a:t>
             </a:r>
             <a:endParaRPr lang="en-US" dirty="0"/>
-          </a:p>
-        </p:txBody>
-      </p:sp>
-      <p:sp>
-        <p:nvSpPr>
-          <p:cNvPr id="16" name="TextBox 15">
-            <a:extLst>
-              <a:ext uri="{FF2B5EF4-FFF2-40B4-BE49-F238E27FC236}">
-                <a16:creationId xmlns:a16="http://schemas.microsoft.com/office/drawing/2014/main" id="{54790D10-B8DA-9F70-2DD3-494C171F74E2}"/>
-              </a:ext>
-            </a:extLst>
-          </p:cNvPr>
-          <p:cNvSpPr txBox="1"/>
-          <p:nvPr/>
-        </p:nvSpPr>
-        <p:spPr>
-          <a:xfrm>
-            <a:off x="16579975" y="20406362"/>
-            <a:ext cx="1798320" cy="230832"/>
-          </a:xfrm>
-          <a:prstGeom prst="rect">
-            <a:avLst/>
-          </a:prstGeom>
-          <a:noFill/>
-        </p:spPr>
-        <p:txBody>
-          <a:bodyPr wrap="square" rtlCol="0">
-            <a:spAutoFit/>
-          </a:bodyPr>
-          <a:lstStyle/>
-          <a:p>
-            <a:pPr algn="r"/>
-            <a:r>
-              <a:rPr lang="en-US" sz="900" dirty="0"/>
-              <a:t>DNA age</a:t>
-            </a:r>
-          </a:p>
-        </p:txBody>
-      </p:sp>
-      <p:sp>
-        <p:nvSpPr>
-          <p:cNvPr id="17" name="TextBox 16">
-            <a:extLst>
-              <a:ext uri="{FF2B5EF4-FFF2-40B4-BE49-F238E27FC236}">
-                <a16:creationId xmlns:a16="http://schemas.microsoft.com/office/drawing/2014/main" id="{82685159-8FF5-DF81-2C46-50EDBCE59A50}"/>
-              </a:ext>
-            </a:extLst>
-          </p:cNvPr>
-          <p:cNvSpPr txBox="1"/>
-          <p:nvPr/>
-        </p:nvSpPr>
-        <p:spPr>
-          <a:xfrm>
-            <a:off x="16579975" y="20543490"/>
-            <a:ext cx="1798320" cy="230832"/>
-          </a:xfrm>
-          <a:prstGeom prst="rect">
-            <a:avLst/>
-          </a:prstGeom>
-          <a:noFill/>
-        </p:spPr>
-        <p:txBody>
-          <a:bodyPr wrap="square" rtlCol="0">
-            <a:spAutoFit/>
-          </a:bodyPr>
-          <a:lstStyle/>
-          <a:p>
-            <a:pPr algn="r"/>
-            <a:r>
-              <a:rPr lang="en-US" sz="900" dirty="0"/>
-              <a:t>DNA age x prop.</a:t>
-            </a:r>
-          </a:p>
-        </p:txBody>
-      </p:sp>
-      <p:sp>
-        <p:nvSpPr>
-          <p:cNvPr id="18" name="TextBox 17">
-            <a:extLst>
-              <a:ext uri="{FF2B5EF4-FFF2-40B4-BE49-F238E27FC236}">
-                <a16:creationId xmlns:a16="http://schemas.microsoft.com/office/drawing/2014/main" id="{5E5DB45D-F249-3142-58A9-6FABD69814BE}"/>
-              </a:ext>
-            </a:extLst>
-          </p:cNvPr>
-          <p:cNvSpPr txBox="1"/>
-          <p:nvPr/>
-        </p:nvSpPr>
-        <p:spPr>
-          <a:xfrm>
-            <a:off x="16579975" y="20682999"/>
-            <a:ext cx="1798320" cy="230832"/>
-          </a:xfrm>
-          <a:prstGeom prst="rect">
-            <a:avLst/>
-          </a:prstGeom>
-          <a:noFill/>
-        </p:spPr>
-        <p:txBody>
-          <a:bodyPr wrap="square" rtlCol="0">
-            <a:spAutoFit/>
-          </a:bodyPr>
-          <a:lstStyle/>
-          <a:p>
-            <a:pPr algn="r"/>
-            <a:r>
-              <a:rPr lang="en-US" sz="900" dirty="0"/>
-              <a:t>LINE age</a:t>
-            </a:r>
-          </a:p>
-        </p:txBody>
-      </p:sp>
-      <p:sp>
-        <p:nvSpPr>
-          <p:cNvPr id="19" name="TextBox 18">
-            <a:extLst>
-              <a:ext uri="{FF2B5EF4-FFF2-40B4-BE49-F238E27FC236}">
-                <a16:creationId xmlns:a16="http://schemas.microsoft.com/office/drawing/2014/main" id="{25A7DC2D-8DC1-E4A4-CDAF-EE6DF5FF9C15}"/>
-              </a:ext>
-            </a:extLst>
-          </p:cNvPr>
-          <p:cNvSpPr txBox="1"/>
-          <p:nvPr/>
-        </p:nvSpPr>
-        <p:spPr>
-          <a:xfrm>
-            <a:off x="16579975" y="20817746"/>
-            <a:ext cx="1798320" cy="230832"/>
-          </a:xfrm>
-          <a:prstGeom prst="rect">
-            <a:avLst/>
-          </a:prstGeom>
-          <a:noFill/>
-        </p:spPr>
-        <p:txBody>
-          <a:bodyPr wrap="square" rtlCol="0">
-            <a:spAutoFit/>
-          </a:bodyPr>
-          <a:lstStyle/>
-          <a:p>
-            <a:pPr algn="r"/>
-            <a:r>
-              <a:rPr lang="en-US" sz="900" dirty="0"/>
-              <a:t>LTR age x prop.</a:t>
-            </a:r>
-          </a:p>
-        </p:txBody>
-      </p:sp>
-      <p:sp>
-        <p:nvSpPr>
-          <p:cNvPr id="20" name="TextBox 19">
-            <a:extLst>
-              <a:ext uri="{FF2B5EF4-FFF2-40B4-BE49-F238E27FC236}">
-                <a16:creationId xmlns:a16="http://schemas.microsoft.com/office/drawing/2014/main" id="{E5747E68-ED2E-3A52-BB9B-2DC8EA2CD328}"/>
-              </a:ext>
-            </a:extLst>
-          </p:cNvPr>
-          <p:cNvSpPr txBox="1"/>
-          <p:nvPr/>
-        </p:nvSpPr>
-        <p:spPr>
-          <a:xfrm>
-            <a:off x="16579975" y="20956031"/>
-            <a:ext cx="1798320" cy="230832"/>
-          </a:xfrm>
-          <a:prstGeom prst="rect">
-            <a:avLst/>
-          </a:prstGeom>
-          <a:noFill/>
-        </p:spPr>
-        <p:txBody>
-          <a:bodyPr wrap="square" rtlCol="0">
-            <a:spAutoFit/>
-          </a:bodyPr>
-          <a:lstStyle/>
-          <a:p>
-            <a:pPr algn="r"/>
-            <a:r>
-              <a:rPr lang="en-US" sz="900" dirty="0"/>
-              <a:t>Others age</a:t>
-            </a:r>
-          </a:p>
-        </p:txBody>
-      </p:sp>
-      <p:sp>
-        <p:nvSpPr>
-          <p:cNvPr id="21" name="TextBox 20">
-            <a:extLst>
-              <a:ext uri="{FF2B5EF4-FFF2-40B4-BE49-F238E27FC236}">
-                <a16:creationId xmlns:a16="http://schemas.microsoft.com/office/drawing/2014/main" id="{5E7E5122-6636-773D-F33B-D237A1F3189D}"/>
-              </a:ext>
-            </a:extLst>
-          </p:cNvPr>
-          <p:cNvSpPr txBox="1"/>
-          <p:nvPr/>
-        </p:nvSpPr>
-        <p:spPr>
-          <a:xfrm>
-            <a:off x="16579975" y="21094047"/>
-            <a:ext cx="1798320" cy="230832"/>
-          </a:xfrm>
-          <a:prstGeom prst="rect">
-            <a:avLst/>
-          </a:prstGeom>
-          <a:noFill/>
-        </p:spPr>
-        <p:txBody>
-          <a:bodyPr wrap="square" rtlCol="0">
-            <a:spAutoFit/>
-          </a:bodyPr>
-          <a:lstStyle/>
-          <a:p>
-            <a:pPr algn="r"/>
-            <a:r>
-              <a:rPr lang="en-US" sz="900" dirty="0"/>
-              <a:t>Others age x prop.</a:t>
-            </a:r>
-          </a:p>
-        </p:txBody>
-      </p:sp>
-      <p:sp>
-        <p:nvSpPr>
-          <p:cNvPr id="22" name="TextBox 21">
-            <a:extLst>
-              <a:ext uri="{FF2B5EF4-FFF2-40B4-BE49-F238E27FC236}">
-                <a16:creationId xmlns:a16="http://schemas.microsoft.com/office/drawing/2014/main" id="{216B8C49-31A6-6F4E-E7B1-CCA865D0AF42}"/>
-              </a:ext>
-            </a:extLst>
-          </p:cNvPr>
-          <p:cNvSpPr txBox="1"/>
-          <p:nvPr/>
-        </p:nvSpPr>
-        <p:spPr>
-          <a:xfrm>
-            <a:off x="16579975" y="21233825"/>
-            <a:ext cx="1798320" cy="230832"/>
-          </a:xfrm>
-          <a:prstGeom prst="rect">
-            <a:avLst/>
-          </a:prstGeom>
-          <a:noFill/>
-        </p:spPr>
-        <p:txBody>
-          <a:bodyPr wrap="square" rtlCol="0">
-            <a:spAutoFit/>
-          </a:bodyPr>
-          <a:lstStyle/>
-          <a:p>
-            <a:pPr algn="r"/>
-            <a:r>
-              <a:rPr lang="en-US" sz="900" dirty="0"/>
-              <a:t>SINE age</a:t>
-            </a:r>
-          </a:p>
-        </p:txBody>
-      </p:sp>
-      <p:sp>
-        <p:nvSpPr>
-          <p:cNvPr id="23" name="TextBox 22">
-            <a:extLst>
-              <a:ext uri="{FF2B5EF4-FFF2-40B4-BE49-F238E27FC236}">
-                <a16:creationId xmlns:a16="http://schemas.microsoft.com/office/drawing/2014/main" id="{C3D21167-381E-4913-B700-13EFB3F73469}"/>
-              </a:ext>
-            </a:extLst>
-          </p:cNvPr>
-          <p:cNvSpPr txBox="1"/>
-          <p:nvPr/>
-        </p:nvSpPr>
-        <p:spPr>
-          <a:xfrm>
-            <a:off x="16579975" y="21370953"/>
-            <a:ext cx="1798320" cy="230832"/>
-          </a:xfrm>
-          <a:prstGeom prst="rect">
-            <a:avLst/>
-          </a:prstGeom>
-          <a:noFill/>
-        </p:spPr>
-        <p:txBody>
-          <a:bodyPr wrap="square" rtlCol="0">
-            <a:spAutoFit/>
-          </a:bodyPr>
-          <a:lstStyle/>
-          <a:p>
-            <a:pPr algn="r"/>
-            <a:r>
-              <a:rPr lang="en-US" sz="900" dirty="0"/>
-              <a:t>Unknown age</a:t>
-            </a:r>
-          </a:p>
-        </p:txBody>
-      </p:sp>
-      <p:sp>
-        <p:nvSpPr>
-          <p:cNvPr id="24" name="TextBox 23">
-            <a:extLst>
-              <a:ext uri="{FF2B5EF4-FFF2-40B4-BE49-F238E27FC236}">
-                <a16:creationId xmlns:a16="http://schemas.microsoft.com/office/drawing/2014/main" id="{1B289392-3E76-B88F-EBD5-0F57EC25218E}"/>
-              </a:ext>
-            </a:extLst>
-          </p:cNvPr>
-          <p:cNvSpPr txBox="1"/>
-          <p:nvPr/>
-        </p:nvSpPr>
-        <p:spPr>
-          <a:xfrm>
-            <a:off x="16579975" y="21510291"/>
-            <a:ext cx="1798320" cy="230832"/>
-          </a:xfrm>
-          <a:prstGeom prst="rect">
-            <a:avLst/>
-          </a:prstGeom>
-          <a:noFill/>
-        </p:spPr>
-        <p:txBody>
-          <a:bodyPr wrap="square" rtlCol="0">
-            <a:spAutoFit/>
-          </a:bodyPr>
-          <a:lstStyle/>
-          <a:p>
-            <a:pPr algn="r"/>
-            <a:r>
-              <a:rPr lang="en-US" sz="900" dirty="0"/>
-              <a:t>Unknown age x prop.</a:t>
-            </a:r>
-          </a:p>
-        </p:txBody>
-      </p:sp>
-      <p:sp>
-        <p:nvSpPr>
-          <p:cNvPr id="25" name="TextBox 24">
-            <a:extLst>
-              <a:ext uri="{FF2B5EF4-FFF2-40B4-BE49-F238E27FC236}">
-                <a16:creationId xmlns:a16="http://schemas.microsoft.com/office/drawing/2014/main" id="{6507EAF1-8139-FE2C-9A3D-A368B6223934}"/>
-              </a:ext>
-            </a:extLst>
-          </p:cNvPr>
-          <p:cNvSpPr txBox="1"/>
-          <p:nvPr/>
-        </p:nvSpPr>
-        <p:spPr>
-          <a:xfrm>
-            <a:off x="16579975" y="21648315"/>
-            <a:ext cx="1798320" cy="230832"/>
-          </a:xfrm>
-          <a:prstGeom prst="rect">
-            <a:avLst/>
-          </a:prstGeom>
-          <a:noFill/>
-        </p:spPr>
-        <p:txBody>
-          <a:bodyPr wrap="square" rtlCol="0">
-            <a:spAutoFit/>
-          </a:bodyPr>
-          <a:lstStyle/>
-          <a:p>
-            <a:pPr algn="r"/>
-            <a:r>
-              <a:rPr lang="en-US" sz="900" dirty="0"/>
-              <a:t>LINE proportion</a:t>
-            </a:r>
-          </a:p>
-        </p:txBody>
-      </p:sp>
-      <p:sp>
-        <p:nvSpPr>
-          <p:cNvPr id="26" name="TextBox 25">
-            <a:extLst>
-              <a:ext uri="{FF2B5EF4-FFF2-40B4-BE49-F238E27FC236}">
-                <a16:creationId xmlns:a16="http://schemas.microsoft.com/office/drawing/2014/main" id="{9A2C5323-69B6-C906-071F-1F76F924E5FC}"/>
-              </a:ext>
-            </a:extLst>
-          </p:cNvPr>
-          <p:cNvSpPr txBox="1"/>
-          <p:nvPr/>
-        </p:nvSpPr>
-        <p:spPr>
-          <a:xfrm>
-            <a:off x="16579975" y="21783062"/>
-            <a:ext cx="1798320" cy="230832"/>
-          </a:xfrm>
-          <a:prstGeom prst="rect">
-            <a:avLst/>
-          </a:prstGeom>
-          <a:noFill/>
-        </p:spPr>
-        <p:txBody>
-          <a:bodyPr wrap="square" rtlCol="0">
-            <a:spAutoFit/>
-          </a:bodyPr>
-          <a:lstStyle/>
-          <a:p>
-            <a:pPr algn="r"/>
-            <a:r>
-              <a:rPr lang="en-US" sz="900" dirty="0"/>
-              <a:t>LTR proportion</a:t>
-            </a:r>
-          </a:p>
-        </p:txBody>
-      </p:sp>
-      <p:sp>
-        <p:nvSpPr>
-          <p:cNvPr id="27" name="TextBox 26">
-            <a:extLst>
-              <a:ext uri="{FF2B5EF4-FFF2-40B4-BE49-F238E27FC236}">
-                <a16:creationId xmlns:a16="http://schemas.microsoft.com/office/drawing/2014/main" id="{351C9D76-FABD-2788-3E47-AB5CD5CF159F}"/>
-              </a:ext>
-            </a:extLst>
-          </p:cNvPr>
-          <p:cNvSpPr txBox="1"/>
-          <p:nvPr/>
-        </p:nvSpPr>
-        <p:spPr>
-          <a:xfrm>
-            <a:off x="16579975" y="21923467"/>
-            <a:ext cx="1798320" cy="230832"/>
-          </a:xfrm>
-          <a:prstGeom prst="rect">
-            <a:avLst/>
-          </a:prstGeom>
-          <a:noFill/>
-        </p:spPr>
-        <p:txBody>
-          <a:bodyPr wrap="square" rtlCol="0">
-            <a:spAutoFit/>
-          </a:bodyPr>
-          <a:lstStyle/>
-          <a:p>
-            <a:pPr algn="r"/>
-            <a:r>
-              <a:rPr lang="en-US" sz="900" dirty="0"/>
-              <a:t>Others proportion</a:t>
-            </a:r>
-          </a:p>
-        </p:txBody>
-      </p:sp>
-      <p:sp>
-        <p:nvSpPr>
-          <p:cNvPr id="28" name="TextBox 27">
-            <a:extLst>
-              <a:ext uri="{FF2B5EF4-FFF2-40B4-BE49-F238E27FC236}">
-                <a16:creationId xmlns:a16="http://schemas.microsoft.com/office/drawing/2014/main" id="{5CE50567-115E-10C7-7763-ABE36BD5BAE6}"/>
-              </a:ext>
-            </a:extLst>
-          </p:cNvPr>
-          <p:cNvSpPr txBox="1"/>
-          <p:nvPr/>
-        </p:nvSpPr>
-        <p:spPr>
-          <a:xfrm>
-            <a:off x="16579975" y="22062634"/>
-            <a:ext cx="1798320" cy="230832"/>
-          </a:xfrm>
-          <a:prstGeom prst="rect">
-            <a:avLst/>
-          </a:prstGeom>
-          <a:noFill/>
-        </p:spPr>
-        <p:txBody>
-          <a:bodyPr wrap="square" rtlCol="0">
-            <a:spAutoFit/>
-          </a:bodyPr>
-          <a:lstStyle/>
-          <a:p>
-            <a:pPr algn="r"/>
-            <a:r>
-              <a:rPr lang="en-US" sz="900" dirty="0"/>
-              <a:t>Sine proportion</a:t>
-            </a:r>
-          </a:p>
-        </p:txBody>
-      </p:sp>
-      <p:sp>
-        <p:nvSpPr>
-          <p:cNvPr id="29" name="TextBox 28">
-            <a:extLst>
-              <a:ext uri="{FF2B5EF4-FFF2-40B4-BE49-F238E27FC236}">
-                <a16:creationId xmlns:a16="http://schemas.microsoft.com/office/drawing/2014/main" id="{814744F1-74BC-E22D-589E-8CBEA981515E}"/>
-              </a:ext>
-            </a:extLst>
-          </p:cNvPr>
-          <p:cNvSpPr txBox="1"/>
-          <p:nvPr/>
-        </p:nvSpPr>
-        <p:spPr>
-          <a:xfrm>
-            <a:off x="16579975" y="22199174"/>
-            <a:ext cx="1798320" cy="230832"/>
-          </a:xfrm>
-          <a:prstGeom prst="rect">
-            <a:avLst/>
-          </a:prstGeom>
-          <a:noFill/>
-        </p:spPr>
-        <p:txBody>
-          <a:bodyPr wrap="square" rtlCol="0">
-            <a:spAutoFit/>
-          </a:bodyPr>
-          <a:lstStyle/>
-          <a:p>
-            <a:pPr algn="r"/>
-            <a:r>
-              <a:rPr lang="en-US" sz="900" dirty="0"/>
-              <a:t>Unknown proportion</a:t>
-            </a:r>
           </a:p>
         </p:txBody>
       </p:sp>
@@ -13412,7 +12226,7 @@
               <p:nvPr/>
             </p:nvPicPr>
             <p:blipFill>
-              <a:blip r:embed="rId6"/>
+              <a:blip r:embed="rId7"/>
               <a:srcRect l="77335" t="70454" r="2272" b="27368"/>
               <a:stretch>
                 <a:fillRect/>
@@ -13638,1743 +12452,1164 @@
           </p:cxnSp>
         </p:grpSp>
       </p:grpSp>
+      <p:sp>
+        <p:nvSpPr>
+          <p:cNvPr id="56" name="TextBox 55">
+            <a:extLst>
+              <a:ext uri="{FF2B5EF4-FFF2-40B4-BE49-F238E27FC236}">
+                <a16:creationId xmlns:a16="http://schemas.microsoft.com/office/drawing/2014/main" id="{A82FB6EB-7914-16F6-30A4-A5A693E4C9D7}"/>
+              </a:ext>
+            </a:extLst>
+          </p:cNvPr>
+          <p:cNvSpPr txBox="1"/>
+          <p:nvPr/>
+        </p:nvSpPr>
+        <p:spPr>
+          <a:xfrm>
+            <a:off x="16579349" y="20562125"/>
+            <a:ext cx="1798320" cy="276999"/>
+          </a:xfrm>
+          <a:prstGeom prst="rect">
+            <a:avLst/>
+          </a:prstGeom>
+          <a:noFill/>
+        </p:spPr>
+        <p:txBody>
+          <a:bodyPr wrap="square" rtlCol="0">
+            <a:spAutoFit/>
+          </a:bodyPr>
+          <a:lstStyle/>
+          <a:p>
+            <a:pPr algn="r"/>
+            <a:r>
+              <a:rPr lang="en-US" sz="1200" dirty="0"/>
+              <a:t>LTR age</a:t>
+            </a:r>
+          </a:p>
+        </p:txBody>
+      </p:sp>
+      <p:sp>
+        <p:nvSpPr>
+          <p:cNvPr id="59" name="TextBox 58">
+            <a:extLst>
+              <a:ext uri="{FF2B5EF4-FFF2-40B4-BE49-F238E27FC236}">
+                <a16:creationId xmlns:a16="http://schemas.microsoft.com/office/drawing/2014/main" id="{6FB11A41-26FF-AB7E-3887-715A29E81AD8}"/>
+              </a:ext>
+            </a:extLst>
+          </p:cNvPr>
+          <p:cNvSpPr txBox="1"/>
+          <p:nvPr/>
+        </p:nvSpPr>
+        <p:spPr>
+          <a:xfrm>
+            <a:off x="16579349" y="20856884"/>
+            <a:ext cx="1798320" cy="276999"/>
+          </a:xfrm>
+          <a:prstGeom prst="rect">
+            <a:avLst/>
+          </a:prstGeom>
+          <a:noFill/>
+        </p:spPr>
+        <p:txBody>
+          <a:bodyPr wrap="square" rtlCol="0">
+            <a:spAutoFit/>
+          </a:bodyPr>
+          <a:lstStyle/>
+          <a:p>
+            <a:pPr algn="r"/>
+            <a:r>
+              <a:rPr lang="en-US" sz="1200" dirty="0"/>
+              <a:t>SINE age</a:t>
+            </a:r>
+          </a:p>
+        </p:txBody>
+      </p:sp>
+      <p:sp>
+        <p:nvSpPr>
+          <p:cNvPr id="60" name="TextBox 59">
+            <a:extLst>
+              <a:ext uri="{FF2B5EF4-FFF2-40B4-BE49-F238E27FC236}">
+                <a16:creationId xmlns:a16="http://schemas.microsoft.com/office/drawing/2014/main" id="{524644C0-807E-839C-2C30-38D9ADBF8041}"/>
+              </a:ext>
+            </a:extLst>
+          </p:cNvPr>
+          <p:cNvSpPr txBox="1"/>
+          <p:nvPr/>
+        </p:nvSpPr>
+        <p:spPr>
+          <a:xfrm>
+            <a:off x="16579349" y="21150550"/>
+            <a:ext cx="1798320" cy="276999"/>
+          </a:xfrm>
+          <a:prstGeom prst="rect">
+            <a:avLst/>
+          </a:prstGeom>
+          <a:noFill/>
+        </p:spPr>
+        <p:txBody>
+          <a:bodyPr wrap="square" rtlCol="0">
+            <a:spAutoFit/>
+          </a:bodyPr>
+          <a:lstStyle/>
+          <a:p>
+            <a:pPr algn="r"/>
+            <a:r>
+              <a:rPr lang="en-US" sz="1200" dirty="0"/>
+              <a:t>Unknown age</a:t>
+            </a:r>
+          </a:p>
+        </p:txBody>
+      </p:sp>
+      <p:sp>
+        <p:nvSpPr>
+          <p:cNvPr id="61" name="TextBox 60">
+            <a:extLst>
+              <a:ext uri="{FF2B5EF4-FFF2-40B4-BE49-F238E27FC236}">
+                <a16:creationId xmlns:a16="http://schemas.microsoft.com/office/drawing/2014/main" id="{E486B652-9E24-B0AE-B08A-59082D0A19CB}"/>
+              </a:ext>
+            </a:extLst>
+          </p:cNvPr>
+          <p:cNvSpPr txBox="1"/>
+          <p:nvPr/>
+        </p:nvSpPr>
+        <p:spPr>
+          <a:xfrm>
+            <a:off x="16579349" y="21444349"/>
+            <a:ext cx="1798320" cy="276999"/>
+          </a:xfrm>
+          <a:prstGeom prst="rect">
+            <a:avLst/>
+          </a:prstGeom>
+          <a:noFill/>
+        </p:spPr>
+        <p:txBody>
+          <a:bodyPr wrap="square" rtlCol="0">
+            <a:spAutoFit/>
+          </a:bodyPr>
+          <a:lstStyle/>
+          <a:p>
+            <a:pPr algn="r"/>
+            <a:r>
+              <a:rPr lang="en-US" sz="1200" dirty="0"/>
+              <a:t>LTR proportion</a:t>
+            </a:r>
+          </a:p>
+        </p:txBody>
+      </p:sp>
+      <p:sp>
+        <p:nvSpPr>
+          <p:cNvPr id="62" name="TextBox 61">
+            <a:extLst>
+              <a:ext uri="{FF2B5EF4-FFF2-40B4-BE49-F238E27FC236}">
+                <a16:creationId xmlns:a16="http://schemas.microsoft.com/office/drawing/2014/main" id="{D74CF4C9-72A0-2727-DB99-7FEA05C5277F}"/>
+              </a:ext>
+            </a:extLst>
+          </p:cNvPr>
+          <p:cNvSpPr txBox="1"/>
+          <p:nvPr/>
+        </p:nvSpPr>
+        <p:spPr>
+          <a:xfrm>
+            <a:off x="16580909" y="21738017"/>
+            <a:ext cx="1798320" cy="276999"/>
+          </a:xfrm>
+          <a:prstGeom prst="rect">
+            <a:avLst/>
+          </a:prstGeom>
+          <a:noFill/>
+        </p:spPr>
+        <p:txBody>
+          <a:bodyPr wrap="square" rtlCol="0">
+            <a:spAutoFit/>
+          </a:bodyPr>
+          <a:lstStyle/>
+          <a:p>
+            <a:pPr algn="r"/>
+            <a:r>
+              <a:rPr lang="en-US" sz="1200" dirty="0"/>
+              <a:t>Others proportion</a:t>
+            </a:r>
+          </a:p>
+        </p:txBody>
+      </p:sp>
+      <p:sp>
+        <p:nvSpPr>
+          <p:cNvPr id="63" name="TextBox 62">
+            <a:extLst>
+              <a:ext uri="{FF2B5EF4-FFF2-40B4-BE49-F238E27FC236}">
+                <a16:creationId xmlns:a16="http://schemas.microsoft.com/office/drawing/2014/main" id="{F768A82C-A006-6CF1-40F7-5D614411E622}"/>
+              </a:ext>
+            </a:extLst>
+          </p:cNvPr>
+          <p:cNvSpPr txBox="1"/>
+          <p:nvPr/>
+        </p:nvSpPr>
+        <p:spPr>
+          <a:xfrm>
+            <a:off x="16579349" y="22028718"/>
+            <a:ext cx="1798320" cy="276999"/>
+          </a:xfrm>
+          <a:prstGeom prst="rect">
+            <a:avLst/>
+          </a:prstGeom>
+          <a:noFill/>
+        </p:spPr>
+        <p:txBody>
+          <a:bodyPr wrap="square" rtlCol="0">
+            <a:spAutoFit/>
+          </a:bodyPr>
+          <a:lstStyle/>
+          <a:p>
+            <a:pPr algn="r"/>
+            <a:r>
+              <a:rPr lang="en-US" sz="1200" dirty="0"/>
+              <a:t>Unknown proportion</a:t>
+            </a:r>
+          </a:p>
+        </p:txBody>
+      </p:sp>
+      <p:sp>
+        <p:nvSpPr>
+          <p:cNvPr id="64" name="TextBox 63">
+            <a:extLst>
+              <a:ext uri="{FF2B5EF4-FFF2-40B4-BE49-F238E27FC236}">
+                <a16:creationId xmlns:a16="http://schemas.microsoft.com/office/drawing/2014/main" id="{C2AE67CF-AF74-91EF-5C67-431E26F37229}"/>
+              </a:ext>
+            </a:extLst>
+          </p:cNvPr>
+          <p:cNvSpPr txBox="1"/>
+          <p:nvPr/>
+        </p:nvSpPr>
+        <p:spPr>
+          <a:xfrm>
+            <a:off x="18445253" y="22611363"/>
+            <a:ext cx="495300" cy="292388"/>
+          </a:xfrm>
+          <a:prstGeom prst="rect">
+            <a:avLst/>
+          </a:prstGeom>
+          <a:noFill/>
+        </p:spPr>
+        <p:txBody>
+          <a:bodyPr wrap="square" rtlCol="0">
+            <a:spAutoFit/>
+          </a:bodyPr>
+          <a:lstStyle/>
+          <a:p>
+            <a:pPr algn="ctr"/>
+            <a:r>
+              <a:rPr lang="en-US" sz="1300" dirty="0"/>
+              <a:t>-1</a:t>
+            </a:r>
+          </a:p>
+        </p:txBody>
+      </p:sp>
+      <p:sp>
+        <p:nvSpPr>
+          <p:cNvPr id="65" name="TextBox 64">
+            <a:extLst>
+              <a:ext uri="{FF2B5EF4-FFF2-40B4-BE49-F238E27FC236}">
+                <a16:creationId xmlns:a16="http://schemas.microsoft.com/office/drawing/2014/main" id="{1C1F8635-81E5-F3CA-352B-01B4DCD878C0}"/>
+              </a:ext>
+            </a:extLst>
+          </p:cNvPr>
+          <p:cNvSpPr txBox="1"/>
+          <p:nvPr/>
+        </p:nvSpPr>
+        <p:spPr>
+          <a:xfrm>
+            <a:off x="19131338" y="22611363"/>
+            <a:ext cx="495300" cy="292388"/>
+          </a:xfrm>
+          <a:prstGeom prst="rect">
+            <a:avLst/>
+          </a:prstGeom>
+          <a:noFill/>
+        </p:spPr>
+        <p:txBody>
+          <a:bodyPr wrap="square" rtlCol="0">
+            <a:spAutoFit/>
+          </a:bodyPr>
+          <a:lstStyle/>
+          <a:p>
+            <a:pPr algn="ctr"/>
+            <a:r>
+              <a:rPr lang="en-US" sz="1300" dirty="0"/>
+              <a:t>-0.5</a:t>
+            </a:r>
+          </a:p>
+        </p:txBody>
+      </p:sp>
+      <p:sp>
+        <p:nvSpPr>
+          <p:cNvPr id="66" name="TextBox 65">
+            <a:extLst>
+              <a:ext uri="{FF2B5EF4-FFF2-40B4-BE49-F238E27FC236}">
+                <a16:creationId xmlns:a16="http://schemas.microsoft.com/office/drawing/2014/main" id="{4EEB0577-7D03-DBE7-BF58-4A65719CE4F7}"/>
+              </a:ext>
+            </a:extLst>
+          </p:cNvPr>
+          <p:cNvSpPr txBox="1"/>
+          <p:nvPr/>
+        </p:nvSpPr>
+        <p:spPr>
+          <a:xfrm>
+            <a:off x="19822185" y="22610921"/>
+            <a:ext cx="495300" cy="292388"/>
+          </a:xfrm>
+          <a:prstGeom prst="rect">
+            <a:avLst/>
+          </a:prstGeom>
+          <a:noFill/>
+        </p:spPr>
+        <p:txBody>
+          <a:bodyPr wrap="square" rtlCol="0">
+            <a:spAutoFit/>
+          </a:bodyPr>
+          <a:lstStyle/>
+          <a:p>
+            <a:pPr algn="ctr"/>
+            <a:r>
+              <a:rPr lang="en-US" sz="1300" dirty="0"/>
+              <a:t>0</a:t>
+            </a:r>
+          </a:p>
+        </p:txBody>
+      </p:sp>
+      <p:sp>
+        <p:nvSpPr>
+          <p:cNvPr id="67" name="TextBox 66">
+            <a:extLst>
+              <a:ext uri="{FF2B5EF4-FFF2-40B4-BE49-F238E27FC236}">
+                <a16:creationId xmlns:a16="http://schemas.microsoft.com/office/drawing/2014/main" id="{9C261CE4-5DE3-7BDA-465B-E20F545E64DC}"/>
+              </a:ext>
+            </a:extLst>
+          </p:cNvPr>
+          <p:cNvSpPr txBox="1"/>
+          <p:nvPr/>
+        </p:nvSpPr>
+        <p:spPr>
+          <a:xfrm>
+            <a:off x="20510591" y="22610921"/>
+            <a:ext cx="495300" cy="292388"/>
+          </a:xfrm>
+          <a:prstGeom prst="rect">
+            <a:avLst/>
+          </a:prstGeom>
+          <a:noFill/>
+        </p:spPr>
+        <p:txBody>
+          <a:bodyPr wrap="square" rtlCol="0">
+            <a:spAutoFit/>
+          </a:bodyPr>
+          <a:lstStyle/>
+          <a:p>
+            <a:pPr algn="ctr"/>
+            <a:r>
+              <a:rPr lang="en-US" sz="1300" dirty="0"/>
+              <a:t>0.5</a:t>
+            </a:r>
+          </a:p>
+        </p:txBody>
+      </p:sp>
+      <p:sp>
+        <p:nvSpPr>
+          <p:cNvPr id="68" name="TextBox 67">
+            <a:extLst>
+              <a:ext uri="{FF2B5EF4-FFF2-40B4-BE49-F238E27FC236}">
+                <a16:creationId xmlns:a16="http://schemas.microsoft.com/office/drawing/2014/main" id="{53CA2279-AD28-48CF-B84F-6CD282C0005B}"/>
+              </a:ext>
+            </a:extLst>
+          </p:cNvPr>
+          <p:cNvSpPr txBox="1"/>
+          <p:nvPr/>
+        </p:nvSpPr>
+        <p:spPr>
+          <a:xfrm>
+            <a:off x="21197500" y="22610921"/>
+            <a:ext cx="495300" cy="292388"/>
+          </a:xfrm>
+          <a:prstGeom prst="rect">
+            <a:avLst/>
+          </a:prstGeom>
+          <a:noFill/>
+        </p:spPr>
+        <p:txBody>
+          <a:bodyPr wrap="square" rtlCol="0">
+            <a:spAutoFit/>
+          </a:bodyPr>
+          <a:lstStyle/>
+          <a:p>
+            <a:pPr algn="ctr"/>
+            <a:r>
+              <a:rPr lang="en-US" sz="1300" dirty="0"/>
+              <a:t>1</a:t>
+            </a:r>
+          </a:p>
+        </p:txBody>
+      </p:sp>
+      <p:sp>
+        <p:nvSpPr>
+          <p:cNvPr id="69" name="TextBox 68">
+            <a:extLst>
+              <a:ext uri="{FF2B5EF4-FFF2-40B4-BE49-F238E27FC236}">
+                <a16:creationId xmlns:a16="http://schemas.microsoft.com/office/drawing/2014/main" id="{5548A23A-95E3-7BEE-DBA6-B8F11DE345A4}"/>
+              </a:ext>
+            </a:extLst>
+          </p:cNvPr>
+          <p:cNvSpPr txBox="1"/>
+          <p:nvPr/>
+        </p:nvSpPr>
+        <p:spPr>
+          <a:xfrm>
+            <a:off x="16386235" y="22610325"/>
+            <a:ext cx="495300" cy="292388"/>
+          </a:xfrm>
+          <a:prstGeom prst="rect">
+            <a:avLst/>
+          </a:prstGeom>
+          <a:noFill/>
+        </p:spPr>
+        <p:txBody>
+          <a:bodyPr wrap="square" rtlCol="0">
+            <a:spAutoFit/>
+          </a:bodyPr>
+          <a:lstStyle/>
+          <a:p>
+            <a:pPr algn="ctr"/>
+            <a:r>
+              <a:rPr lang="en-US" sz="1300" dirty="0"/>
+              <a:t>0.5</a:t>
+            </a:r>
+          </a:p>
+        </p:txBody>
+      </p:sp>
+      <p:sp>
+        <p:nvSpPr>
+          <p:cNvPr id="70" name="TextBox 69">
+            <a:extLst>
+              <a:ext uri="{FF2B5EF4-FFF2-40B4-BE49-F238E27FC236}">
+                <a16:creationId xmlns:a16="http://schemas.microsoft.com/office/drawing/2014/main" id="{D9C4B0CA-86E4-4648-EE0C-7850E0944018}"/>
+              </a:ext>
+            </a:extLst>
+          </p:cNvPr>
+          <p:cNvSpPr txBox="1"/>
+          <p:nvPr/>
+        </p:nvSpPr>
+        <p:spPr>
+          <a:xfrm>
+            <a:off x="15474217" y="22610324"/>
+            <a:ext cx="495300" cy="292388"/>
+          </a:xfrm>
+          <a:prstGeom prst="rect">
+            <a:avLst/>
+          </a:prstGeom>
+          <a:noFill/>
+        </p:spPr>
+        <p:txBody>
+          <a:bodyPr wrap="square" rtlCol="0">
+            <a:spAutoFit/>
+          </a:bodyPr>
+          <a:lstStyle/>
+          <a:p>
+            <a:pPr algn="ctr"/>
+            <a:r>
+              <a:rPr lang="en-US" sz="1300" dirty="0"/>
+              <a:t>0</a:t>
+            </a:r>
+          </a:p>
+        </p:txBody>
+      </p:sp>
+      <p:sp>
+        <p:nvSpPr>
+          <p:cNvPr id="71" name="TextBox 70">
+            <a:extLst>
+              <a:ext uri="{FF2B5EF4-FFF2-40B4-BE49-F238E27FC236}">
+                <a16:creationId xmlns:a16="http://schemas.microsoft.com/office/drawing/2014/main" id="{86E7F1F6-114E-3E18-9B3D-8772A2D5DF6D}"/>
+              </a:ext>
+            </a:extLst>
+          </p:cNvPr>
+          <p:cNvSpPr txBox="1"/>
+          <p:nvPr/>
+        </p:nvSpPr>
+        <p:spPr>
+          <a:xfrm>
+            <a:off x="14560386" y="22611639"/>
+            <a:ext cx="495300" cy="292388"/>
+          </a:xfrm>
+          <a:prstGeom prst="rect">
+            <a:avLst/>
+          </a:prstGeom>
+          <a:noFill/>
+        </p:spPr>
+        <p:txBody>
+          <a:bodyPr wrap="square" rtlCol="0">
+            <a:spAutoFit/>
+          </a:bodyPr>
+          <a:lstStyle/>
+          <a:p>
+            <a:pPr algn="ctr"/>
+            <a:r>
+              <a:rPr lang="en-US" sz="1300" dirty="0"/>
+              <a:t>-0.5</a:t>
+            </a:r>
+          </a:p>
+        </p:txBody>
+      </p:sp>
+      <p:sp>
+        <p:nvSpPr>
+          <p:cNvPr id="72" name="TextBox 71">
+            <a:extLst>
+              <a:ext uri="{FF2B5EF4-FFF2-40B4-BE49-F238E27FC236}">
+                <a16:creationId xmlns:a16="http://schemas.microsoft.com/office/drawing/2014/main" id="{029C153A-AEAA-3358-D3F7-D3AF3FAE6879}"/>
+              </a:ext>
+            </a:extLst>
+          </p:cNvPr>
+          <p:cNvSpPr txBox="1"/>
+          <p:nvPr/>
+        </p:nvSpPr>
+        <p:spPr>
+          <a:xfrm>
+            <a:off x="13648275" y="22611639"/>
+            <a:ext cx="495300" cy="292388"/>
+          </a:xfrm>
+          <a:prstGeom prst="rect">
+            <a:avLst/>
+          </a:prstGeom>
+          <a:noFill/>
+        </p:spPr>
+        <p:txBody>
+          <a:bodyPr wrap="square" rtlCol="0">
+            <a:spAutoFit/>
+          </a:bodyPr>
+          <a:lstStyle/>
+          <a:p>
+            <a:pPr algn="ctr"/>
+            <a:r>
+              <a:rPr lang="en-US" sz="1300" dirty="0"/>
+              <a:t>-1</a:t>
+            </a:r>
+          </a:p>
+        </p:txBody>
+      </p:sp>
+      <p:sp>
+        <p:nvSpPr>
+          <p:cNvPr id="73" name="TextBox 72">
+            <a:extLst>
+              <a:ext uri="{FF2B5EF4-FFF2-40B4-BE49-F238E27FC236}">
+                <a16:creationId xmlns:a16="http://schemas.microsoft.com/office/drawing/2014/main" id="{853BB113-CCDC-ACD7-415F-35FF7C938824}"/>
+              </a:ext>
+            </a:extLst>
+          </p:cNvPr>
+          <p:cNvSpPr txBox="1"/>
+          <p:nvPr/>
+        </p:nvSpPr>
+        <p:spPr>
+          <a:xfrm>
+            <a:off x="16164781" y="19525491"/>
+            <a:ext cx="495300" cy="292388"/>
+          </a:xfrm>
+          <a:prstGeom prst="rect">
+            <a:avLst/>
+          </a:prstGeom>
+          <a:noFill/>
+        </p:spPr>
+        <p:txBody>
+          <a:bodyPr wrap="square" rtlCol="0">
+            <a:spAutoFit/>
+          </a:bodyPr>
+          <a:lstStyle/>
+          <a:p>
+            <a:pPr algn="ctr"/>
+            <a:r>
+              <a:rPr lang="en-US" sz="1300" dirty="0"/>
+              <a:t>3</a:t>
+            </a:r>
+          </a:p>
+        </p:txBody>
+      </p:sp>
+      <p:sp>
+        <p:nvSpPr>
+          <p:cNvPr id="74" name="TextBox 73">
+            <a:extLst>
+              <a:ext uri="{FF2B5EF4-FFF2-40B4-BE49-F238E27FC236}">
+                <a16:creationId xmlns:a16="http://schemas.microsoft.com/office/drawing/2014/main" id="{DAC1C632-CA94-B3E7-013A-B2DB512076A0}"/>
+              </a:ext>
+            </a:extLst>
+          </p:cNvPr>
+          <p:cNvSpPr txBox="1"/>
+          <p:nvPr/>
+        </p:nvSpPr>
+        <p:spPr>
+          <a:xfrm>
+            <a:off x="15741556" y="19525316"/>
+            <a:ext cx="495300" cy="292388"/>
+          </a:xfrm>
+          <a:prstGeom prst="rect">
+            <a:avLst/>
+          </a:prstGeom>
+          <a:noFill/>
+        </p:spPr>
+        <p:txBody>
+          <a:bodyPr wrap="square" rtlCol="0">
+            <a:spAutoFit/>
+          </a:bodyPr>
+          <a:lstStyle/>
+          <a:p>
+            <a:pPr algn="ctr"/>
+            <a:r>
+              <a:rPr lang="en-US" sz="1300" dirty="0"/>
+              <a:t>2</a:t>
+            </a:r>
+          </a:p>
+        </p:txBody>
+      </p:sp>
+      <p:sp>
+        <p:nvSpPr>
+          <p:cNvPr id="75" name="TextBox 74">
+            <a:extLst>
+              <a:ext uri="{FF2B5EF4-FFF2-40B4-BE49-F238E27FC236}">
+                <a16:creationId xmlns:a16="http://schemas.microsoft.com/office/drawing/2014/main" id="{AC4EE0D1-F34C-9661-2E7B-98374B0819FA}"/>
+              </a:ext>
+            </a:extLst>
+          </p:cNvPr>
+          <p:cNvSpPr txBox="1"/>
+          <p:nvPr/>
+        </p:nvSpPr>
+        <p:spPr>
+          <a:xfrm>
+            <a:off x="15318331" y="19525141"/>
+            <a:ext cx="495300" cy="292388"/>
+          </a:xfrm>
+          <a:prstGeom prst="rect">
+            <a:avLst/>
+          </a:prstGeom>
+          <a:noFill/>
+        </p:spPr>
+        <p:txBody>
+          <a:bodyPr wrap="square" rtlCol="0">
+            <a:spAutoFit/>
+          </a:bodyPr>
+          <a:lstStyle/>
+          <a:p>
+            <a:pPr algn="ctr"/>
+            <a:r>
+              <a:rPr lang="en-US" sz="1300" dirty="0"/>
+              <a:t>1</a:t>
+            </a:r>
+          </a:p>
+        </p:txBody>
+      </p:sp>
+      <p:sp>
+        <p:nvSpPr>
+          <p:cNvPr id="76" name="TextBox 75">
+            <a:extLst>
+              <a:ext uri="{FF2B5EF4-FFF2-40B4-BE49-F238E27FC236}">
+                <a16:creationId xmlns:a16="http://schemas.microsoft.com/office/drawing/2014/main" id="{47AC257E-48DA-D1BB-AD52-AF16F4AE894D}"/>
+              </a:ext>
+            </a:extLst>
+          </p:cNvPr>
+          <p:cNvSpPr txBox="1"/>
+          <p:nvPr/>
+        </p:nvSpPr>
+        <p:spPr>
+          <a:xfrm>
+            <a:off x="14892725" y="19525070"/>
+            <a:ext cx="495300" cy="292388"/>
+          </a:xfrm>
+          <a:prstGeom prst="rect">
+            <a:avLst/>
+          </a:prstGeom>
+          <a:noFill/>
+        </p:spPr>
+        <p:txBody>
+          <a:bodyPr wrap="square" rtlCol="0">
+            <a:spAutoFit/>
+          </a:bodyPr>
+          <a:lstStyle/>
+          <a:p>
+            <a:pPr algn="ctr"/>
+            <a:r>
+              <a:rPr lang="en-US" sz="1300" dirty="0"/>
+              <a:t>0</a:t>
+            </a:r>
+          </a:p>
+        </p:txBody>
+      </p:sp>
+      <p:sp>
+        <p:nvSpPr>
+          <p:cNvPr id="77" name="TextBox 76">
+            <a:extLst>
+              <a:ext uri="{FF2B5EF4-FFF2-40B4-BE49-F238E27FC236}">
+                <a16:creationId xmlns:a16="http://schemas.microsoft.com/office/drawing/2014/main" id="{F70BC3FB-D84F-4B3E-A247-08AABB2C2C53}"/>
+              </a:ext>
+            </a:extLst>
+          </p:cNvPr>
+          <p:cNvSpPr txBox="1"/>
+          <p:nvPr/>
+        </p:nvSpPr>
+        <p:spPr>
+          <a:xfrm>
+            <a:off x="14469500" y="19525070"/>
+            <a:ext cx="495300" cy="292388"/>
+          </a:xfrm>
+          <a:prstGeom prst="rect">
+            <a:avLst/>
+          </a:prstGeom>
+          <a:noFill/>
+        </p:spPr>
+        <p:txBody>
+          <a:bodyPr wrap="square" rtlCol="0">
+            <a:spAutoFit/>
+          </a:bodyPr>
+          <a:lstStyle/>
+          <a:p>
+            <a:pPr algn="ctr"/>
+            <a:r>
+              <a:rPr lang="en-US" sz="1300" dirty="0"/>
+              <a:t>-1</a:t>
+            </a:r>
+          </a:p>
+        </p:txBody>
+      </p:sp>
+      <p:sp>
+        <p:nvSpPr>
+          <p:cNvPr id="78" name="TextBox 77">
+            <a:extLst>
+              <a:ext uri="{FF2B5EF4-FFF2-40B4-BE49-F238E27FC236}">
+                <a16:creationId xmlns:a16="http://schemas.microsoft.com/office/drawing/2014/main" id="{8F81A9F9-B575-755C-232B-2E9920807A82}"/>
+              </a:ext>
+            </a:extLst>
+          </p:cNvPr>
+          <p:cNvSpPr txBox="1"/>
+          <p:nvPr/>
+        </p:nvSpPr>
+        <p:spPr>
+          <a:xfrm>
+            <a:off x="14045399" y="19525070"/>
+            <a:ext cx="495300" cy="292388"/>
+          </a:xfrm>
+          <a:prstGeom prst="rect">
+            <a:avLst/>
+          </a:prstGeom>
+          <a:noFill/>
+        </p:spPr>
+        <p:txBody>
+          <a:bodyPr wrap="square" rtlCol="0">
+            <a:spAutoFit/>
+          </a:bodyPr>
+          <a:lstStyle/>
+          <a:p>
+            <a:pPr algn="ctr"/>
+            <a:r>
+              <a:rPr lang="en-US" sz="1300" dirty="0"/>
+              <a:t>-2</a:t>
+            </a:r>
+          </a:p>
+        </p:txBody>
+      </p:sp>
+      <p:sp>
+        <p:nvSpPr>
+          <p:cNvPr id="79" name="TextBox 78">
+            <a:extLst>
+              <a:ext uri="{FF2B5EF4-FFF2-40B4-BE49-F238E27FC236}">
+                <a16:creationId xmlns:a16="http://schemas.microsoft.com/office/drawing/2014/main" id="{684A3D8D-318E-B1B2-3C86-A6AD4DA4BA17}"/>
+              </a:ext>
+            </a:extLst>
+          </p:cNvPr>
+          <p:cNvSpPr txBox="1"/>
+          <p:nvPr/>
+        </p:nvSpPr>
+        <p:spPr>
+          <a:xfrm>
+            <a:off x="13621896" y="19524894"/>
+            <a:ext cx="495300" cy="292388"/>
+          </a:xfrm>
+          <a:prstGeom prst="rect">
+            <a:avLst/>
+          </a:prstGeom>
+          <a:noFill/>
+        </p:spPr>
+        <p:txBody>
+          <a:bodyPr wrap="square" rtlCol="0">
+            <a:spAutoFit/>
+          </a:bodyPr>
+          <a:lstStyle/>
+          <a:p>
+            <a:pPr algn="ctr"/>
+            <a:r>
+              <a:rPr lang="en-US" sz="1300" dirty="0"/>
+              <a:t>-3</a:t>
+            </a:r>
+          </a:p>
+        </p:txBody>
+      </p:sp>
+      <p:sp>
+        <p:nvSpPr>
+          <p:cNvPr id="80" name="TextBox 79">
+            <a:extLst>
+              <a:ext uri="{FF2B5EF4-FFF2-40B4-BE49-F238E27FC236}">
+                <a16:creationId xmlns:a16="http://schemas.microsoft.com/office/drawing/2014/main" id="{C8357E5E-C3DF-8257-E8D1-F9CA9D1E1C3F}"/>
+              </a:ext>
+            </a:extLst>
+          </p:cNvPr>
+          <p:cNvSpPr txBox="1"/>
+          <p:nvPr/>
+        </p:nvSpPr>
+        <p:spPr>
+          <a:xfrm>
+            <a:off x="18341381" y="19524894"/>
+            <a:ext cx="495300" cy="292388"/>
+          </a:xfrm>
+          <a:prstGeom prst="rect">
+            <a:avLst/>
+          </a:prstGeom>
+          <a:noFill/>
+        </p:spPr>
+        <p:txBody>
+          <a:bodyPr wrap="square" rtlCol="0">
+            <a:spAutoFit/>
+          </a:bodyPr>
+          <a:lstStyle/>
+          <a:p>
+            <a:pPr algn="ctr"/>
+            <a:r>
+              <a:rPr lang="en-US" sz="1300" dirty="0"/>
+              <a:t>-1</a:t>
+            </a:r>
+          </a:p>
+        </p:txBody>
+      </p:sp>
+      <p:sp>
+        <p:nvSpPr>
+          <p:cNvPr id="81" name="TextBox 80">
+            <a:extLst>
+              <a:ext uri="{FF2B5EF4-FFF2-40B4-BE49-F238E27FC236}">
+                <a16:creationId xmlns:a16="http://schemas.microsoft.com/office/drawing/2014/main" id="{8FCD9B78-461B-84F2-7FBD-DC206719DCE4}"/>
+              </a:ext>
+            </a:extLst>
+          </p:cNvPr>
+          <p:cNvSpPr txBox="1"/>
+          <p:nvPr/>
+        </p:nvSpPr>
+        <p:spPr>
+          <a:xfrm>
+            <a:off x="18899162" y="19524894"/>
+            <a:ext cx="495300" cy="292388"/>
+          </a:xfrm>
+          <a:prstGeom prst="rect">
+            <a:avLst/>
+          </a:prstGeom>
+          <a:noFill/>
+        </p:spPr>
+        <p:txBody>
+          <a:bodyPr wrap="square" rtlCol="0">
+            <a:spAutoFit/>
+          </a:bodyPr>
+          <a:lstStyle/>
+          <a:p>
+            <a:pPr algn="ctr"/>
+            <a:r>
+              <a:rPr lang="en-US" sz="1300" dirty="0"/>
+              <a:t>0</a:t>
+            </a:r>
+          </a:p>
+        </p:txBody>
+      </p:sp>
+      <p:sp>
+        <p:nvSpPr>
+          <p:cNvPr id="82" name="TextBox 81">
+            <a:extLst>
+              <a:ext uri="{FF2B5EF4-FFF2-40B4-BE49-F238E27FC236}">
+                <a16:creationId xmlns:a16="http://schemas.microsoft.com/office/drawing/2014/main" id="{6FCCF74D-16F4-A5BF-9D83-FF1BD709175F}"/>
+              </a:ext>
+            </a:extLst>
+          </p:cNvPr>
+          <p:cNvSpPr txBox="1"/>
+          <p:nvPr/>
+        </p:nvSpPr>
+        <p:spPr>
+          <a:xfrm>
+            <a:off x="19452871" y="19525251"/>
+            <a:ext cx="495300" cy="292388"/>
+          </a:xfrm>
+          <a:prstGeom prst="rect">
+            <a:avLst/>
+          </a:prstGeom>
+          <a:noFill/>
+        </p:spPr>
+        <p:txBody>
+          <a:bodyPr wrap="square" rtlCol="0">
+            <a:spAutoFit/>
+          </a:bodyPr>
+          <a:lstStyle/>
+          <a:p>
+            <a:pPr algn="ctr"/>
+            <a:r>
+              <a:rPr lang="en-US" sz="1300" dirty="0"/>
+              <a:t>1</a:t>
+            </a:r>
+          </a:p>
+        </p:txBody>
+      </p:sp>
+      <p:sp>
+        <p:nvSpPr>
+          <p:cNvPr id="83" name="TextBox 82">
+            <a:extLst>
+              <a:ext uri="{FF2B5EF4-FFF2-40B4-BE49-F238E27FC236}">
+                <a16:creationId xmlns:a16="http://schemas.microsoft.com/office/drawing/2014/main" id="{2EB95996-041A-24F6-84F6-591D83552DDE}"/>
+              </a:ext>
+            </a:extLst>
+          </p:cNvPr>
+          <p:cNvSpPr txBox="1"/>
+          <p:nvPr/>
+        </p:nvSpPr>
+        <p:spPr>
+          <a:xfrm>
+            <a:off x="20008961" y="19524764"/>
+            <a:ext cx="495300" cy="292388"/>
+          </a:xfrm>
+          <a:prstGeom prst="rect">
+            <a:avLst/>
+          </a:prstGeom>
+          <a:noFill/>
+        </p:spPr>
+        <p:txBody>
+          <a:bodyPr wrap="square" rtlCol="0">
+            <a:spAutoFit/>
+          </a:bodyPr>
+          <a:lstStyle/>
+          <a:p>
+            <a:pPr algn="ctr"/>
+            <a:r>
+              <a:rPr lang="en-US" sz="1300" dirty="0"/>
+              <a:t>2</a:t>
+            </a:r>
+          </a:p>
+        </p:txBody>
+      </p:sp>
+      <p:sp>
+        <p:nvSpPr>
+          <p:cNvPr id="84" name="TextBox 83">
+            <a:extLst>
+              <a:ext uri="{FF2B5EF4-FFF2-40B4-BE49-F238E27FC236}">
+                <a16:creationId xmlns:a16="http://schemas.microsoft.com/office/drawing/2014/main" id="{F82444E6-82ED-2848-EB91-04BFD4B5AB1F}"/>
+              </a:ext>
+            </a:extLst>
+          </p:cNvPr>
+          <p:cNvSpPr txBox="1"/>
+          <p:nvPr/>
+        </p:nvSpPr>
+        <p:spPr>
+          <a:xfrm>
+            <a:off x="20560289" y="19524765"/>
+            <a:ext cx="495300" cy="292388"/>
+          </a:xfrm>
+          <a:prstGeom prst="rect">
+            <a:avLst/>
+          </a:prstGeom>
+          <a:noFill/>
+        </p:spPr>
+        <p:txBody>
+          <a:bodyPr wrap="square" rtlCol="0">
+            <a:spAutoFit/>
+          </a:bodyPr>
+          <a:lstStyle/>
+          <a:p>
+            <a:pPr algn="ctr"/>
+            <a:r>
+              <a:rPr lang="en-US" sz="1300" dirty="0"/>
+              <a:t>3</a:t>
+            </a:r>
+          </a:p>
+        </p:txBody>
+      </p:sp>
+      <p:sp>
+        <p:nvSpPr>
+          <p:cNvPr id="85" name="TextBox 84">
+            <a:extLst>
+              <a:ext uri="{FF2B5EF4-FFF2-40B4-BE49-F238E27FC236}">
+                <a16:creationId xmlns:a16="http://schemas.microsoft.com/office/drawing/2014/main" id="{F20B7039-7CD7-114E-93A5-152DAA1A0AEF}"/>
+              </a:ext>
+            </a:extLst>
+          </p:cNvPr>
+          <p:cNvSpPr txBox="1"/>
+          <p:nvPr/>
+        </p:nvSpPr>
+        <p:spPr>
+          <a:xfrm>
+            <a:off x="21116887" y="19525121"/>
+            <a:ext cx="495300" cy="292388"/>
+          </a:xfrm>
+          <a:prstGeom prst="rect">
+            <a:avLst/>
+          </a:prstGeom>
+          <a:noFill/>
+        </p:spPr>
+        <p:txBody>
+          <a:bodyPr wrap="square" rtlCol="0">
+            <a:spAutoFit/>
+          </a:bodyPr>
+          <a:lstStyle/>
+          <a:p>
+            <a:pPr algn="ctr"/>
+            <a:r>
+              <a:rPr lang="en-US" sz="1300" dirty="0"/>
+              <a:t>4</a:t>
+            </a:r>
+          </a:p>
+        </p:txBody>
+      </p:sp>
+      <p:sp>
+        <p:nvSpPr>
+          <p:cNvPr id="86" name="TextBox 85">
+            <a:extLst>
+              <a:ext uri="{FF2B5EF4-FFF2-40B4-BE49-F238E27FC236}">
+                <a16:creationId xmlns:a16="http://schemas.microsoft.com/office/drawing/2014/main" id="{ED04ADD5-895C-1110-2093-26F204074DAE}"/>
+              </a:ext>
+            </a:extLst>
+          </p:cNvPr>
+          <p:cNvSpPr txBox="1"/>
+          <p:nvPr/>
+        </p:nvSpPr>
+        <p:spPr>
+          <a:xfrm>
+            <a:off x="13447200" y="16930687"/>
+            <a:ext cx="2978056" cy="307777"/>
+          </a:xfrm>
+          <a:prstGeom prst="rect">
+            <a:avLst/>
+          </a:prstGeom>
+          <a:noFill/>
+        </p:spPr>
+        <p:txBody>
+          <a:bodyPr wrap="square" rtlCol="0">
+            <a:spAutoFit/>
+          </a:bodyPr>
+          <a:lstStyle/>
+          <a:p>
+            <a:r>
+              <a:rPr lang="en-US" dirty="0"/>
+              <a:t>All species (3783 models)</a:t>
+            </a:r>
+          </a:p>
+        </p:txBody>
+      </p:sp>
+      <p:sp>
+        <p:nvSpPr>
+          <p:cNvPr id="87" name="TextBox 86">
+            <a:extLst>
+              <a:ext uri="{FF2B5EF4-FFF2-40B4-BE49-F238E27FC236}">
+                <a16:creationId xmlns:a16="http://schemas.microsoft.com/office/drawing/2014/main" id="{28ED771C-BBDE-F842-3367-5F554DBF22E8}"/>
+              </a:ext>
+            </a:extLst>
+          </p:cNvPr>
+          <p:cNvSpPr txBox="1"/>
+          <p:nvPr/>
+        </p:nvSpPr>
+        <p:spPr>
+          <a:xfrm>
+            <a:off x="18391243" y="16930687"/>
+            <a:ext cx="2978056" cy="307777"/>
+          </a:xfrm>
+          <a:prstGeom prst="rect">
+            <a:avLst/>
+          </a:prstGeom>
+          <a:noFill/>
+        </p:spPr>
+        <p:txBody>
+          <a:bodyPr wrap="square" rtlCol="0">
+            <a:spAutoFit/>
+          </a:bodyPr>
+          <a:lstStyle/>
+          <a:p>
+            <a:r>
+              <a:rPr lang="en-US" dirty="0"/>
+              <a:t>Mammalia (2428 models)</a:t>
+            </a:r>
+          </a:p>
+        </p:txBody>
+      </p:sp>
+      <p:sp>
+        <p:nvSpPr>
+          <p:cNvPr id="88" name="TextBox 87">
+            <a:extLst>
+              <a:ext uri="{FF2B5EF4-FFF2-40B4-BE49-F238E27FC236}">
+                <a16:creationId xmlns:a16="http://schemas.microsoft.com/office/drawing/2014/main" id="{649D8BED-4802-D088-7425-0AFFDC81044A}"/>
+              </a:ext>
+            </a:extLst>
+          </p:cNvPr>
+          <p:cNvSpPr txBox="1"/>
+          <p:nvPr/>
+        </p:nvSpPr>
+        <p:spPr>
+          <a:xfrm>
+            <a:off x="18391239" y="20015201"/>
+            <a:ext cx="2978056" cy="307777"/>
+          </a:xfrm>
+          <a:prstGeom prst="rect">
+            <a:avLst/>
+          </a:prstGeom>
+          <a:noFill/>
+        </p:spPr>
+        <p:txBody>
+          <a:bodyPr wrap="square" rtlCol="0">
+            <a:spAutoFit/>
+          </a:bodyPr>
+          <a:lstStyle/>
+          <a:p>
+            <a:r>
+              <a:rPr lang="en-US" dirty="0" err="1"/>
+              <a:t>Sauropsida</a:t>
+            </a:r>
+            <a:r>
+              <a:rPr lang="en-US" dirty="0"/>
+              <a:t> (729 models)</a:t>
+            </a:r>
+          </a:p>
+        </p:txBody>
+      </p:sp>
+      <p:sp>
+        <p:nvSpPr>
+          <p:cNvPr id="89" name="TextBox 88">
+            <a:extLst>
+              <a:ext uri="{FF2B5EF4-FFF2-40B4-BE49-F238E27FC236}">
+                <a16:creationId xmlns:a16="http://schemas.microsoft.com/office/drawing/2014/main" id="{CFBDA75F-1F11-7A8D-903B-3212EA317A1D}"/>
+              </a:ext>
+            </a:extLst>
+          </p:cNvPr>
+          <p:cNvSpPr txBox="1"/>
+          <p:nvPr/>
+        </p:nvSpPr>
+        <p:spPr>
+          <a:xfrm>
+            <a:off x="13447200" y="20015200"/>
+            <a:ext cx="2978056" cy="307777"/>
+          </a:xfrm>
+          <a:prstGeom prst="rect">
+            <a:avLst/>
+          </a:prstGeom>
+          <a:noFill/>
+        </p:spPr>
+        <p:txBody>
+          <a:bodyPr wrap="square" rtlCol="0">
+            <a:spAutoFit/>
+          </a:bodyPr>
+          <a:lstStyle/>
+          <a:p>
+            <a:r>
+              <a:rPr lang="en-US" dirty="0"/>
+              <a:t>Actinopterygii (1866 models)</a:t>
+            </a:r>
+          </a:p>
+        </p:txBody>
+      </p:sp>
     </p:spTree>
     <p:extLst>
       <p:ext uri="{BB962C8B-B14F-4D97-AF65-F5344CB8AC3E}">
         <p14:creationId xmlns:p14="http://schemas.microsoft.com/office/powerpoint/2010/main" val="3130237523"/>
       </p:ext>
     </p:extLst>
-  </p:cSld>
-  <p:clrMapOvr>
-    <a:masterClrMapping/>
-  </p:clrMapOvr>
-</p:sld>
-</file>
-
-<file path=ppt/slides/slide3.xml><?xml version="1.0" encoding="utf-8"?>
-<p:sld xmlns:a="http://schemas.openxmlformats.org/drawingml/2006/main" xmlns:r="http://schemas.openxmlformats.org/officeDocument/2006/relationships" xmlns:p="http://schemas.openxmlformats.org/presentationml/2006/main">
-  <p:cSld>
-    <p:bg>
-      <p:bgPr>
-        <a:solidFill>
-          <a:schemeClr val="lt1"/>
-        </a:solidFill>
-        <a:effectLst/>
-      </p:bgPr>
-    </p:bg>
-    <p:spTree>
-      <p:nvGrpSpPr>
-        <p:cNvPr id="1" name="Shape 88"/>
-        <p:cNvGrpSpPr/>
-        <p:nvPr/>
-      </p:nvGrpSpPr>
-      <p:grpSpPr>
-        <a:xfrm>
-          <a:off x="0" y="0"/>
-          <a:ext cx="0" cy="0"/>
-          <a:chOff x="0" y="0"/>
-          <a:chExt cx="0" cy="0"/>
-        </a:xfrm>
-      </p:grpSpPr>
-      <p:pic>
-        <p:nvPicPr>
-          <p:cNvPr id="11" name="Picture 10">
-            <a:extLst>
-              <a:ext uri="{FF2B5EF4-FFF2-40B4-BE49-F238E27FC236}">
-                <a16:creationId xmlns:a16="http://schemas.microsoft.com/office/drawing/2014/main" id="{0B82BA50-0A5D-40FB-966F-1D37DBABE5EA}"/>
-              </a:ext>
-            </a:extLst>
-          </p:cNvPr>
-          <p:cNvPicPr>
-            <a:picLocks noChangeAspect="1"/>
-          </p:cNvPicPr>
-          <p:nvPr/>
-        </p:nvPicPr>
-        <p:blipFill>
-          <a:blip r:embed="rId3"/>
-          <a:srcRect r="18344"/>
-          <a:stretch>
-            <a:fillRect/>
-          </a:stretch>
-        </p:blipFill>
-        <p:spPr>
-          <a:xfrm>
-            <a:off x="6170676" y="4277106"/>
-            <a:ext cx="7469124" cy="5504688"/>
-          </a:xfrm>
-          <a:prstGeom prst="rect">
-            <a:avLst/>
-          </a:prstGeom>
-        </p:spPr>
-      </p:pic>
-      <p:pic>
-        <p:nvPicPr>
-          <p:cNvPr id="13" name="Picture 12">
-            <a:extLst>
-              <a:ext uri="{FF2B5EF4-FFF2-40B4-BE49-F238E27FC236}">
-                <a16:creationId xmlns:a16="http://schemas.microsoft.com/office/drawing/2014/main" id="{9A9E5CA8-51A3-AAD1-8CC5-0F3AF6D74668}"/>
-              </a:ext>
-            </a:extLst>
-          </p:cNvPr>
-          <p:cNvPicPr>
-            <a:picLocks noChangeAspect="1"/>
-          </p:cNvPicPr>
-          <p:nvPr/>
-        </p:nvPicPr>
-        <p:blipFill>
-          <a:blip r:embed="rId4"/>
-          <a:srcRect r="18344"/>
-          <a:stretch>
-            <a:fillRect/>
-          </a:stretch>
-        </p:blipFill>
-        <p:spPr>
-          <a:xfrm>
-            <a:off x="13811250" y="4277106"/>
-            <a:ext cx="7469124" cy="5504688"/>
-          </a:xfrm>
-          <a:prstGeom prst="rect">
-            <a:avLst/>
-          </a:prstGeom>
-        </p:spPr>
-      </p:pic>
-      <p:pic>
-        <p:nvPicPr>
-          <p:cNvPr id="15" name="Picture 14">
-            <a:extLst>
-              <a:ext uri="{FF2B5EF4-FFF2-40B4-BE49-F238E27FC236}">
-                <a16:creationId xmlns:a16="http://schemas.microsoft.com/office/drawing/2014/main" id="{0BE559E7-9858-694D-F591-CBEA9A339FB0}"/>
-              </a:ext>
-            </a:extLst>
-          </p:cNvPr>
-          <p:cNvPicPr>
-            <a:picLocks noChangeAspect="1"/>
-          </p:cNvPicPr>
-          <p:nvPr/>
-        </p:nvPicPr>
-        <p:blipFill>
-          <a:blip r:embed="rId5"/>
-          <a:srcRect r="18344"/>
-          <a:stretch>
-            <a:fillRect/>
-          </a:stretch>
-        </p:blipFill>
-        <p:spPr>
-          <a:xfrm>
-            <a:off x="13811250" y="9306306"/>
-            <a:ext cx="7469124" cy="5504688"/>
-          </a:xfrm>
-          <a:prstGeom prst="rect">
-            <a:avLst/>
-          </a:prstGeom>
-        </p:spPr>
-      </p:pic>
-      <p:pic>
-        <p:nvPicPr>
-          <p:cNvPr id="17" name="Picture 16">
-            <a:extLst>
-              <a:ext uri="{FF2B5EF4-FFF2-40B4-BE49-F238E27FC236}">
-                <a16:creationId xmlns:a16="http://schemas.microsoft.com/office/drawing/2014/main" id="{BA955FE5-D36A-615B-3B0D-04B63F9052BC}"/>
-              </a:ext>
-            </a:extLst>
-          </p:cNvPr>
-          <p:cNvPicPr>
-            <a:picLocks noChangeAspect="1"/>
-          </p:cNvPicPr>
-          <p:nvPr/>
-        </p:nvPicPr>
-        <p:blipFill>
-          <a:blip r:embed="rId6"/>
-          <a:srcRect r="18344"/>
-          <a:stretch>
-            <a:fillRect/>
-          </a:stretch>
-        </p:blipFill>
-        <p:spPr>
-          <a:xfrm>
-            <a:off x="6170676" y="9306306"/>
-            <a:ext cx="7469124" cy="5504688"/>
-          </a:xfrm>
-          <a:prstGeom prst="rect">
-            <a:avLst/>
-          </a:prstGeom>
-        </p:spPr>
-      </p:pic>
-      <p:pic>
-        <p:nvPicPr>
-          <p:cNvPr id="18" name="Picture 17">
-            <a:extLst>
-              <a:ext uri="{FF2B5EF4-FFF2-40B4-BE49-F238E27FC236}">
-                <a16:creationId xmlns:a16="http://schemas.microsoft.com/office/drawing/2014/main" id="{68E87822-1243-D950-14BC-7B240D149896}"/>
-              </a:ext>
-            </a:extLst>
-          </p:cNvPr>
-          <p:cNvPicPr>
-            <a:picLocks noChangeAspect="1"/>
-          </p:cNvPicPr>
-          <p:nvPr/>
-        </p:nvPicPr>
-        <p:blipFill>
-          <a:blip r:embed="rId3"/>
-          <a:stretch>
-            <a:fillRect/>
-          </a:stretch>
-        </p:blipFill>
-        <p:spPr>
-          <a:xfrm>
-            <a:off x="15867126" y="-1628394"/>
-            <a:ext cx="9147048" cy="5504688"/>
-          </a:xfrm>
-          <a:prstGeom prst="rect">
-            <a:avLst/>
-          </a:prstGeom>
-        </p:spPr>
-      </p:pic>
-      <p:grpSp>
-        <p:nvGrpSpPr>
-          <p:cNvPr id="92" name="Group 91">
-            <a:extLst>
-              <a:ext uri="{FF2B5EF4-FFF2-40B4-BE49-F238E27FC236}">
-                <a16:creationId xmlns:a16="http://schemas.microsoft.com/office/drawing/2014/main" id="{442BCC9A-050B-0A69-1887-256ADE99825E}"/>
-              </a:ext>
-            </a:extLst>
-          </p:cNvPr>
-          <p:cNvGrpSpPr/>
-          <p:nvPr/>
-        </p:nvGrpSpPr>
-        <p:grpSpPr>
-          <a:xfrm>
-            <a:off x="11632699" y="16699484"/>
-            <a:ext cx="14211697" cy="6471245"/>
-            <a:chOff x="11632699" y="16699484"/>
-            <a:chExt cx="14211697" cy="6471245"/>
-          </a:xfrm>
-        </p:grpSpPr>
-        <p:pic>
-          <p:nvPicPr>
-            <p:cNvPr id="36" name="Picture 35">
-              <a:extLst>
-                <a:ext uri="{FF2B5EF4-FFF2-40B4-BE49-F238E27FC236}">
-                  <a16:creationId xmlns:a16="http://schemas.microsoft.com/office/drawing/2014/main" id="{750DDA1F-9DE9-CDBD-891B-A2A634481C84}"/>
-                </a:ext>
-              </a:extLst>
-            </p:cNvPr>
-            <p:cNvPicPr>
-              <a:picLocks noChangeAspect="1"/>
-            </p:cNvPicPr>
-            <p:nvPr/>
-          </p:nvPicPr>
-          <p:blipFill>
-            <a:blip r:embed="rId7"/>
-            <a:srcRect l="21011" r="27940" b="16785"/>
-            <a:stretch>
-              <a:fillRect/>
-            </a:stretch>
-          </p:blipFill>
-          <p:spPr>
-            <a:xfrm>
-              <a:off x="13428638" y="16699484"/>
-              <a:ext cx="3265965" cy="3033523"/>
-            </a:xfrm>
-            <a:prstGeom prst="rect">
-              <a:avLst/>
-            </a:prstGeom>
-          </p:spPr>
-        </p:pic>
-        <p:pic>
-          <p:nvPicPr>
-            <p:cNvPr id="38" name="Picture 37">
-              <a:extLst>
-                <a:ext uri="{FF2B5EF4-FFF2-40B4-BE49-F238E27FC236}">
-                  <a16:creationId xmlns:a16="http://schemas.microsoft.com/office/drawing/2014/main" id="{A9A9730B-93F4-266C-1534-B5E8AED0C00D}"/>
-                </a:ext>
-              </a:extLst>
-            </p:cNvPr>
-            <p:cNvPicPr>
-              <a:picLocks noChangeAspect="1"/>
-            </p:cNvPicPr>
-            <p:nvPr/>
-          </p:nvPicPr>
-          <p:blipFill>
-            <a:blip r:embed="rId8"/>
-            <a:srcRect l="21011" r="27940" b="16785"/>
-            <a:stretch>
-              <a:fillRect/>
-            </a:stretch>
-          </p:blipFill>
-          <p:spPr>
-            <a:xfrm>
-              <a:off x="18375288" y="16699484"/>
-              <a:ext cx="3265965" cy="3033523"/>
-            </a:xfrm>
-            <a:prstGeom prst="rect">
-              <a:avLst/>
-            </a:prstGeom>
-          </p:spPr>
-        </p:pic>
-        <p:pic>
-          <p:nvPicPr>
-            <p:cNvPr id="42" name="Picture 41">
-              <a:extLst>
-                <a:ext uri="{FF2B5EF4-FFF2-40B4-BE49-F238E27FC236}">
-                  <a16:creationId xmlns:a16="http://schemas.microsoft.com/office/drawing/2014/main" id="{8B1C5726-FD42-C013-3787-24883109EFEE}"/>
-                </a:ext>
-              </a:extLst>
-            </p:cNvPr>
-            <p:cNvPicPr>
-              <a:picLocks noChangeAspect="1"/>
-            </p:cNvPicPr>
-            <p:nvPr/>
-          </p:nvPicPr>
-          <p:blipFill>
-            <a:blip r:embed="rId9"/>
-            <a:srcRect l="21011" r="26720" b="13734"/>
-            <a:stretch>
-              <a:fillRect/>
-            </a:stretch>
-          </p:blipFill>
-          <p:spPr>
-            <a:xfrm>
-              <a:off x="13428638" y="19786600"/>
-              <a:ext cx="3344070" cy="3144773"/>
-            </a:xfrm>
-            <a:prstGeom prst="rect">
-              <a:avLst/>
-            </a:prstGeom>
-          </p:spPr>
-        </p:pic>
-        <p:pic>
-          <p:nvPicPr>
-            <p:cNvPr id="43" name="Picture 42">
-              <a:extLst>
-                <a:ext uri="{FF2B5EF4-FFF2-40B4-BE49-F238E27FC236}">
-                  <a16:creationId xmlns:a16="http://schemas.microsoft.com/office/drawing/2014/main" id="{8049F6E6-10C4-18B6-282D-C548631342E8}"/>
-                </a:ext>
-              </a:extLst>
-            </p:cNvPr>
-            <p:cNvPicPr>
-              <a:picLocks noChangeAspect="1"/>
-            </p:cNvPicPr>
-            <p:nvPr/>
-          </p:nvPicPr>
-          <p:blipFill>
-            <a:blip r:embed="rId7"/>
-            <a:srcRect l="72582" t="14725" r="10049" b="63999"/>
-            <a:stretch>
-              <a:fillRect/>
-            </a:stretch>
-          </p:blipFill>
-          <p:spPr>
-            <a:xfrm>
-              <a:off x="22025939" y="17564984"/>
-              <a:ext cx="1811622" cy="1264421"/>
-            </a:xfrm>
-            <a:prstGeom prst="rect">
-              <a:avLst/>
-            </a:prstGeom>
-          </p:spPr>
-        </p:pic>
-        <p:pic>
-          <p:nvPicPr>
-            <p:cNvPr id="45" name="Picture 44">
-              <a:extLst>
-                <a:ext uri="{FF2B5EF4-FFF2-40B4-BE49-F238E27FC236}">
-                  <a16:creationId xmlns:a16="http://schemas.microsoft.com/office/drawing/2014/main" id="{7A9248F4-D761-03FE-D1B3-FE4735F8FA97}"/>
-                </a:ext>
-              </a:extLst>
-            </p:cNvPr>
-            <p:cNvPicPr>
-              <a:picLocks noChangeAspect="1"/>
-            </p:cNvPicPr>
-            <p:nvPr/>
-          </p:nvPicPr>
-          <p:blipFill>
-            <a:blip r:embed="rId10"/>
-            <a:srcRect l="21011" t="7710" r="27940" b="16217"/>
-            <a:stretch>
-              <a:fillRect/>
-            </a:stretch>
-          </p:blipFill>
-          <p:spPr>
-            <a:xfrm>
-              <a:off x="18375914" y="20066508"/>
-              <a:ext cx="3265965" cy="2773173"/>
-            </a:xfrm>
-            <a:prstGeom prst="rect">
-              <a:avLst/>
-            </a:prstGeom>
-          </p:spPr>
-        </p:pic>
-        <p:sp>
-          <p:nvSpPr>
-            <p:cNvPr id="47" name="TextBox 46">
-              <a:extLst>
-                <a:ext uri="{FF2B5EF4-FFF2-40B4-BE49-F238E27FC236}">
-                  <a16:creationId xmlns:a16="http://schemas.microsoft.com/office/drawing/2014/main" id="{3398842E-39E2-B15B-6186-2720C23C757C}"/>
-                </a:ext>
-              </a:extLst>
-            </p:cNvPr>
-            <p:cNvSpPr txBox="1"/>
-            <p:nvPr/>
-          </p:nvSpPr>
-          <p:spPr>
-            <a:xfrm>
-              <a:off x="13539788" y="22861523"/>
-              <a:ext cx="3128962" cy="307777"/>
-            </a:xfrm>
-            <a:prstGeom prst="rect">
-              <a:avLst/>
-            </a:prstGeom>
-            <a:noFill/>
-          </p:spPr>
-          <p:txBody>
-            <a:bodyPr wrap="square" rtlCol="0">
-              <a:spAutoFit/>
-            </a:bodyPr>
-            <a:lstStyle/>
-            <a:p>
-              <a:pPr algn="ctr"/>
-              <a:r>
-                <a:rPr lang="en-US" dirty="0"/>
-                <a:t>Sign-aligned </a:t>
-              </a:r>
-              <a:r>
-                <a:rPr lang="el-GR" dirty="0"/>
-                <a:t>β</a:t>
-              </a:r>
-              <a:endParaRPr lang="en-US" dirty="0"/>
-            </a:p>
-          </p:txBody>
-        </p:sp>
-        <p:sp>
-          <p:nvSpPr>
-            <p:cNvPr id="48" name="TextBox 47">
-              <a:extLst>
-                <a:ext uri="{FF2B5EF4-FFF2-40B4-BE49-F238E27FC236}">
-                  <a16:creationId xmlns:a16="http://schemas.microsoft.com/office/drawing/2014/main" id="{EFF49E64-8BAF-A1F5-BD57-BCC79D385C14}"/>
-                </a:ext>
-              </a:extLst>
-            </p:cNvPr>
-            <p:cNvSpPr txBox="1"/>
-            <p:nvPr/>
-          </p:nvSpPr>
-          <p:spPr>
-            <a:xfrm>
-              <a:off x="18491200" y="22862952"/>
-              <a:ext cx="3127374" cy="307777"/>
-            </a:xfrm>
-            <a:prstGeom prst="rect">
-              <a:avLst/>
-            </a:prstGeom>
-            <a:noFill/>
-          </p:spPr>
-          <p:txBody>
-            <a:bodyPr wrap="square" rtlCol="0">
-              <a:spAutoFit/>
-            </a:bodyPr>
-            <a:lstStyle/>
-            <a:p>
-              <a:pPr algn="ctr"/>
-              <a:r>
-                <a:rPr lang="en-US" dirty="0"/>
-                <a:t>Sign-aligned </a:t>
-              </a:r>
-              <a:r>
-                <a:rPr lang="el-GR" dirty="0"/>
-                <a:t>β</a:t>
-              </a:r>
-              <a:endParaRPr lang="en-US" dirty="0"/>
-            </a:p>
-          </p:txBody>
-        </p:sp>
-        <p:sp>
-          <p:nvSpPr>
-            <p:cNvPr id="50" name="TextBox 49">
-              <a:extLst>
-                <a:ext uri="{FF2B5EF4-FFF2-40B4-BE49-F238E27FC236}">
-                  <a16:creationId xmlns:a16="http://schemas.microsoft.com/office/drawing/2014/main" id="{E9EA169B-3EA1-4DE8-BE4A-174F1B2E777D}"/>
-                </a:ext>
-              </a:extLst>
-            </p:cNvPr>
-            <p:cNvSpPr txBox="1"/>
-            <p:nvPr/>
-          </p:nvSpPr>
-          <p:spPr>
-            <a:xfrm>
-              <a:off x="16579975" y="20406362"/>
-              <a:ext cx="1798320" cy="230832"/>
-            </a:xfrm>
-            <a:prstGeom prst="rect">
-              <a:avLst/>
-            </a:prstGeom>
-            <a:noFill/>
-          </p:spPr>
-          <p:txBody>
-            <a:bodyPr wrap="square" rtlCol="0">
-              <a:spAutoFit/>
-            </a:bodyPr>
-            <a:lstStyle/>
-            <a:p>
-              <a:pPr algn="r"/>
-              <a:r>
-                <a:rPr lang="en-US" sz="900" dirty="0"/>
-                <a:t>DNA age</a:t>
-              </a:r>
-            </a:p>
-          </p:txBody>
-        </p:sp>
-        <p:sp>
-          <p:nvSpPr>
-            <p:cNvPr id="51" name="TextBox 50">
-              <a:extLst>
-                <a:ext uri="{FF2B5EF4-FFF2-40B4-BE49-F238E27FC236}">
-                  <a16:creationId xmlns:a16="http://schemas.microsoft.com/office/drawing/2014/main" id="{DB3DDBDF-BD7A-CC4B-39BD-2D6DEF746971}"/>
-                </a:ext>
-              </a:extLst>
-            </p:cNvPr>
-            <p:cNvSpPr txBox="1"/>
-            <p:nvPr/>
-          </p:nvSpPr>
-          <p:spPr>
-            <a:xfrm>
-              <a:off x="16579975" y="20543490"/>
-              <a:ext cx="1798320" cy="230832"/>
-            </a:xfrm>
-            <a:prstGeom prst="rect">
-              <a:avLst/>
-            </a:prstGeom>
-            <a:noFill/>
-          </p:spPr>
-          <p:txBody>
-            <a:bodyPr wrap="square" rtlCol="0">
-              <a:spAutoFit/>
-            </a:bodyPr>
-            <a:lstStyle/>
-            <a:p>
-              <a:pPr algn="r"/>
-              <a:r>
-                <a:rPr lang="en-US" sz="900" dirty="0"/>
-                <a:t>DNA age x prop.</a:t>
-              </a:r>
-            </a:p>
-          </p:txBody>
-        </p:sp>
-        <p:sp>
-          <p:nvSpPr>
-            <p:cNvPr id="52" name="TextBox 51">
-              <a:extLst>
-                <a:ext uri="{FF2B5EF4-FFF2-40B4-BE49-F238E27FC236}">
-                  <a16:creationId xmlns:a16="http://schemas.microsoft.com/office/drawing/2014/main" id="{DF6272DA-F589-AB71-41DA-E4D83ADA2D06}"/>
-                </a:ext>
-              </a:extLst>
-            </p:cNvPr>
-            <p:cNvSpPr txBox="1"/>
-            <p:nvPr/>
-          </p:nvSpPr>
-          <p:spPr>
-            <a:xfrm>
-              <a:off x="16579975" y="20682999"/>
-              <a:ext cx="1798320" cy="230832"/>
-            </a:xfrm>
-            <a:prstGeom prst="rect">
-              <a:avLst/>
-            </a:prstGeom>
-            <a:noFill/>
-          </p:spPr>
-          <p:txBody>
-            <a:bodyPr wrap="square" rtlCol="0">
-              <a:spAutoFit/>
-            </a:bodyPr>
-            <a:lstStyle/>
-            <a:p>
-              <a:pPr algn="r"/>
-              <a:r>
-                <a:rPr lang="en-US" sz="900" dirty="0"/>
-                <a:t>LINE age</a:t>
-              </a:r>
-            </a:p>
-          </p:txBody>
-        </p:sp>
-        <p:sp>
-          <p:nvSpPr>
-            <p:cNvPr id="53" name="TextBox 52">
-              <a:extLst>
-                <a:ext uri="{FF2B5EF4-FFF2-40B4-BE49-F238E27FC236}">
-                  <a16:creationId xmlns:a16="http://schemas.microsoft.com/office/drawing/2014/main" id="{11C06A4C-2BF0-A2AB-60F8-F5BCAF34EA36}"/>
-                </a:ext>
-              </a:extLst>
-            </p:cNvPr>
-            <p:cNvSpPr txBox="1"/>
-            <p:nvPr/>
-          </p:nvSpPr>
-          <p:spPr>
-            <a:xfrm>
-              <a:off x="16579975" y="20817746"/>
-              <a:ext cx="1798320" cy="230832"/>
-            </a:xfrm>
-            <a:prstGeom prst="rect">
-              <a:avLst/>
-            </a:prstGeom>
-            <a:noFill/>
-          </p:spPr>
-          <p:txBody>
-            <a:bodyPr wrap="square" rtlCol="0">
-              <a:spAutoFit/>
-            </a:bodyPr>
-            <a:lstStyle/>
-            <a:p>
-              <a:pPr algn="r"/>
-              <a:r>
-                <a:rPr lang="en-US" sz="900" dirty="0"/>
-                <a:t>LTR age x prop.</a:t>
-              </a:r>
-            </a:p>
-          </p:txBody>
-        </p:sp>
-        <p:sp>
-          <p:nvSpPr>
-            <p:cNvPr id="54" name="TextBox 53">
-              <a:extLst>
-                <a:ext uri="{FF2B5EF4-FFF2-40B4-BE49-F238E27FC236}">
-                  <a16:creationId xmlns:a16="http://schemas.microsoft.com/office/drawing/2014/main" id="{69C0A8FF-FE91-AA2E-7286-E63D319F5912}"/>
-                </a:ext>
-              </a:extLst>
-            </p:cNvPr>
-            <p:cNvSpPr txBox="1"/>
-            <p:nvPr/>
-          </p:nvSpPr>
-          <p:spPr>
-            <a:xfrm>
-              <a:off x="16579975" y="20956031"/>
-              <a:ext cx="1798320" cy="230832"/>
-            </a:xfrm>
-            <a:prstGeom prst="rect">
-              <a:avLst/>
-            </a:prstGeom>
-            <a:noFill/>
-          </p:spPr>
-          <p:txBody>
-            <a:bodyPr wrap="square" rtlCol="0">
-              <a:spAutoFit/>
-            </a:bodyPr>
-            <a:lstStyle/>
-            <a:p>
-              <a:pPr algn="r"/>
-              <a:r>
-                <a:rPr lang="en-US" sz="900" dirty="0"/>
-                <a:t>Others age</a:t>
-              </a:r>
-            </a:p>
-          </p:txBody>
-        </p:sp>
-        <p:sp>
-          <p:nvSpPr>
-            <p:cNvPr id="55" name="TextBox 54">
-              <a:extLst>
-                <a:ext uri="{FF2B5EF4-FFF2-40B4-BE49-F238E27FC236}">
-                  <a16:creationId xmlns:a16="http://schemas.microsoft.com/office/drawing/2014/main" id="{A9962147-630A-5B53-2AFC-6373D579ACF1}"/>
-                </a:ext>
-              </a:extLst>
-            </p:cNvPr>
-            <p:cNvSpPr txBox="1"/>
-            <p:nvPr/>
-          </p:nvSpPr>
-          <p:spPr>
-            <a:xfrm>
-              <a:off x="16579975" y="21094047"/>
-              <a:ext cx="1798320" cy="230832"/>
-            </a:xfrm>
-            <a:prstGeom prst="rect">
-              <a:avLst/>
-            </a:prstGeom>
-            <a:noFill/>
-          </p:spPr>
-          <p:txBody>
-            <a:bodyPr wrap="square" rtlCol="0">
-              <a:spAutoFit/>
-            </a:bodyPr>
-            <a:lstStyle/>
-            <a:p>
-              <a:pPr algn="r"/>
-              <a:r>
-                <a:rPr lang="en-US" sz="900" dirty="0"/>
-                <a:t>Others age x prop.</a:t>
-              </a:r>
-            </a:p>
-          </p:txBody>
-        </p:sp>
-        <p:sp>
-          <p:nvSpPr>
-            <p:cNvPr id="56" name="TextBox 55">
-              <a:extLst>
-                <a:ext uri="{FF2B5EF4-FFF2-40B4-BE49-F238E27FC236}">
-                  <a16:creationId xmlns:a16="http://schemas.microsoft.com/office/drawing/2014/main" id="{AB383D81-5C5A-6335-E4E1-BC4BEDBB2A3D}"/>
-                </a:ext>
-              </a:extLst>
-            </p:cNvPr>
-            <p:cNvSpPr txBox="1"/>
-            <p:nvPr/>
-          </p:nvSpPr>
-          <p:spPr>
-            <a:xfrm>
-              <a:off x="16579975" y="21233825"/>
-              <a:ext cx="1798320" cy="230832"/>
-            </a:xfrm>
-            <a:prstGeom prst="rect">
-              <a:avLst/>
-            </a:prstGeom>
-            <a:noFill/>
-          </p:spPr>
-          <p:txBody>
-            <a:bodyPr wrap="square" rtlCol="0">
-              <a:spAutoFit/>
-            </a:bodyPr>
-            <a:lstStyle/>
-            <a:p>
-              <a:pPr algn="r"/>
-              <a:r>
-                <a:rPr lang="en-US" sz="900" dirty="0"/>
-                <a:t>SINE age</a:t>
-              </a:r>
-            </a:p>
-          </p:txBody>
-        </p:sp>
-        <p:sp>
-          <p:nvSpPr>
-            <p:cNvPr id="57" name="TextBox 56">
-              <a:extLst>
-                <a:ext uri="{FF2B5EF4-FFF2-40B4-BE49-F238E27FC236}">
-                  <a16:creationId xmlns:a16="http://schemas.microsoft.com/office/drawing/2014/main" id="{ECDF5739-BC06-5683-24FC-8C9055614483}"/>
-                </a:ext>
-              </a:extLst>
-            </p:cNvPr>
-            <p:cNvSpPr txBox="1"/>
-            <p:nvPr/>
-          </p:nvSpPr>
-          <p:spPr>
-            <a:xfrm>
-              <a:off x="16579975" y="21370953"/>
-              <a:ext cx="1798320" cy="230832"/>
-            </a:xfrm>
-            <a:prstGeom prst="rect">
-              <a:avLst/>
-            </a:prstGeom>
-            <a:noFill/>
-          </p:spPr>
-          <p:txBody>
-            <a:bodyPr wrap="square" rtlCol="0">
-              <a:spAutoFit/>
-            </a:bodyPr>
-            <a:lstStyle/>
-            <a:p>
-              <a:pPr algn="r"/>
-              <a:r>
-                <a:rPr lang="en-US" sz="900" dirty="0"/>
-                <a:t>Unknown age</a:t>
-              </a:r>
-            </a:p>
-          </p:txBody>
-        </p:sp>
-        <p:sp>
-          <p:nvSpPr>
-            <p:cNvPr id="58" name="TextBox 57">
-              <a:extLst>
-                <a:ext uri="{FF2B5EF4-FFF2-40B4-BE49-F238E27FC236}">
-                  <a16:creationId xmlns:a16="http://schemas.microsoft.com/office/drawing/2014/main" id="{0641CAFB-31F7-21A1-50AE-BBEAE43CBE52}"/>
-                </a:ext>
-              </a:extLst>
-            </p:cNvPr>
-            <p:cNvSpPr txBox="1"/>
-            <p:nvPr/>
-          </p:nvSpPr>
-          <p:spPr>
-            <a:xfrm>
-              <a:off x="16579975" y="21510291"/>
-              <a:ext cx="1798320" cy="230832"/>
-            </a:xfrm>
-            <a:prstGeom prst="rect">
-              <a:avLst/>
-            </a:prstGeom>
-            <a:noFill/>
-          </p:spPr>
-          <p:txBody>
-            <a:bodyPr wrap="square" rtlCol="0">
-              <a:spAutoFit/>
-            </a:bodyPr>
-            <a:lstStyle/>
-            <a:p>
-              <a:pPr algn="r"/>
-              <a:r>
-                <a:rPr lang="en-US" sz="900" dirty="0"/>
-                <a:t>Unknown age x prop.</a:t>
-              </a:r>
-            </a:p>
-          </p:txBody>
-        </p:sp>
-        <p:sp>
-          <p:nvSpPr>
-            <p:cNvPr id="59" name="TextBox 58">
-              <a:extLst>
-                <a:ext uri="{FF2B5EF4-FFF2-40B4-BE49-F238E27FC236}">
-                  <a16:creationId xmlns:a16="http://schemas.microsoft.com/office/drawing/2014/main" id="{27930BB3-C7D6-99DD-5197-BC9AC56D5B58}"/>
-                </a:ext>
-              </a:extLst>
-            </p:cNvPr>
-            <p:cNvSpPr txBox="1"/>
-            <p:nvPr/>
-          </p:nvSpPr>
-          <p:spPr>
-            <a:xfrm>
-              <a:off x="16579975" y="21648315"/>
-              <a:ext cx="1798320" cy="230832"/>
-            </a:xfrm>
-            <a:prstGeom prst="rect">
-              <a:avLst/>
-            </a:prstGeom>
-            <a:noFill/>
-          </p:spPr>
-          <p:txBody>
-            <a:bodyPr wrap="square" rtlCol="0">
-              <a:spAutoFit/>
-            </a:bodyPr>
-            <a:lstStyle/>
-            <a:p>
-              <a:pPr algn="r"/>
-              <a:r>
-                <a:rPr lang="en-US" sz="900" dirty="0"/>
-                <a:t>LINE proportion</a:t>
-              </a:r>
-            </a:p>
-          </p:txBody>
-        </p:sp>
-        <p:sp>
-          <p:nvSpPr>
-            <p:cNvPr id="60" name="TextBox 59">
-              <a:extLst>
-                <a:ext uri="{FF2B5EF4-FFF2-40B4-BE49-F238E27FC236}">
-                  <a16:creationId xmlns:a16="http://schemas.microsoft.com/office/drawing/2014/main" id="{8AA00DFB-74EB-3D7E-65CD-81CBB0EBEFDC}"/>
-                </a:ext>
-              </a:extLst>
-            </p:cNvPr>
-            <p:cNvSpPr txBox="1"/>
-            <p:nvPr/>
-          </p:nvSpPr>
-          <p:spPr>
-            <a:xfrm>
-              <a:off x="16579975" y="21783062"/>
-              <a:ext cx="1798320" cy="230832"/>
-            </a:xfrm>
-            <a:prstGeom prst="rect">
-              <a:avLst/>
-            </a:prstGeom>
-            <a:noFill/>
-          </p:spPr>
-          <p:txBody>
-            <a:bodyPr wrap="square" rtlCol="0">
-              <a:spAutoFit/>
-            </a:bodyPr>
-            <a:lstStyle/>
-            <a:p>
-              <a:pPr algn="r"/>
-              <a:r>
-                <a:rPr lang="en-US" sz="900" dirty="0"/>
-                <a:t>LTR proportion</a:t>
-              </a:r>
-            </a:p>
-          </p:txBody>
-        </p:sp>
-        <p:sp>
-          <p:nvSpPr>
-            <p:cNvPr id="61" name="TextBox 60">
-              <a:extLst>
-                <a:ext uri="{FF2B5EF4-FFF2-40B4-BE49-F238E27FC236}">
-                  <a16:creationId xmlns:a16="http://schemas.microsoft.com/office/drawing/2014/main" id="{D4F7F41E-54AA-6241-D9CB-42E16FB1842F}"/>
-                </a:ext>
-              </a:extLst>
-            </p:cNvPr>
-            <p:cNvSpPr txBox="1"/>
-            <p:nvPr/>
-          </p:nvSpPr>
-          <p:spPr>
-            <a:xfrm>
-              <a:off x="16579975" y="21923467"/>
-              <a:ext cx="1798320" cy="230832"/>
-            </a:xfrm>
-            <a:prstGeom prst="rect">
-              <a:avLst/>
-            </a:prstGeom>
-            <a:noFill/>
-          </p:spPr>
-          <p:txBody>
-            <a:bodyPr wrap="square" rtlCol="0">
-              <a:spAutoFit/>
-            </a:bodyPr>
-            <a:lstStyle/>
-            <a:p>
-              <a:pPr algn="r"/>
-              <a:r>
-                <a:rPr lang="en-US" sz="900" dirty="0"/>
-                <a:t>Others proportion</a:t>
-              </a:r>
-            </a:p>
-          </p:txBody>
-        </p:sp>
-        <p:sp>
-          <p:nvSpPr>
-            <p:cNvPr id="62" name="TextBox 61">
-              <a:extLst>
-                <a:ext uri="{FF2B5EF4-FFF2-40B4-BE49-F238E27FC236}">
-                  <a16:creationId xmlns:a16="http://schemas.microsoft.com/office/drawing/2014/main" id="{DA5EF26F-F90E-59A7-D9C2-1D34811B666D}"/>
-                </a:ext>
-              </a:extLst>
-            </p:cNvPr>
-            <p:cNvSpPr txBox="1"/>
-            <p:nvPr/>
-          </p:nvSpPr>
-          <p:spPr>
-            <a:xfrm>
-              <a:off x="16579975" y="22062634"/>
-              <a:ext cx="1798320" cy="230832"/>
-            </a:xfrm>
-            <a:prstGeom prst="rect">
-              <a:avLst/>
-            </a:prstGeom>
-            <a:noFill/>
-          </p:spPr>
-          <p:txBody>
-            <a:bodyPr wrap="square" rtlCol="0">
-              <a:spAutoFit/>
-            </a:bodyPr>
-            <a:lstStyle/>
-            <a:p>
-              <a:pPr algn="r"/>
-              <a:r>
-                <a:rPr lang="en-US" sz="900" dirty="0"/>
-                <a:t>Sine proportion</a:t>
-              </a:r>
-            </a:p>
-          </p:txBody>
-        </p:sp>
-        <p:sp>
-          <p:nvSpPr>
-            <p:cNvPr id="63" name="TextBox 62">
-              <a:extLst>
-                <a:ext uri="{FF2B5EF4-FFF2-40B4-BE49-F238E27FC236}">
-                  <a16:creationId xmlns:a16="http://schemas.microsoft.com/office/drawing/2014/main" id="{E20DD714-6F70-2BF0-06AE-E5C4FA6F0427}"/>
-                </a:ext>
-              </a:extLst>
-            </p:cNvPr>
-            <p:cNvSpPr txBox="1"/>
-            <p:nvPr/>
-          </p:nvSpPr>
-          <p:spPr>
-            <a:xfrm>
-              <a:off x="16579975" y="22199174"/>
-              <a:ext cx="1798320" cy="230832"/>
-            </a:xfrm>
-            <a:prstGeom prst="rect">
-              <a:avLst/>
-            </a:prstGeom>
-            <a:noFill/>
-          </p:spPr>
-          <p:txBody>
-            <a:bodyPr wrap="square" rtlCol="0">
-              <a:spAutoFit/>
-            </a:bodyPr>
-            <a:lstStyle/>
-            <a:p>
-              <a:pPr algn="r"/>
-              <a:r>
-                <a:rPr lang="en-US" sz="900" dirty="0"/>
-                <a:t>Unknown proportion</a:t>
-              </a:r>
-            </a:p>
-          </p:txBody>
-        </p:sp>
-        <p:sp>
-          <p:nvSpPr>
-            <p:cNvPr id="64" name="TextBox 63">
-              <a:extLst>
-                <a:ext uri="{FF2B5EF4-FFF2-40B4-BE49-F238E27FC236}">
-                  <a16:creationId xmlns:a16="http://schemas.microsoft.com/office/drawing/2014/main" id="{30A763B6-BAF5-071B-07E5-1E8BEAC70CD2}"/>
-                </a:ext>
-              </a:extLst>
-            </p:cNvPr>
-            <p:cNvSpPr txBox="1"/>
-            <p:nvPr/>
-          </p:nvSpPr>
-          <p:spPr>
-            <a:xfrm>
-              <a:off x="16579976" y="17520722"/>
-              <a:ext cx="1798320" cy="276999"/>
-            </a:xfrm>
-            <a:prstGeom prst="rect">
-              <a:avLst/>
-            </a:prstGeom>
-            <a:noFill/>
-          </p:spPr>
-          <p:txBody>
-            <a:bodyPr wrap="square" rtlCol="0">
-              <a:spAutoFit/>
-            </a:bodyPr>
-            <a:lstStyle/>
-            <a:p>
-              <a:pPr algn="r"/>
-              <a:r>
-                <a:rPr lang="en-US" sz="1200" dirty="0"/>
-                <a:t>LINE age x prop.</a:t>
-              </a:r>
-            </a:p>
-          </p:txBody>
-        </p:sp>
-        <p:sp>
-          <p:nvSpPr>
-            <p:cNvPr id="65" name="TextBox 64">
-              <a:extLst>
-                <a:ext uri="{FF2B5EF4-FFF2-40B4-BE49-F238E27FC236}">
-                  <a16:creationId xmlns:a16="http://schemas.microsoft.com/office/drawing/2014/main" id="{B5132831-5BA7-8610-7BA9-8B454786D3B4}"/>
-                </a:ext>
-              </a:extLst>
-            </p:cNvPr>
-            <p:cNvSpPr txBox="1"/>
-            <p:nvPr/>
-          </p:nvSpPr>
-          <p:spPr>
-            <a:xfrm>
-              <a:off x="16579976" y="17979282"/>
-              <a:ext cx="1798320" cy="276999"/>
-            </a:xfrm>
-            <a:prstGeom prst="rect">
-              <a:avLst/>
-            </a:prstGeom>
-            <a:noFill/>
-          </p:spPr>
-          <p:txBody>
-            <a:bodyPr wrap="square" rtlCol="0">
-              <a:spAutoFit/>
-            </a:bodyPr>
-            <a:lstStyle/>
-            <a:p>
-              <a:pPr algn="r"/>
-              <a:r>
-                <a:rPr lang="en-US" sz="1200" dirty="0"/>
-                <a:t>SINE age x prop.</a:t>
-              </a:r>
-            </a:p>
-          </p:txBody>
-        </p:sp>
-        <p:sp>
-          <p:nvSpPr>
-            <p:cNvPr id="66" name="TextBox 65">
-              <a:extLst>
-                <a:ext uri="{FF2B5EF4-FFF2-40B4-BE49-F238E27FC236}">
-                  <a16:creationId xmlns:a16="http://schemas.microsoft.com/office/drawing/2014/main" id="{BD12CEAB-53C7-BC18-672A-89295923455F}"/>
-                </a:ext>
-              </a:extLst>
-            </p:cNvPr>
-            <p:cNvSpPr txBox="1"/>
-            <p:nvPr/>
-          </p:nvSpPr>
-          <p:spPr>
-            <a:xfrm>
-              <a:off x="16579975" y="18441297"/>
-              <a:ext cx="1798320" cy="276999"/>
-            </a:xfrm>
-            <a:prstGeom prst="rect">
-              <a:avLst/>
-            </a:prstGeom>
-            <a:noFill/>
-          </p:spPr>
-          <p:txBody>
-            <a:bodyPr wrap="square" rtlCol="0">
-              <a:spAutoFit/>
-            </a:bodyPr>
-            <a:lstStyle/>
-            <a:p>
-              <a:pPr algn="r"/>
-              <a:r>
-                <a:rPr lang="en-US" sz="1200" dirty="0"/>
-                <a:t>DNA proportion</a:t>
-              </a:r>
-            </a:p>
-          </p:txBody>
-        </p:sp>
-        <p:sp>
-          <p:nvSpPr>
-            <p:cNvPr id="67" name="TextBox 66">
-              <a:extLst>
-                <a:ext uri="{FF2B5EF4-FFF2-40B4-BE49-F238E27FC236}">
-                  <a16:creationId xmlns:a16="http://schemas.microsoft.com/office/drawing/2014/main" id="{A0EF45E4-47CA-BAA5-8EC0-A3564CFF4620}"/>
-                </a:ext>
-              </a:extLst>
-            </p:cNvPr>
-            <p:cNvSpPr txBox="1"/>
-            <p:nvPr/>
-          </p:nvSpPr>
-          <p:spPr>
-            <a:xfrm>
-              <a:off x="16579975" y="18897476"/>
-              <a:ext cx="1798320" cy="276999"/>
-            </a:xfrm>
-            <a:prstGeom prst="rect">
-              <a:avLst/>
-            </a:prstGeom>
-            <a:noFill/>
-          </p:spPr>
-          <p:txBody>
-            <a:bodyPr wrap="square" rtlCol="0">
-              <a:spAutoFit/>
-            </a:bodyPr>
-            <a:lstStyle/>
-            <a:p>
-              <a:pPr algn="r"/>
-              <a:r>
-                <a:rPr lang="en-US" sz="1200" dirty="0"/>
-                <a:t>LINE proportion</a:t>
-              </a:r>
-            </a:p>
-          </p:txBody>
-        </p:sp>
-        <p:sp>
-          <p:nvSpPr>
-            <p:cNvPr id="68" name="TextBox 67">
-              <a:extLst>
-                <a:ext uri="{FF2B5EF4-FFF2-40B4-BE49-F238E27FC236}">
-                  <a16:creationId xmlns:a16="http://schemas.microsoft.com/office/drawing/2014/main" id="{A8A9E131-66D6-15CA-0306-07075EF9A60D}"/>
-                </a:ext>
-              </a:extLst>
-            </p:cNvPr>
-            <p:cNvSpPr txBox="1"/>
-            <p:nvPr/>
-          </p:nvSpPr>
-          <p:spPr>
-            <a:xfrm>
-              <a:off x="11634696" y="17477858"/>
-              <a:ext cx="1798320" cy="276999"/>
-            </a:xfrm>
-            <a:prstGeom prst="rect">
-              <a:avLst/>
-            </a:prstGeom>
-            <a:noFill/>
-          </p:spPr>
-          <p:txBody>
-            <a:bodyPr wrap="square" rtlCol="0">
-              <a:spAutoFit/>
-            </a:bodyPr>
-            <a:lstStyle/>
-            <a:p>
-              <a:pPr algn="r"/>
-              <a:r>
-                <a:rPr lang="en-US" sz="1200" dirty="0"/>
-                <a:t>LTR age x prop.</a:t>
-              </a:r>
-            </a:p>
-          </p:txBody>
-        </p:sp>
-        <p:sp>
-          <p:nvSpPr>
-            <p:cNvPr id="69" name="TextBox 68">
-              <a:extLst>
-                <a:ext uri="{FF2B5EF4-FFF2-40B4-BE49-F238E27FC236}">
-                  <a16:creationId xmlns:a16="http://schemas.microsoft.com/office/drawing/2014/main" id="{B343819C-65EA-E673-F978-F1499F655D5E}"/>
-                </a:ext>
-              </a:extLst>
-            </p:cNvPr>
-            <p:cNvSpPr txBox="1"/>
-            <p:nvPr/>
-          </p:nvSpPr>
-          <p:spPr>
-            <a:xfrm>
-              <a:off x="11634696" y="17769143"/>
-              <a:ext cx="1798320" cy="276999"/>
-            </a:xfrm>
-            <a:prstGeom prst="rect">
-              <a:avLst/>
-            </a:prstGeom>
-            <a:noFill/>
-          </p:spPr>
-          <p:txBody>
-            <a:bodyPr wrap="square" rtlCol="0">
-              <a:spAutoFit/>
-            </a:bodyPr>
-            <a:lstStyle/>
-            <a:p>
-              <a:pPr algn="r"/>
-              <a:r>
-                <a:rPr lang="en-US" sz="1200" dirty="0"/>
-                <a:t>SINE age</a:t>
-              </a:r>
-            </a:p>
-          </p:txBody>
-        </p:sp>
-        <p:sp>
-          <p:nvSpPr>
-            <p:cNvPr id="70" name="TextBox 69">
-              <a:extLst>
-                <a:ext uri="{FF2B5EF4-FFF2-40B4-BE49-F238E27FC236}">
-                  <a16:creationId xmlns:a16="http://schemas.microsoft.com/office/drawing/2014/main" id="{36829DA6-31DB-DF28-A25F-B28E4C9D6B85}"/>
-                </a:ext>
-              </a:extLst>
-            </p:cNvPr>
-            <p:cNvSpPr txBox="1"/>
-            <p:nvPr/>
-          </p:nvSpPr>
-          <p:spPr>
-            <a:xfrm>
-              <a:off x="11634696" y="18062493"/>
-              <a:ext cx="1798320" cy="276999"/>
-            </a:xfrm>
-            <a:prstGeom prst="rect">
-              <a:avLst/>
-            </a:prstGeom>
-            <a:noFill/>
-          </p:spPr>
-          <p:txBody>
-            <a:bodyPr wrap="square" rtlCol="0">
-              <a:spAutoFit/>
-            </a:bodyPr>
-            <a:lstStyle/>
-            <a:p>
-              <a:pPr algn="r"/>
-              <a:r>
-                <a:rPr lang="en-US" sz="1200" dirty="0"/>
-                <a:t>SINE age x prop.</a:t>
-              </a:r>
-            </a:p>
-          </p:txBody>
-        </p:sp>
-        <p:sp>
-          <p:nvSpPr>
-            <p:cNvPr id="71" name="TextBox 70">
-              <a:extLst>
-                <a:ext uri="{FF2B5EF4-FFF2-40B4-BE49-F238E27FC236}">
-                  <a16:creationId xmlns:a16="http://schemas.microsoft.com/office/drawing/2014/main" id="{038B15C0-D420-5570-3C49-213955BA8B9A}"/>
-                </a:ext>
-              </a:extLst>
-            </p:cNvPr>
-            <p:cNvSpPr txBox="1"/>
-            <p:nvPr/>
-          </p:nvSpPr>
-          <p:spPr>
-            <a:xfrm>
-              <a:off x="11634696" y="18358540"/>
-              <a:ext cx="1798320" cy="276999"/>
-            </a:xfrm>
-            <a:prstGeom prst="rect">
-              <a:avLst/>
-            </a:prstGeom>
-            <a:noFill/>
-          </p:spPr>
-          <p:txBody>
-            <a:bodyPr wrap="square" rtlCol="0">
-              <a:spAutoFit/>
-            </a:bodyPr>
-            <a:lstStyle/>
-            <a:p>
-              <a:pPr algn="r"/>
-              <a:r>
-                <a:rPr lang="en-US" sz="1200" dirty="0"/>
-                <a:t>DNA proportion</a:t>
-              </a:r>
-            </a:p>
-          </p:txBody>
-        </p:sp>
-        <p:sp>
-          <p:nvSpPr>
-            <p:cNvPr id="72" name="TextBox 71">
-              <a:extLst>
-                <a:ext uri="{FF2B5EF4-FFF2-40B4-BE49-F238E27FC236}">
-                  <a16:creationId xmlns:a16="http://schemas.microsoft.com/office/drawing/2014/main" id="{537FB95D-5F3A-0474-F2AF-13A73A3E985D}"/>
-                </a:ext>
-              </a:extLst>
-            </p:cNvPr>
-            <p:cNvSpPr txBox="1"/>
-            <p:nvPr/>
-          </p:nvSpPr>
-          <p:spPr>
-            <a:xfrm>
-              <a:off x="11634696" y="18647547"/>
-              <a:ext cx="1798320" cy="276999"/>
-            </a:xfrm>
-            <a:prstGeom prst="rect">
-              <a:avLst/>
-            </a:prstGeom>
-            <a:noFill/>
-          </p:spPr>
-          <p:txBody>
-            <a:bodyPr wrap="square" rtlCol="0">
-              <a:spAutoFit/>
-            </a:bodyPr>
-            <a:lstStyle/>
-            <a:p>
-              <a:pPr algn="r"/>
-              <a:r>
-                <a:rPr lang="en-US" sz="1200" dirty="0"/>
-                <a:t>LINE proportion</a:t>
-              </a:r>
-            </a:p>
-          </p:txBody>
-        </p:sp>
-        <p:sp>
-          <p:nvSpPr>
-            <p:cNvPr id="73" name="TextBox 72">
-              <a:extLst>
-                <a:ext uri="{FF2B5EF4-FFF2-40B4-BE49-F238E27FC236}">
-                  <a16:creationId xmlns:a16="http://schemas.microsoft.com/office/drawing/2014/main" id="{8C0883EA-F5A5-12C7-BE43-732CA06D00F1}"/>
-                </a:ext>
-              </a:extLst>
-            </p:cNvPr>
-            <p:cNvSpPr txBox="1"/>
-            <p:nvPr/>
-          </p:nvSpPr>
-          <p:spPr>
-            <a:xfrm>
-              <a:off x="11634696" y="18944836"/>
-              <a:ext cx="1798320" cy="276999"/>
-            </a:xfrm>
-            <a:prstGeom prst="rect">
-              <a:avLst/>
-            </a:prstGeom>
-            <a:noFill/>
-          </p:spPr>
-          <p:txBody>
-            <a:bodyPr wrap="square" rtlCol="0">
-              <a:spAutoFit/>
-            </a:bodyPr>
-            <a:lstStyle/>
-            <a:p>
-              <a:pPr algn="r"/>
-              <a:r>
-                <a:rPr lang="en-US" sz="1200" dirty="0"/>
-                <a:t>SINE proportion</a:t>
-              </a:r>
-            </a:p>
-          </p:txBody>
-        </p:sp>
-        <p:sp>
-          <p:nvSpPr>
-            <p:cNvPr id="74" name="TextBox 73">
-              <a:extLst>
-                <a:ext uri="{FF2B5EF4-FFF2-40B4-BE49-F238E27FC236}">
-                  <a16:creationId xmlns:a16="http://schemas.microsoft.com/office/drawing/2014/main" id="{39AB71B6-B816-D223-3014-6ACF25C7C666}"/>
-                </a:ext>
-              </a:extLst>
-            </p:cNvPr>
-            <p:cNvSpPr txBox="1"/>
-            <p:nvPr/>
-          </p:nvSpPr>
-          <p:spPr>
-            <a:xfrm>
-              <a:off x="11632699" y="21658342"/>
-              <a:ext cx="1798320" cy="276999"/>
-            </a:xfrm>
-            <a:prstGeom prst="rect">
-              <a:avLst/>
-            </a:prstGeom>
-            <a:noFill/>
-          </p:spPr>
-          <p:txBody>
-            <a:bodyPr wrap="square" rtlCol="0">
-              <a:spAutoFit/>
-            </a:bodyPr>
-            <a:lstStyle/>
-            <a:p>
-              <a:pPr algn="r"/>
-              <a:r>
-                <a:rPr lang="en-US" sz="1200" dirty="0"/>
-                <a:t>Others proportion</a:t>
-              </a:r>
-            </a:p>
-          </p:txBody>
-        </p:sp>
-        <p:grpSp>
-          <p:nvGrpSpPr>
-            <p:cNvPr id="91" name="Group 90">
-              <a:extLst>
-                <a:ext uri="{FF2B5EF4-FFF2-40B4-BE49-F238E27FC236}">
-                  <a16:creationId xmlns:a16="http://schemas.microsoft.com/office/drawing/2014/main" id="{2CF35F9A-5418-001D-3ACA-A321B8090530}"/>
-                </a:ext>
-              </a:extLst>
-            </p:cNvPr>
-            <p:cNvGrpSpPr/>
-            <p:nvPr/>
-          </p:nvGrpSpPr>
-          <p:grpSpPr>
-            <a:xfrm>
-              <a:off x="22025939" y="19128874"/>
-              <a:ext cx="3818457" cy="3377744"/>
-              <a:chOff x="22067850" y="19267302"/>
-              <a:chExt cx="3818457" cy="3377744"/>
-            </a:xfrm>
-          </p:grpSpPr>
-          <p:sp>
-            <p:nvSpPr>
-              <p:cNvPr id="77" name="TextBox 76">
-                <a:extLst>
-                  <a:ext uri="{FF2B5EF4-FFF2-40B4-BE49-F238E27FC236}">
-                    <a16:creationId xmlns:a16="http://schemas.microsoft.com/office/drawing/2014/main" id="{CBE61776-356A-C0FC-F918-262603737613}"/>
-                  </a:ext>
-                </a:extLst>
-              </p:cNvPr>
-              <p:cNvSpPr txBox="1"/>
-              <p:nvPr/>
-            </p:nvSpPr>
-            <p:spPr>
-              <a:xfrm>
-                <a:off x="23327918" y="22275714"/>
-                <a:ext cx="2558389" cy="369332"/>
-              </a:xfrm>
-              <a:prstGeom prst="rect">
-                <a:avLst/>
-              </a:prstGeom>
-              <a:noFill/>
-            </p:spPr>
-            <p:txBody>
-              <a:bodyPr wrap="square" rtlCol="0">
-                <a:spAutoFit/>
-              </a:bodyPr>
-              <a:lstStyle/>
-              <a:p>
-                <a:r>
-                  <a:rPr lang="en-US" sz="1800" dirty="0"/>
-                  <a:t>0.5</a:t>
-                </a:r>
-              </a:p>
-            </p:txBody>
-          </p:sp>
-          <p:sp>
-            <p:nvSpPr>
-              <p:cNvPr id="78" name="TextBox 77">
-                <a:extLst>
-                  <a:ext uri="{FF2B5EF4-FFF2-40B4-BE49-F238E27FC236}">
-                    <a16:creationId xmlns:a16="http://schemas.microsoft.com/office/drawing/2014/main" id="{150D9B5D-FE27-DC44-9DCE-72B47A0D0804}"/>
-                  </a:ext>
-                </a:extLst>
-              </p:cNvPr>
-              <p:cNvSpPr txBox="1"/>
-              <p:nvPr/>
-            </p:nvSpPr>
-            <p:spPr>
-              <a:xfrm>
-                <a:off x="23327918" y="19267302"/>
-                <a:ext cx="2558389" cy="369332"/>
-              </a:xfrm>
-              <a:prstGeom prst="rect">
-                <a:avLst/>
-              </a:prstGeom>
-              <a:noFill/>
-            </p:spPr>
-            <p:txBody>
-              <a:bodyPr wrap="square" rtlCol="0">
-                <a:spAutoFit/>
-              </a:bodyPr>
-              <a:lstStyle/>
-              <a:p>
-                <a:r>
-                  <a:rPr lang="en-US" sz="1800" dirty="0"/>
-                  <a:t>1</a:t>
-                </a:r>
-              </a:p>
-            </p:txBody>
-          </p:sp>
-          <p:sp>
-            <p:nvSpPr>
-              <p:cNvPr id="79" name="TextBox 78">
-                <a:extLst>
-                  <a:ext uri="{FF2B5EF4-FFF2-40B4-BE49-F238E27FC236}">
-                    <a16:creationId xmlns:a16="http://schemas.microsoft.com/office/drawing/2014/main" id="{4ABE1A89-B035-0929-A4F3-02E189C1C44B}"/>
-                  </a:ext>
-                </a:extLst>
-              </p:cNvPr>
-              <p:cNvSpPr txBox="1"/>
-              <p:nvPr/>
-            </p:nvSpPr>
-            <p:spPr>
-              <a:xfrm>
-                <a:off x="23327918" y="20771363"/>
-                <a:ext cx="2558389" cy="369332"/>
-              </a:xfrm>
-              <a:prstGeom prst="rect">
-                <a:avLst/>
-              </a:prstGeom>
-              <a:noFill/>
-            </p:spPr>
-            <p:txBody>
-              <a:bodyPr wrap="square" rtlCol="0">
-                <a:spAutoFit/>
-              </a:bodyPr>
-              <a:lstStyle/>
-              <a:p>
-                <a:r>
-                  <a:rPr lang="en-US" sz="1800" dirty="0"/>
-                  <a:t>0.75</a:t>
-                </a:r>
-              </a:p>
-            </p:txBody>
-          </p:sp>
-          <p:grpSp>
-            <p:nvGrpSpPr>
-              <p:cNvPr id="90" name="Group 89">
-                <a:extLst>
-                  <a:ext uri="{FF2B5EF4-FFF2-40B4-BE49-F238E27FC236}">
-                    <a16:creationId xmlns:a16="http://schemas.microsoft.com/office/drawing/2014/main" id="{CB655D39-04E9-1D09-0DF7-3C9ABAB11CCA}"/>
-                  </a:ext>
-                </a:extLst>
-              </p:cNvPr>
-              <p:cNvGrpSpPr/>
-              <p:nvPr/>
-            </p:nvGrpSpPr>
-            <p:grpSpPr>
-              <a:xfrm>
-                <a:off x="22067850" y="19439268"/>
-                <a:ext cx="1239826" cy="3033525"/>
-                <a:chOff x="22067850" y="19439268"/>
-                <a:chExt cx="1239826" cy="3033525"/>
-              </a:xfrm>
-            </p:grpSpPr>
-            <p:pic>
-              <p:nvPicPr>
-                <p:cNvPr id="75" name="Picture 74">
-                  <a:extLst>
-                    <a:ext uri="{FF2B5EF4-FFF2-40B4-BE49-F238E27FC236}">
-                      <a16:creationId xmlns:a16="http://schemas.microsoft.com/office/drawing/2014/main" id="{F1423686-C381-7814-5CFD-F9B4A9409719}"/>
-                    </a:ext>
-                  </a:extLst>
-                </p:cNvPr>
-                <p:cNvPicPr>
-                  <a:picLocks noChangeAspect="1"/>
-                </p:cNvPicPr>
-                <p:nvPr/>
-              </p:nvPicPr>
-              <p:blipFill>
-                <a:blip r:embed="rId7"/>
-                <a:srcRect l="77335" t="70454" r="2272" b="27368"/>
-                <a:stretch>
-                  <a:fillRect/>
-                </a:stretch>
-              </p:blipFill>
-              <p:spPr>
-                <a:xfrm rot="16200000">
-                  <a:off x="21267869" y="20702859"/>
-                  <a:ext cx="3033524" cy="506344"/>
-                </a:xfrm>
-                <a:prstGeom prst="rect">
-                  <a:avLst/>
-                </a:prstGeom>
-              </p:spPr>
-            </p:pic>
-            <p:sp>
-              <p:nvSpPr>
-                <p:cNvPr id="76" name="TextBox 75">
-                  <a:extLst>
-                    <a:ext uri="{FF2B5EF4-FFF2-40B4-BE49-F238E27FC236}">
-                      <a16:creationId xmlns:a16="http://schemas.microsoft.com/office/drawing/2014/main" id="{F48AA836-53F2-B629-5FD0-3BEEA242DD60}"/>
-                    </a:ext>
-                  </a:extLst>
-                </p:cNvPr>
-                <p:cNvSpPr txBox="1"/>
-                <p:nvPr/>
-              </p:nvSpPr>
-              <p:spPr>
-                <a:xfrm rot="16200000">
-                  <a:off x="20988710" y="20755974"/>
-                  <a:ext cx="2558389" cy="400110"/>
-                </a:xfrm>
-                <a:prstGeom prst="rect">
-                  <a:avLst/>
-                </a:prstGeom>
-                <a:noFill/>
-              </p:spPr>
-              <p:txBody>
-                <a:bodyPr wrap="square" rtlCol="0">
-                  <a:spAutoFit/>
-                </a:bodyPr>
-                <a:lstStyle/>
-                <a:p>
-                  <a:pPr algn="r"/>
-                  <a:r>
-                    <a:rPr lang="en-US" sz="2000" dirty="0"/>
-                    <a:t>Variable importance</a:t>
-                  </a:r>
-                </a:p>
-              </p:txBody>
-            </p:sp>
-            <p:cxnSp>
-              <p:nvCxnSpPr>
-                <p:cNvPr id="81" name="Straight Connector 80">
-                  <a:extLst>
-                    <a:ext uri="{FF2B5EF4-FFF2-40B4-BE49-F238E27FC236}">
-                      <a16:creationId xmlns:a16="http://schemas.microsoft.com/office/drawing/2014/main" id="{4DBE5AF9-F462-AFBE-357B-4F01A1A10E22}"/>
-                    </a:ext>
-                  </a:extLst>
-                </p:cNvPr>
-                <p:cNvCxnSpPr>
-                  <a:cxnSpLocks/>
-                </p:cNvCxnSpPr>
-                <p:nvPr/>
-              </p:nvCxnSpPr>
-              <p:spPr>
-                <a:xfrm>
-                  <a:off x="23218140" y="19439268"/>
-                  <a:ext cx="0" cy="3033525"/>
-                </a:xfrm>
-                <a:prstGeom prst="line">
-                  <a:avLst/>
-                </a:prstGeom>
-                <a:ln w="28575">
-                  <a:solidFill>
-                    <a:schemeClr val="tx1"/>
-                  </a:solidFill>
-                </a:ln>
-              </p:spPr>
-              <p:style>
-                <a:lnRef idx="1">
-                  <a:schemeClr val="accent1"/>
-                </a:lnRef>
-                <a:fillRef idx="0">
-                  <a:schemeClr val="accent1"/>
-                </a:fillRef>
-                <a:effectRef idx="0">
-                  <a:schemeClr val="accent1"/>
-                </a:effectRef>
-                <a:fontRef idx="minor">
-                  <a:schemeClr val="tx1"/>
-                </a:fontRef>
-              </p:style>
-            </p:cxnSp>
-            <p:cxnSp>
-              <p:nvCxnSpPr>
-                <p:cNvPr id="84" name="Straight Connector 83">
-                  <a:extLst>
-                    <a:ext uri="{FF2B5EF4-FFF2-40B4-BE49-F238E27FC236}">
-                      <a16:creationId xmlns:a16="http://schemas.microsoft.com/office/drawing/2014/main" id="{D2019806-1810-2754-5B7C-A1A6B29A84A1}"/>
-                    </a:ext>
-                  </a:extLst>
-                </p:cNvPr>
-                <p:cNvCxnSpPr>
-                  <a:cxnSpLocks/>
-                </p:cNvCxnSpPr>
-                <p:nvPr/>
-              </p:nvCxnSpPr>
-              <p:spPr>
-                <a:xfrm flipH="1">
-                  <a:off x="23206235" y="22460380"/>
-                  <a:ext cx="101441" cy="0"/>
-                </a:xfrm>
-                <a:prstGeom prst="line">
-                  <a:avLst/>
-                </a:prstGeom>
-                <a:ln w="28575">
-                  <a:solidFill>
-                    <a:schemeClr val="tx1"/>
-                  </a:solidFill>
-                </a:ln>
-              </p:spPr>
-              <p:style>
-                <a:lnRef idx="1">
-                  <a:schemeClr val="accent1"/>
-                </a:lnRef>
-                <a:fillRef idx="0">
-                  <a:schemeClr val="accent1"/>
-                </a:fillRef>
-                <a:effectRef idx="0">
-                  <a:schemeClr val="accent1"/>
-                </a:effectRef>
-                <a:fontRef idx="minor">
-                  <a:schemeClr val="tx1"/>
-                </a:fontRef>
-              </p:style>
-            </p:cxnSp>
-            <p:cxnSp>
-              <p:nvCxnSpPr>
-                <p:cNvPr id="88" name="Straight Connector 87">
-                  <a:extLst>
-                    <a:ext uri="{FF2B5EF4-FFF2-40B4-BE49-F238E27FC236}">
-                      <a16:creationId xmlns:a16="http://schemas.microsoft.com/office/drawing/2014/main" id="{C39C2583-AF5E-9147-1881-A54D084C22B2}"/>
-                    </a:ext>
-                  </a:extLst>
-                </p:cNvPr>
-                <p:cNvCxnSpPr>
-                  <a:cxnSpLocks/>
-                </p:cNvCxnSpPr>
-                <p:nvPr/>
-              </p:nvCxnSpPr>
-              <p:spPr>
-                <a:xfrm flipH="1">
-                  <a:off x="23206234" y="19451587"/>
-                  <a:ext cx="101441" cy="0"/>
-                </a:xfrm>
-                <a:prstGeom prst="line">
-                  <a:avLst/>
-                </a:prstGeom>
-                <a:ln w="28575">
-                  <a:solidFill>
-                    <a:schemeClr val="tx1"/>
-                  </a:solidFill>
-                </a:ln>
-              </p:spPr>
-              <p:style>
-                <a:lnRef idx="1">
-                  <a:schemeClr val="accent1"/>
-                </a:lnRef>
-                <a:fillRef idx="0">
-                  <a:schemeClr val="accent1"/>
-                </a:fillRef>
-                <a:effectRef idx="0">
-                  <a:schemeClr val="accent1"/>
-                </a:effectRef>
-                <a:fontRef idx="minor">
-                  <a:schemeClr val="tx1"/>
-                </a:fontRef>
-              </p:style>
-            </p:cxnSp>
-            <p:cxnSp>
-              <p:nvCxnSpPr>
-                <p:cNvPr id="89" name="Straight Connector 88">
-                  <a:extLst>
-                    <a:ext uri="{FF2B5EF4-FFF2-40B4-BE49-F238E27FC236}">
-                      <a16:creationId xmlns:a16="http://schemas.microsoft.com/office/drawing/2014/main" id="{88D0C53F-C03D-460A-49D6-9469DCCD630A}"/>
-                    </a:ext>
-                  </a:extLst>
-                </p:cNvPr>
-                <p:cNvCxnSpPr>
-                  <a:cxnSpLocks/>
-                </p:cNvCxnSpPr>
-                <p:nvPr/>
-              </p:nvCxnSpPr>
-              <p:spPr>
-                <a:xfrm flipH="1">
-                  <a:off x="23206233" y="20956029"/>
-                  <a:ext cx="101441" cy="0"/>
-                </a:xfrm>
-                <a:prstGeom prst="line">
-                  <a:avLst/>
-                </a:prstGeom>
-                <a:ln w="28575">
-                  <a:solidFill>
-                    <a:schemeClr val="tx1"/>
-                  </a:solidFill>
-                </a:ln>
-              </p:spPr>
-              <p:style>
-                <a:lnRef idx="1">
-                  <a:schemeClr val="accent1"/>
-                </a:lnRef>
-                <a:fillRef idx="0">
-                  <a:schemeClr val="accent1"/>
-                </a:fillRef>
-                <a:effectRef idx="0">
-                  <a:schemeClr val="accent1"/>
-                </a:effectRef>
-                <a:fontRef idx="minor">
-                  <a:schemeClr val="tx1"/>
-                </a:fontRef>
-              </p:style>
-            </p:cxnSp>
-          </p:grpSp>
-        </p:grpSp>
-      </p:grpSp>
-    </p:spTree>
   </p:cSld>
   <p:clrMapOvr>
     <a:masterClrMapping/>

--- a/figures/fig3/fig3.pptx
+++ b/figures/fig3/fig3.pptx
@@ -258,7 +258,7 @@
       </p15:sldGuideLst>
     </p:ext>
     <p:ext uri="http://customooxmlschemas.google.com/">
-      <go:slidesCustomData xmlns="" xmlns:mc="http://schemas.openxmlformats.org/markup-compatibility/2006" xmlns:mv="urn:schemas-microsoft-com:mac:vml" xmlns:c="http://schemas.openxmlformats.org/drawingml/2006/chart" xmlns:dgm="http://schemas.openxmlformats.org/drawingml/2006/diagram" xmlns:o="urn:schemas-microsoft-com:office:office" xmlns:v="urn:schemas-microsoft-com:vml" xmlns:pvml="urn:schemas-microsoft-com:office:powerpoint" xmlns:com="http://schemas.openxmlformats.org/drawingml/2006/compatibility" xmlns:p14="http://schemas.microsoft.com/office/powerpoint/2010/main" xmlns:p15="http://schemas.microsoft.com/office/powerpoint/2012/main" xmlns:ahyp="http://schemas.microsoft.com/office/drawing/2018/hyperlinkcolor" xmlns:go="http://customooxmlschemas.google.com/" r:id="rId10" roundtripDataSignature="AMtx7mhiytGPk8UOxiAGs9KaAxakDbg4SQ=="/>
+      <go:slidesCustomData xmlns:go="http://customooxmlschemas.google.com/" xmlns:ahyp="http://schemas.microsoft.com/office/drawing/2018/hyperlinkcolor" xmlns:p15="http://schemas.microsoft.com/office/powerpoint/2012/main" xmlns:p14="http://schemas.microsoft.com/office/powerpoint/2010/main" xmlns:com="http://schemas.openxmlformats.org/drawingml/2006/compatibility" xmlns:pvml="urn:schemas-microsoft-com:office:powerpoint" xmlns:v="urn:schemas-microsoft-com:vml" xmlns:o="urn:schemas-microsoft-com:office:office" xmlns:dgm="http://schemas.openxmlformats.org/drawingml/2006/diagram" xmlns:c="http://schemas.openxmlformats.org/drawingml/2006/chart" xmlns:mv="urn:schemas-microsoft-com:mac:vml" xmlns:mc="http://schemas.openxmlformats.org/markup-compatibility/2006" xmlns="" r:id="rId10" roundtripDataSignature="AMtx7mhiytGPk8UOxiAGs9KaAxakDbg4SQ=="/>
     </p:ext>
   </p:extLst>
 </p:presentation>
@@ -11236,10 +11236,10 @@
       </p:graphicFrame>
       <p:pic>
         <p:nvPicPr>
-          <p:cNvPr id="4" name="Graphic 3">
+          <p:cNvPr id="3" name="Graphic 2">
             <a:extLst>
               <a:ext uri="{FF2B5EF4-FFF2-40B4-BE49-F238E27FC236}">
-                <a16:creationId xmlns:a16="http://schemas.microsoft.com/office/drawing/2014/main" id="{3051C29F-2CCC-7E0B-BC9D-4E31FE4C9600}"/>
+                <a16:creationId xmlns:a16="http://schemas.microsoft.com/office/drawing/2014/main" id="{22CA4DC1-9CED-4624-8896-E9B3237C1F1C}"/>
               </a:ext>
             </a:extLst>
           </p:cNvPr>
@@ -11256,15 +11256,15 @@
               </a:ext>
             </a:extLst>
           </a:blip>
-          <a:srcRect l="3226" r="13710"/>
+          <a:srcRect l="1363" r="13571"/>
           <a:stretch>
             <a:fillRect/>
           </a:stretch>
         </p:blipFill>
         <p:spPr>
           <a:xfrm>
-            <a:off x="1179870" y="8340312"/>
-            <a:ext cx="30381677" cy="16237776"/>
+            <a:off x="498474" y="8524410"/>
+            <a:ext cx="31113639" cy="15869579"/>
           </a:xfrm>
           <a:prstGeom prst="rect">
             <a:avLst/>
@@ -11309,6 +11309,130 @@
       </p:grpSpPr>
       <p:pic>
         <p:nvPicPr>
+          <p:cNvPr id="11" name="Picture 10">
+            <a:extLst>
+              <a:ext uri="{FF2B5EF4-FFF2-40B4-BE49-F238E27FC236}">
+                <a16:creationId xmlns:a16="http://schemas.microsoft.com/office/drawing/2014/main" id="{78F79609-F6C8-CC6F-FB1D-614574F6F587}"/>
+              </a:ext>
+            </a:extLst>
+          </p:cNvPr>
+          <p:cNvPicPr>
+            <a:picLocks noChangeAspect="1"/>
+          </p:cNvPicPr>
+          <p:nvPr/>
+        </p:nvPicPr>
+        <p:blipFill>
+          <a:blip r:embed="rId2"/>
+          <a:srcRect l="20712" t="14130" r="27933" b="21394"/>
+          <a:stretch>
+            <a:fillRect/>
+          </a:stretch>
+        </p:blipFill>
+        <p:spPr>
+          <a:xfrm>
+            <a:off x="18355668" y="17214065"/>
+            <a:ext cx="3285584" cy="2350444"/>
+          </a:xfrm>
+          <a:prstGeom prst="rect">
+            <a:avLst/>
+          </a:prstGeom>
+        </p:spPr>
+      </p:pic>
+      <p:pic>
+        <p:nvPicPr>
+          <p:cNvPr id="9" name="Picture 8">
+            <a:extLst>
+              <a:ext uri="{FF2B5EF4-FFF2-40B4-BE49-F238E27FC236}">
+                <a16:creationId xmlns:a16="http://schemas.microsoft.com/office/drawing/2014/main" id="{48FF0DA9-6830-02E1-81B3-249110A7CB3A}"/>
+              </a:ext>
+            </a:extLst>
+          </p:cNvPr>
+          <p:cNvPicPr>
+            <a:picLocks noChangeAspect="1"/>
+          </p:cNvPicPr>
+          <p:nvPr/>
+        </p:nvPicPr>
+        <p:blipFill>
+          <a:blip r:embed="rId3"/>
+          <a:srcRect l="20458" t="14073" r="27631" b="21670"/>
+          <a:stretch>
+            <a:fillRect/>
+          </a:stretch>
+        </p:blipFill>
+        <p:spPr>
+          <a:xfrm>
+            <a:off x="13062606" y="17214065"/>
+            <a:ext cx="3321196" cy="2342413"/>
+          </a:xfrm>
+          <a:prstGeom prst="rect">
+            <a:avLst/>
+          </a:prstGeom>
+        </p:spPr>
+      </p:pic>
+      <p:pic>
+        <p:nvPicPr>
+          <p:cNvPr id="24" name="Picture 23">
+            <a:extLst>
+              <a:ext uri="{FF2B5EF4-FFF2-40B4-BE49-F238E27FC236}">
+                <a16:creationId xmlns:a16="http://schemas.microsoft.com/office/drawing/2014/main" id="{4F7BD8A3-3012-563B-BC4E-BC1B1E3E012A}"/>
+              </a:ext>
+            </a:extLst>
+          </p:cNvPr>
+          <p:cNvPicPr>
+            <a:picLocks noChangeAspect="1"/>
+          </p:cNvPicPr>
+          <p:nvPr/>
+        </p:nvPicPr>
+        <p:blipFill>
+          <a:blip r:embed="rId4"/>
+          <a:srcRect l="20709" t="14541" r="27622" b="22001"/>
+          <a:stretch>
+            <a:fillRect/>
+          </a:stretch>
+        </p:blipFill>
+        <p:spPr>
+          <a:xfrm>
+            <a:off x="13078195" y="20318082"/>
+            <a:ext cx="3305607" cy="2313317"/>
+          </a:xfrm>
+          <a:prstGeom prst="rect">
+            <a:avLst/>
+          </a:prstGeom>
+        </p:spPr>
+      </p:pic>
+      <p:pic>
+        <p:nvPicPr>
+          <p:cNvPr id="27" name="Picture 26">
+            <a:extLst>
+              <a:ext uri="{FF2B5EF4-FFF2-40B4-BE49-F238E27FC236}">
+                <a16:creationId xmlns:a16="http://schemas.microsoft.com/office/drawing/2014/main" id="{EC029F50-D2E9-A23A-A1F0-466C66E7C74D}"/>
+              </a:ext>
+            </a:extLst>
+          </p:cNvPr>
+          <p:cNvPicPr>
+            <a:picLocks noChangeAspect="1"/>
+          </p:cNvPicPr>
+          <p:nvPr/>
+        </p:nvPicPr>
+        <p:blipFill>
+          <a:blip r:embed="rId5"/>
+          <a:srcRect l="21014" t="13670" r="27631" b="21951"/>
+          <a:stretch>
+            <a:fillRect/>
+          </a:stretch>
+        </p:blipFill>
+        <p:spPr>
+          <a:xfrm>
+            <a:off x="18375911" y="20284519"/>
+            <a:ext cx="3285583" cy="2346880"/>
+          </a:xfrm>
+          <a:prstGeom prst="rect">
+            <a:avLst/>
+          </a:prstGeom>
+        </p:spPr>
+      </p:pic>
+      <p:pic>
+        <p:nvPicPr>
           <p:cNvPr id="55" name="Picture 54">
             <a:extLst>
               <a:ext uri="{FF2B5EF4-FFF2-40B4-BE49-F238E27FC236}">
@@ -11322,7 +11446,7 @@
           <p:nvPr/>
         </p:nvPicPr>
         <p:blipFill>
-          <a:blip r:embed="rId2"/>
+          <a:blip r:embed="rId6"/>
           <a:srcRect l="20693" t="13669" r="27952" b="21961"/>
           <a:stretch>
             <a:fillRect/>
@@ -11360,12 +11484,12 @@
           <a:graphicData uri="http://schemas.openxmlformats.org/presentationml/2006/ole">
             <mc:AlternateContent xmlns:mc="http://schemas.openxmlformats.org/markup-compatibility/2006">
               <mc:Choice xmlns:v="urn:schemas-microsoft-com:vml" Requires="v">
-                <p:oleObj name="Packager Shell Object" showAsIcon="1" r:id="rId3" imgW="400069" imgH="514350" progId="Package">
+                <p:oleObj name="Packager Shell Object" showAsIcon="1" r:id="rId7" imgW="400069" imgH="514350" progId="Package">
                   <p:embed/>
                 </p:oleObj>
               </mc:Choice>
               <mc:Fallback>
-                <p:oleObj name="Packager Shell Object" showAsIcon="1" r:id="rId3" imgW="400069" imgH="514350" progId="Package">
+                <p:oleObj name="Packager Shell Object" showAsIcon="1" r:id="rId7" imgW="400069" imgH="514350" progId="Package">
                   <p:embed/>
                   <p:pic>
                     <p:nvPicPr>
@@ -11380,7 +11504,7 @@
                       <p:nvPr/>
                     </p:nvPicPr>
                     <p:blipFill>
-                      <a:blip r:embed="rId4"/>
+                      <a:blip r:embed="rId8"/>
                       <a:stretch>
                         <a:fillRect/>
                       </a:stretch>
@@ -11423,12 +11547,12 @@
           <a:graphicData uri="http://schemas.openxmlformats.org/presentationml/2006/ole">
             <mc:AlternateContent xmlns:mc="http://schemas.openxmlformats.org/markup-compatibility/2006">
               <mc:Choice xmlns:v="urn:schemas-microsoft-com:vml" Requires="v">
-                <p:oleObj name="Packager Shell Object" showAsIcon="1" r:id="rId5" imgW="400069" imgH="514350" progId="Package">
+                <p:oleObj name="Packager Shell Object" showAsIcon="1" r:id="rId9" imgW="400069" imgH="514350" progId="Package">
                   <p:embed/>
                 </p:oleObj>
               </mc:Choice>
               <mc:Fallback>
-                <p:oleObj name="Packager Shell Object" showAsIcon="1" r:id="rId5" imgW="400069" imgH="514350" progId="Package">
+                <p:oleObj name="Packager Shell Object" showAsIcon="1" r:id="rId9" imgW="400069" imgH="514350" progId="Package">
                   <p:embed/>
                   <p:pic>
                     <p:nvPicPr>
@@ -11443,7 +11567,7 @@
                       <p:nvPr/>
                     </p:nvPicPr>
                     <p:blipFill>
-                      <a:blip r:embed="rId6"/>
+                      <a:blip r:embed="rId10"/>
                       <a:stretch>
                         <a:fillRect/>
                       </a:stretch>
@@ -11466,99 +11590,6 @@
       </p:graphicFrame>
       <p:pic>
         <p:nvPicPr>
-          <p:cNvPr id="9" name="Picture 8">
-            <a:extLst>
-              <a:ext uri="{FF2B5EF4-FFF2-40B4-BE49-F238E27FC236}">
-                <a16:creationId xmlns:a16="http://schemas.microsoft.com/office/drawing/2014/main" id="{FBCD136C-5A76-4A6F-8A93-4C7729D3D115}"/>
-              </a:ext>
-            </a:extLst>
-          </p:cNvPr>
-          <p:cNvPicPr>
-            <a:picLocks noChangeAspect="1"/>
-          </p:cNvPicPr>
-          <p:nvPr/>
-        </p:nvPicPr>
-        <p:blipFill>
-          <a:blip r:embed="rId7"/>
-          <a:srcRect l="21011" t="14116" r="27940" b="21628"/>
-          <a:stretch>
-            <a:fillRect/>
-          </a:stretch>
-        </p:blipFill>
-        <p:spPr>
-          <a:xfrm>
-            <a:off x="13428638" y="17214066"/>
-            <a:ext cx="3265965" cy="2342413"/>
-          </a:xfrm>
-          <a:prstGeom prst="rect">
-            <a:avLst/>
-          </a:prstGeom>
-        </p:spPr>
-      </p:pic>
-      <p:pic>
-        <p:nvPicPr>
-          <p:cNvPr id="10" name="Picture 9">
-            <a:extLst>
-              <a:ext uri="{FF2B5EF4-FFF2-40B4-BE49-F238E27FC236}">
-                <a16:creationId xmlns:a16="http://schemas.microsoft.com/office/drawing/2014/main" id="{DED556C3-1039-B150-83CA-512424ECCE76}"/>
-              </a:ext>
-            </a:extLst>
-          </p:cNvPr>
-          <p:cNvPicPr>
-            <a:picLocks noChangeAspect="1"/>
-          </p:cNvPicPr>
-          <p:nvPr/>
-        </p:nvPicPr>
-        <p:blipFill>
-          <a:blip r:embed="rId8"/>
-          <a:srcRect l="21011" t="14116" r="27940" b="21947"/>
-          <a:stretch>
-            <a:fillRect/>
-          </a:stretch>
-        </p:blipFill>
-        <p:spPr>
-          <a:xfrm>
-            <a:off x="18375288" y="17214066"/>
-            <a:ext cx="3265965" cy="2330735"/>
-          </a:xfrm>
-          <a:prstGeom prst="rect">
-            <a:avLst/>
-          </a:prstGeom>
-        </p:spPr>
-      </p:pic>
-      <p:pic>
-        <p:nvPicPr>
-          <p:cNvPr id="11" name="Picture 10">
-            <a:extLst>
-              <a:ext uri="{FF2B5EF4-FFF2-40B4-BE49-F238E27FC236}">
-                <a16:creationId xmlns:a16="http://schemas.microsoft.com/office/drawing/2014/main" id="{57F8313C-C21E-B46B-24BC-530DF982BFB8}"/>
-              </a:ext>
-            </a:extLst>
-          </p:cNvPr>
-          <p:cNvPicPr>
-            <a:picLocks noChangeAspect="1"/>
-          </p:cNvPicPr>
-          <p:nvPr/>
-        </p:nvPicPr>
-        <p:blipFill>
-          <a:blip r:embed="rId9"/>
-          <a:srcRect l="21011" t="13668" r="26720" b="21963"/>
-          <a:stretch>
-            <a:fillRect/>
-          </a:stretch>
-        </p:blipFill>
-        <p:spPr>
-          <a:xfrm>
-            <a:off x="13428638" y="20284875"/>
-            <a:ext cx="3344070" cy="2346525"/>
-          </a:xfrm>
-          <a:prstGeom prst="rect">
-            <a:avLst/>
-          </a:prstGeom>
-        </p:spPr>
-      </p:pic>
-      <p:pic>
-        <p:nvPicPr>
           <p:cNvPr id="12" name="Picture 11">
             <a:extLst>
               <a:ext uri="{FF2B5EF4-FFF2-40B4-BE49-F238E27FC236}">
@@ -11572,7 +11603,7 @@
           <p:nvPr/>
         </p:nvPicPr>
         <p:blipFill>
-          <a:blip r:embed="rId7"/>
+          <a:blip r:embed="rId11"/>
           <a:srcRect l="72582" t="14725" r="10049" b="63999"/>
           <a:stretch>
             <a:fillRect/>
@@ -11602,7 +11633,7 @@
         </p:nvSpPr>
         <p:spPr>
           <a:xfrm>
-            <a:off x="13539788" y="22861523"/>
+            <a:off x="13209588" y="22861523"/>
             <a:ext cx="3128962" cy="307777"/>
           </a:xfrm>
           <a:prstGeom prst="rect">
@@ -11828,7 +11859,7 @@
         </p:nvSpPr>
         <p:spPr>
           <a:xfrm>
-            <a:off x="11634696" y="17477858"/>
+            <a:off x="11304496" y="17477858"/>
             <a:ext cx="1798320" cy="276999"/>
           </a:xfrm>
           <a:prstGeom prst="rect">
@@ -11864,7 +11895,7 @@
         </p:nvSpPr>
         <p:spPr>
           <a:xfrm>
-            <a:off x="11634696" y="17769143"/>
+            <a:off x="11304496" y="17769143"/>
             <a:ext cx="1798320" cy="276999"/>
           </a:xfrm>
           <a:prstGeom prst="rect">
@@ -11900,7 +11931,7 @@
         </p:nvSpPr>
         <p:spPr>
           <a:xfrm>
-            <a:off x="11634696" y="18062493"/>
+            <a:off x="11304496" y="18062493"/>
             <a:ext cx="1798320" cy="276999"/>
           </a:xfrm>
           <a:prstGeom prst="rect">
@@ -11936,7 +11967,7 @@
         </p:nvSpPr>
         <p:spPr>
           <a:xfrm>
-            <a:off x="11634696" y="18358540"/>
+            <a:off x="11304496" y="18358540"/>
             <a:ext cx="1798320" cy="276999"/>
           </a:xfrm>
           <a:prstGeom prst="rect">
@@ -11972,7 +12003,7 @@
         </p:nvSpPr>
         <p:spPr>
           <a:xfrm>
-            <a:off x="11634696" y="18647547"/>
+            <a:off x="11304496" y="18647547"/>
             <a:ext cx="1798320" cy="276999"/>
           </a:xfrm>
           <a:prstGeom prst="rect">
@@ -12008,7 +12039,7 @@
         </p:nvSpPr>
         <p:spPr>
           <a:xfrm>
-            <a:off x="11634696" y="18944836"/>
+            <a:off x="11304496" y="18944836"/>
             <a:ext cx="1798320" cy="276999"/>
           </a:xfrm>
           <a:prstGeom prst="rect">
@@ -12044,7 +12075,7 @@
         </p:nvSpPr>
         <p:spPr>
           <a:xfrm>
-            <a:off x="11632699" y="21658342"/>
+            <a:off x="11302499" y="21658342"/>
             <a:ext cx="1798320" cy="276999"/>
           </a:xfrm>
           <a:prstGeom prst="rect">
@@ -12226,7 +12257,7 @@
               <p:nvPr/>
             </p:nvPicPr>
             <p:blipFill>
-              <a:blip r:embed="rId7"/>
+              <a:blip r:embed="rId11"/>
               <a:srcRect l="77335" t="70454" r="2272" b="27368"/>
               <a:stretch>
                 <a:fillRect/>
@@ -12862,7 +12893,7 @@
         </p:nvSpPr>
         <p:spPr>
           <a:xfrm>
-            <a:off x="16386235" y="22610325"/>
+            <a:off x="16056035" y="22610325"/>
             <a:ext cx="495300" cy="292388"/>
           </a:xfrm>
           <a:prstGeom prst="rect">
@@ -12898,7 +12929,7 @@
         </p:nvSpPr>
         <p:spPr>
           <a:xfrm>
-            <a:off x="15474217" y="22610324"/>
+            <a:off x="15144017" y="22610324"/>
             <a:ext cx="495300" cy="292388"/>
           </a:xfrm>
           <a:prstGeom prst="rect">
@@ -12934,7 +12965,7 @@
         </p:nvSpPr>
         <p:spPr>
           <a:xfrm>
-            <a:off x="14560386" y="22611639"/>
+            <a:off x="14230186" y="22611639"/>
             <a:ext cx="495300" cy="292388"/>
           </a:xfrm>
           <a:prstGeom prst="rect">
@@ -12970,7 +13001,7 @@
         </p:nvSpPr>
         <p:spPr>
           <a:xfrm>
-            <a:off x="13648275" y="22611639"/>
+            <a:off x="13318075" y="22611639"/>
             <a:ext cx="495300" cy="292388"/>
           </a:xfrm>
           <a:prstGeom prst="rect">
@@ -13006,7 +13037,7 @@
         </p:nvSpPr>
         <p:spPr>
           <a:xfrm>
-            <a:off x="16164781" y="19525491"/>
+            <a:off x="15834581" y="19525491"/>
             <a:ext cx="495300" cy="292388"/>
           </a:xfrm>
           <a:prstGeom prst="rect">
@@ -13042,7 +13073,7 @@
         </p:nvSpPr>
         <p:spPr>
           <a:xfrm>
-            <a:off x="15741556" y="19525316"/>
+            <a:off x="15411356" y="19525316"/>
             <a:ext cx="495300" cy="292388"/>
           </a:xfrm>
           <a:prstGeom prst="rect">
@@ -13078,7 +13109,7 @@
         </p:nvSpPr>
         <p:spPr>
           <a:xfrm>
-            <a:off x="15318331" y="19525141"/>
+            <a:off x="14988131" y="19525141"/>
             <a:ext cx="495300" cy="292388"/>
           </a:xfrm>
           <a:prstGeom prst="rect">
@@ -13114,7 +13145,7 @@
         </p:nvSpPr>
         <p:spPr>
           <a:xfrm>
-            <a:off x="14892725" y="19525070"/>
+            <a:off x="14562525" y="19525070"/>
             <a:ext cx="495300" cy="292388"/>
           </a:xfrm>
           <a:prstGeom prst="rect">
@@ -13150,7 +13181,7 @@
         </p:nvSpPr>
         <p:spPr>
           <a:xfrm>
-            <a:off x="14469500" y="19525070"/>
+            <a:off x="14139300" y="19525070"/>
             <a:ext cx="495300" cy="292388"/>
           </a:xfrm>
           <a:prstGeom prst="rect">
@@ -13186,7 +13217,7 @@
         </p:nvSpPr>
         <p:spPr>
           <a:xfrm>
-            <a:off x="14045399" y="19525070"/>
+            <a:off x="13715199" y="19525070"/>
             <a:ext cx="495300" cy="292388"/>
           </a:xfrm>
           <a:prstGeom prst="rect">
@@ -13222,7 +13253,7 @@
         </p:nvSpPr>
         <p:spPr>
           <a:xfrm>
-            <a:off x="13621896" y="19524894"/>
+            <a:off x="13291696" y="19524894"/>
             <a:ext cx="495300" cy="292388"/>
           </a:xfrm>
           <a:prstGeom prst="rect">
@@ -13474,7 +13505,7 @@
         </p:nvSpPr>
         <p:spPr>
           <a:xfrm>
-            <a:off x="13447200" y="16930687"/>
+            <a:off x="13117000" y="16930687"/>
             <a:ext cx="2978056" cy="307777"/>
           </a:xfrm>
           <a:prstGeom prst="rect">
@@ -13583,7 +13614,7 @@
         </p:nvSpPr>
         <p:spPr>
           <a:xfrm>
-            <a:off x="13447200" y="20015200"/>
+            <a:off x="13117000" y="20015200"/>
             <a:ext cx="2978056" cy="307777"/>
           </a:xfrm>
           <a:prstGeom prst="rect">
@@ -13604,6 +13635,402 @@
           </a:p>
         </p:txBody>
       </p:sp>
+      <p:pic>
+        <p:nvPicPr>
+          <p:cNvPr id="4" name="Graphic 3" descr="Checkmark with solid fill">
+            <a:extLst>
+              <a:ext uri="{FF2B5EF4-FFF2-40B4-BE49-F238E27FC236}">
+                <a16:creationId xmlns:a16="http://schemas.microsoft.com/office/drawing/2014/main" id="{83B6F5AF-F664-CE1C-2554-0F75E1F1DCE0}"/>
+              </a:ext>
+            </a:extLst>
+          </p:cNvPr>
+          <p:cNvPicPr>
+            <a:picLocks noChangeAspect="1"/>
+          </p:cNvPicPr>
+          <p:nvPr/>
+        </p:nvPicPr>
+        <p:blipFill>
+          <a:blip>
+            <a:extLst>
+              <a:ext uri="{96DAC541-7B7A-43D3-8B79-37D633B846F1}">
+                <asvg:svgBlip xmlns:asvg="http://schemas.microsoft.com/office/drawing/2016/SVG/main" r:embed="rId12"/>
+              </a:ext>
+            </a:extLst>
+          </a:blip>
+          <a:stretch>
+            <a:fillRect/>
+          </a:stretch>
+        </p:blipFill>
+        <p:spPr>
+          <a:xfrm>
+            <a:off x="11573167" y="18094867"/>
+            <a:ext cx="210315" cy="210315"/>
+          </a:xfrm>
+          <a:prstGeom prst="rect">
+            <a:avLst/>
+          </a:prstGeom>
+        </p:spPr>
+      </p:pic>
+      <p:pic>
+        <p:nvPicPr>
+          <p:cNvPr id="5" name="Graphic 4" descr="Checkmark with solid fill">
+            <a:extLst>
+              <a:ext uri="{FF2B5EF4-FFF2-40B4-BE49-F238E27FC236}">
+                <a16:creationId xmlns:a16="http://schemas.microsoft.com/office/drawing/2014/main" id="{74D1A007-4CA3-0955-4D58-348143372A4A}"/>
+              </a:ext>
+            </a:extLst>
+          </p:cNvPr>
+          <p:cNvPicPr>
+            <a:picLocks noChangeAspect="1"/>
+          </p:cNvPicPr>
+          <p:nvPr/>
+        </p:nvPicPr>
+        <p:blipFill>
+          <a:blip>
+            <a:extLst>
+              <a:ext uri="{96DAC541-7B7A-43D3-8B79-37D633B846F1}">
+                <asvg:svgBlip xmlns:asvg="http://schemas.microsoft.com/office/drawing/2016/SVG/main" r:embed="rId12"/>
+              </a:ext>
+            </a:extLst>
+          </a:blip>
+          <a:stretch>
+            <a:fillRect/>
+          </a:stretch>
+        </p:blipFill>
+        <p:spPr>
+          <a:xfrm>
+            <a:off x="11671041" y="18682706"/>
+            <a:ext cx="210315" cy="210315"/>
+          </a:xfrm>
+          <a:prstGeom prst="rect">
+            <a:avLst/>
+          </a:prstGeom>
+        </p:spPr>
+      </p:pic>
+      <p:pic>
+        <p:nvPicPr>
+          <p:cNvPr id="8" name="Graphic 7" descr="Checkmark with solid fill">
+            <a:extLst>
+              <a:ext uri="{FF2B5EF4-FFF2-40B4-BE49-F238E27FC236}">
+                <a16:creationId xmlns:a16="http://schemas.microsoft.com/office/drawing/2014/main" id="{B0F70770-B2B2-19D9-BFBF-D506773D7C75}"/>
+              </a:ext>
+            </a:extLst>
+          </p:cNvPr>
+          <p:cNvPicPr>
+            <a:picLocks noChangeAspect="1"/>
+          </p:cNvPicPr>
+          <p:nvPr/>
+        </p:nvPicPr>
+        <p:blipFill>
+          <a:blip>
+            <a:extLst>
+              <a:ext uri="{96DAC541-7B7A-43D3-8B79-37D633B846F1}">
+                <asvg:svgBlip xmlns:asvg="http://schemas.microsoft.com/office/drawing/2016/SVG/main" r:embed="rId12"/>
+              </a:ext>
+            </a:extLst>
+          </a:blip>
+          <a:stretch>
+            <a:fillRect/>
+          </a:stretch>
+        </p:blipFill>
+        <p:spPr>
+          <a:xfrm>
+            <a:off x="11652516" y="18978033"/>
+            <a:ext cx="210315" cy="210315"/>
+          </a:xfrm>
+          <a:prstGeom prst="rect">
+            <a:avLst/>
+          </a:prstGeom>
+        </p:spPr>
+      </p:pic>
+      <p:pic>
+        <p:nvPicPr>
+          <p:cNvPr id="13" name="Graphic 12" descr="Checkmark with solid fill">
+            <a:extLst>
+              <a:ext uri="{FF2B5EF4-FFF2-40B4-BE49-F238E27FC236}">
+                <a16:creationId xmlns:a16="http://schemas.microsoft.com/office/drawing/2014/main" id="{775B7A39-CDBE-E101-B85D-36ECBD6A694B}"/>
+              </a:ext>
+            </a:extLst>
+          </p:cNvPr>
+          <p:cNvPicPr>
+            <a:picLocks noChangeAspect="1"/>
+          </p:cNvPicPr>
+          <p:nvPr/>
+        </p:nvPicPr>
+        <p:blipFill>
+          <a:blip>
+            <a:extLst>
+              <a:ext uri="{96DAC541-7B7A-43D3-8B79-37D633B846F1}">
+                <asvg:svgBlip xmlns:asvg="http://schemas.microsoft.com/office/drawing/2016/SVG/main" r:embed="rId12"/>
+              </a:ext>
+            </a:extLst>
+          </a:blip>
+          <a:stretch>
+            <a:fillRect/>
+          </a:stretch>
+        </p:blipFill>
+        <p:spPr>
+          <a:xfrm>
+            <a:off x="11547215" y="21692394"/>
+            <a:ext cx="210315" cy="210315"/>
+          </a:xfrm>
+          <a:prstGeom prst="rect">
+            <a:avLst/>
+          </a:prstGeom>
+        </p:spPr>
+      </p:pic>
+      <p:pic>
+        <p:nvPicPr>
+          <p:cNvPr id="16" name="Graphic 15" descr="Checkmark with solid fill">
+            <a:extLst>
+              <a:ext uri="{FF2B5EF4-FFF2-40B4-BE49-F238E27FC236}">
+                <a16:creationId xmlns:a16="http://schemas.microsoft.com/office/drawing/2014/main" id="{385C4E47-705E-570C-0809-E9B671F02B0C}"/>
+              </a:ext>
+            </a:extLst>
+          </p:cNvPr>
+          <p:cNvPicPr>
+            <a:picLocks noChangeAspect="1"/>
+          </p:cNvPicPr>
+          <p:nvPr/>
+        </p:nvPicPr>
+        <p:blipFill>
+          <a:blip>
+            <a:extLst>
+              <a:ext uri="{96DAC541-7B7A-43D3-8B79-37D633B846F1}">
+                <asvg:svgBlip xmlns:asvg="http://schemas.microsoft.com/office/drawing/2016/SVG/main" r:embed="rId12"/>
+              </a:ext>
+            </a:extLst>
+          </a:blip>
+          <a:stretch>
+            <a:fillRect/>
+          </a:stretch>
+        </p:blipFill>
+        <p:spPr>
+          <a:xfrm>
+            <a:off x="17425149" y="20597761"/>
+            <a:ext cx="210315" cy="210315"/>
+          </a:xfrm>
+          <a:prstGeom prst="rect">
+            <a:avLst/>
+          </a:prstGeom>
+        </p:spPr>
+      </p:pic>
+      <p:pic>
+        <p:nvPicPr>
+          <p:cNvPr id="17" name="Graphic 16" descr="Checkmark with solid fill">
+            <a:extLst>
+              <a:ext uri="{FF2B5EF4-FFF2-40B4-BE49-F238E27FC236}">
+                <a16:creationId xmlns:a16="http://schemas.microsoft.com/office/drawing/2014/main" id="{02590A61-D6B1-D429-EEA3-836CD88B7274}"/>
+              </a:ext>
+            </a:extLst>
+          </p:cNvPr>
+          <p:cNvPicPr>
+            <a:picLocks noChangeAspect="1"/>
+          </p:cNvPicPr>
+          <p:nvPr/>
+        </p:nvPicPr>
+        <p:blipFill>
+          <a:blip>
+            <a:extLst>
+              <a:ext uri="{96DAC541-7B7A-43D3-8B79-37D633B846F1}">
+                <asvg:svgBlip xmlns:asvg="http://schemas.microsoft.com/office/drawing/2016/SVG/main" r:embed="rId12"/>
+              </a:ext>
+            </a:extLst>
+          </a:blip>
+          <a:stretch>
+            <a:fillRect/>
+          </a:stretch>
+        </p:blipFill>
+        <p:spPr>
+          <a:xfrm>
+            <a:off x="16993118" y="21478088"/>
+            <a:ext cx="210315" cy="210315"/>
+          </a:xfrm>
+          <a:prstGeom prst="rect">
+            <a:avLst/>
+          </a:prstGeom>
+        </p:spPr>
+      </p:pic>
+      <p:pic>
+        <p:nvPicPr>
+          <p:cNvPr id="18" name="Graphic 17" descr="Checkmark with solid fill">
+            <a:extLst>
+              <a:ext uri="{FF2B5EF4-FFF2-40B4-BE49-F238E27FC236}">
+                <a16:creationId xmlns:a16="http://schemas.microsoft.com/office/drawing/2014/main" id="{0FAFB771-2BF3-4481-D7B6-7F43CB05F457}"/>
+              </a:ext>
+            </a:extLst>
+          </p:cNvPr>
+          <p:cNvPicPr>
+            <a:picLocks noChangeAspect="1"/>
+          </p:cNvPicPr>
+          <p:nvPr/>
+        </p:nvPicPr>
+        <p:blipFill>
+          <a:blip>
+            <a:extLst>
+              <a:ext uri="{96DAC541-7B7A-43D3-8B79-37D633B846F1}">
+                <asvg:svgBlip xmlns:asvg="http://schemas.microsoft.com/office/drawing/2016/SVG/main" r:embed="rId12"/>
+              </a:ext>
+            </a:extLst>
+          </a:blip>
+          <a:stretch>
+            <a:fillRect/>
+          </a:stretch>
+        </p:blipFill>
+        <p:spPr>
+          <a:xfrm>
+            <a:off x="16652164" y="22062162"/>
+            <a:ext cx="210315" cy="210315"/>
+          </a:xfrm>
+          <a:prstGeom prst="rect">
+            <a:avLst/>
+          </a:prstGeom>
+        </p:spPr>
+      </p:pic>
+      <p:pic>
+        <p:nvPicPr>
+          <p:cNvPr id="19" name="Graphic 18" descr="Checkmark with solid fill">
+            <a:extLst>
+              <a:ext uri="{FF2B5EF4-FFF2-40B4-BE49-F238E27FC236}">
+                <a16:creationId xmlns:a16="http://schemas.microsoft.com/office/drawing/2014/main" id="{E02355C9-BE0E-75A3-07E8-F68EC1BE9C31}"/>
+              </a:ext>
+            </a:extLst>
+          </p:cNvPr>
+          <p:cNvPicPr>
+            <a:picLocks noChangeAspect="1"/>
+          </p:cNvPicPr>
+          <p:nvPr/>
+        </p:nvPicPr>
+        <p:blipFill>
+          <a:blip>
+            <a:extLst>
+              <a:ext uri="{96DAC541-7B7A-43D3-8B79-37D633B846F1}">
+                <asvg:svgBlip xmlns:asvg="http://schemas.microsoft.com/office/drawing/2016/SVG/main" r:embed="rId12"/>
+              </a:ext>
+            </a:extLst>
+          </a:blip>
+          <a:stretch>
+            <a:fillRect/>
+          </a:stretch>
+        </p:blipFill>
+        <p:spPr>
+          <a:xfrm>
+            <a:off x="16944120" y="18929964"/>
+            <a:ext cx="210315" cy="210315"/>
+          </a:xfrm>
+          <a:prstGeom prst="rect">
+            <a:avLst/>
+          </a:prstGeom>
+        </p:spPr>
+      </p:pic>
+      <p:pic>
+        <p:nvPicPr>
+          <p:cNvPr id="20" name="Graphic 19" descr="Checkmark with solid fill">
+            <a:extLst>
+              <a:ext uri="{FF2B5EF4-FFF2-40B4-BE49-F238E27FC236}">
+                <a16:creationId xmlns:a16="http://schemas.microsoft.com/office/drawing/2014/main" id="{5D1DB798-D25D-78C6-50B6-FB77DC81805C}"/>
+              </a:ext>
+            </a:extLst>
+          </p:cNvPr>
+          <p:cNvPicPr>
+            <a:picLocks noChangeAspect="1"/>
+          </p:cNvPicPr>
+          <p:nvPr/>
+        </p:nvPicPr>
+        <p:blipFill>
+          <a:blip>
+            <a:extLst>
+              <a:ext uri="{96DAC541-7B7A-43D3-8B79-37D633B846F1}">
+                <asvg:svgBlip xmlns:asvg="http://schemas.microsoft.com/office/drawing/2016/SVG/main" r:embed="rId12"/>
+              </a:ext>
+            </a:extLst>
+          </a:blip>
+          <a:stretch>
+            <a:fillRect/>
+          </a:stretch>
+        </p:blipFill>
+        <p:spPr>
+          <a:xfrm>
+            <a:off x="16962423" y="18472107"/>
+            <a:ext cx="210315" cy="210315"/>
+          </a:xfrm>
+          <a:prstGeom prst="rect">
+            <a:avLst/>
+          </a:prstGeom>
+        </p:spPr>
+      </p:pic>
+      <p:pic>
+        <p:nvPicPr>
+          <p:cNvPr id="21" name="Graphic 20" descr="Checkmark with solid fill">
+            <a:extLst>
+              <a:ext uri="{FF2B5EF4-FFF2-40B4-BE49-F238E27FC236}">
+                <a16:creationId xmlns:a16="http://schemas.microsoft.com/office/drawing/2014/main" id="{942743A1-15AD-8E50-72F5-A0D24617FC3D}"/>
+              </a:ext>
+            </a:extLst>
+          </p:cNvPr>
+          <p:cNvPicPr>
+            <a:picLocks noChangeAspect="1"/>
+          </p:cNvPicPr>
+          <p:nvPr/>
+        </p:nvPicPr>
+        <p:blipFill>
+          <a:blip>
+            <a:extLst>
+              <a:ext uri="{96DAC541-7B7A-43D3-8B79-37D633B846F1}">
+                <asvg:svgBlip xmlns:asvg="http://schemas.microsoft.com/office/drawing/2016/SVG/main" r:embed="rId12"/>
+              </a:ext>
+            </a:extLst>
+          </a:blip>
+          <a:stretch>
+            <a:fillRect/>
+          </a:stretch>
+        </p:blipFill>
+        <p:spPr>
+          <a:xfrm>
+            <a:off x="16848875" y="18014716"/>
+            <a:ext cx="210315" cy="210315"/>
+          </a:xfrm>
+          <a:prstGeom prst="rect">
+            <a:avLst/>
+          </a:prstGeom>
+        </p:spPr>
+      </p:pic>
+      <p:pic>
+        <p:nvPicPr>
+          <p:cNvPr id="22" name="Graphic 21" descr="Checkmark with solid fill">
+            <a:extLst>
+              <a:ext uri="{FF2B5EF4-FFF2-40B4-BE49-F238E27FC236}">
+                <a16:creationId xmlns:a16="http://schemas.microsoft.com/office/drawing/2014/main" id="{C0EBD20C-CD8A-51C8-8860-0E56D83A41C3}"/>
+              </a:ext>
+            </a:extLst>
+          </p:cNvPr>
+          <p:cNvPicPr>
+            <a:picLocks noChangeAspect="1"/>
+          </p:cNvPicPr>
+          <p:nvPr/>
+        </p:nvPicPr>
+        <p:blipFill>
+          <a:blip>
+            <a:extLst>
+              <a:ext uri="{96DAC541-7B7A-43D3-8B79-37D633B846F1}">
+                <asvg:svgBlip xmlns:asvg="http://schemas.microsoft.com/office/drawing/2016/SVG/main" r:embed="rId12"/>
+              </a:ext>
+            </a:extLst>
+          </a:blip>
+          <a:stretch>
+            <a:fillRect/>
+          </a:stretch>
+        </p:blipFill>
+        <p:spPr>
+          <a:xfrm>
+            <a:off x="16868984" y="17553967"/>
+            <a:ext cx="210315" cy="210315"/>
+          </a:xfrm>
+          <a:prstGeom prst="rect">
+            <a:avLst/>
+          </a:prstGeom>
+        </p:spPr>
+      </p:pic>
     </p:spTree>
     <p:extLst>
       <p:ext uri="{BB962C8B-B14F-4D97-AF65-F5344CB8AC3E}">
